--- a/docs/圆爱康/02_培训材料/电刺激治疗与生物反馈-盆底康复培训_v4.0.pptx
+++ b/docs/圆爱康/02_培训材料/电刺激治疗与生物反馈-盆底康复培训_v4.0.pptx
@@ -23,6 +23,8 @@
     <p:sldId id="271" r:id="rId22"/>
     <p:sldId id="272" r:id="rId23"/>
     <p:sldId id="273" r:id="rId24"/>
+    <p:sldId id="274" r:id="rId25"/>
+    <p:sldId id="275" r:id="rId26"/>
   </p:sldIdLst>
   <p:sldSz cx="12191695" cy="6858000" type="screen4x3"/>
   <p:notesSz cx="6858000" cy="9144000"/>
@@ -3515,7 +3517,7 @@
               </a:defRPr>
             </a:pPr>
             <a:r>
-              <a:t>第四章  生物反馈与Glazer评估</a:t>
+              <a:t>第三章  电刺激波形深度分类</a:t>
             </a:r>
           </a:p>
         </p:txBody>
@@ -3551,7 +3553,7 @@
               </a:defRPr>
             </a:pPr>
             <a:r>
-              <a:t>▸ ## 生物反馈原理</a:t>
+              <a:t>▸ ## 六种基本波形</a:t>
             </a:r>
           </a:p>
         </p:txBody>
@@ -3587,7 +3589,7 @@
               </a:defRPr>
             </a:pPr>
             <a:r>
-              <a:t>▸ 将生理信号→可视/可听信号</a:t>
+              <a:t>▸ 方波：陡峭沿，高效但舒适度差</a:t>
             </a:r>
           </a:p>
         </p:txBody>
@@ -3623,7 +3625,7 @@
               </a:defRPr>
             </a:pPr>
             <a:r>
-              <a:t>▸ 50%初学Kegel发力错误→提升至90%+</a:t>
+              <a:t>▸ 三角波：缓慢上升，最舒适但效率最低</a:t>
             </a:r>
           </a:p>
         </p:txBody>
@@ -3659,7 +3661,7 @@
               </a:defRPr>
             </a:pPr>
             <a:r>
-              <a:t>▸ 类型：sEMG / 压力 / 视觉</a:t>
+              <a:t>▸ 正弦波：平滑连续，适合TENS镇痛</a:t>
             </a:r>
           </a:p>
         </p:txBody>
@@ -3695,7 +3697,7 @@
               </a:defRPr>
             </a:pPr>
             <a:r>
-              <a:t>▸ ## Glazer五步法</a:t>
+              <a:t>▸ 指数波：模拟动作电位上升支，去神经肌肉首选</a:t>
             </a:r>
           </a:p>
         </p:txBody>
@@ -3731,7 +3733,7 @@
               </a:defRPr>
             </a:pPr>
             <a:r>
-              <a:t>▸ 1) 前静息60s — 静息张力(&lt;4μV)</a:t>
+              <a:t>▸ 双向平衡波：净电荷为零，盆底首选</a:t>
             </a:r>
           </a:p>
         </p:txBody>
@@ -3767,50 +3769,14 @@
               </a:defRPr>
             </a:pPr>
             <a:r>
-              <a:t>▸ 2) 快速收缩10次 — Ⅱ类肌(快肌)</a:t>
-            </a:r>
-          </a:p>
-        </p:txBody>
-      </p:sp>
-      <p:sp>
-        <p:nvSpPr>
-          <p:cNvPr id="11" name="TextBox 10"/>
-          <p:cNvSpPr txBox="1"/>
-          <p:nvPr/>
-        </p:nvSpPr>
-        <p:spPr>
-          <a:xfrm>
-            <a:off x="457200" y="3794760"/>
-            <a:ext cx="5303520" cy="320040"/>
-          </a:xfrm>
-          <a:prstGeom prst="rect">
-            <a:avLst/>
-          </a:prstGeom>
-          <a:noFill/>
-        </p:spPr>
-        <p:txBody>
-          <a:bodyPr wrap="square">
-            <a:spAutoFit/>
-          </a:bodyPr>
-          <a:lstStyle/>
-          <a:p>
-            <a:pPr algn="l">
-              <a:defRPr sz="1500" b="0">
-                <a:solidFill>
-                  <a:srgbClr val="282828"/>
-                </a:solidFill>
-                <a:latin typeface="微软雅黑"/>
-              </a:defRPr>
-            </a:pPr>
-            <a:r>
-              <a:t>▸ 3) 持续收缩5次×10s — Ⅰ类肌(慢肌)</a:t>
-            </a:r>
-          </a:p>
-        </p:txBody>
-      </p:sp>
-      <p:sp>
-        <p:nvSpPr>
-          <p:cNvPr id="12" name="Rectangle 11"/>
+              <a:t>▸ 双向不平衡波：微弱直流效应</a:t>
+            </a:r>
+          </a:p>
+        </p:txBody>
+      </p:sp>
+      <p:sp>
+        <p:nvSpPr>
+          <p:cNvPr id="11" name="Rectangle 10"/>
           <p:cNvSpPr/>
           <p:nvPr/>
         </p:nvSpPr>
@@ -3853,7 +3819,7 @@
       </p:sp>
       <p:sp>
         <p:nvSpPr>
-          <p:cNvPr id="13" name="TextBox 12"/>
+          <p:cNvPr id="12" name="TextBox 11"/>
           <p:cNvSpPr txBox="1"/>
           <p:nvPr/>
         </p:nvSpPr>
@@ -3882,14 +3848,14 @@
               </a:defRPr>
             </a:pPr>
             <a:r>
-              <a:t>▸ ## Glazer五步法（续）</a:t>
-            </a:r>
-          </a:p>
-        </p:txBody>
-      </p:sp>
-      <p:sp>
-        <p:nvSpPr>
-          <p:cNvPr id="14" name="TextBox 13"/>
+              <a:t>▸ ## 波形调制方式</a:t>
+            </a:r>
+          </a:p>
+        </p:txBody>
+      </p:sp>
+      <p:sp>
+        <p:nvSpPr>
+          <p:cNvPr id="13" name="TextBox 12"/>
           <p:cNvSpPr txBox="1"/>
           <p:nvPr/>
         </p:nvSpPr>
@@ -3918,14 +3884,14 @@
               </a:defRPr>
             </a:pPr>
             <a:r>
-              <a:t>▸ 4) 耐力收缩60s — 肌肉耐力</a:t>
-            </a:r>
-          </a:p>
-        </p:txBody>
-      </p:sp>
-      <p:sp>
-        <p:nvSpPr>
-          <p:cNvPr id="15" name="TextBox 14"/>
+              <a:t>▸ 连续波(CW)：恒定输出 → 持续收缩</a:t>
+            </a:r>
+          </a:p>
+        </p:txBody>
+      </p:sp>
+      <p:sp>
+        <p:nvSpPr>
+          <p:cNvPr id="14" name="TextBox 13"/>
           <p:cNvSpPr txBox="1"/>
           <p:nvPr/>
         </p:nvSpPr>
@@ -3954,14 +3920,14 @@
               </a:defRPr>
             </a:pPr>
             <a:r>
-              <a:t>▸ 5) 后静息60s — 放松能力</a:t>
-            </a:r>
-          </a:p>
-        </p:txBody>
-      </p:sp>
-      <p:sp>
-        <p:nvSpPr>
-          <p:cNvPr id="16" name="TextBox 15"/>
+              <a:t>▸ 间歇波(Burst)：群+休止 → 防疲劳</a:t>
+            </a:r>
+          </a:p>
+        </p:txBody>
+      </p:sp>
+      <p:sp>
+        <p:nvSpPr>
+          <p:cNvPr id="15" name="TextBox 14"/>
           <p:cNvSpPr txBox="1"/>
           <p:nvPr/>
         </p:nvSpPr>
@@ -3990,14 +3956,14 @@
               </a:defRPr>
             </a:pPr>
             <a:r>
-              <a:t>▸ ## 报告解读三型</a:t>
-            </a:r>
-          </a:p>
-        </p:txBody>
-      </p:sp>
-      <p:sp>
-        <p:nvSpPr>
-          <p:cNvPr id="17" name="TextBox 16"/>
+              <a:t>▸ 调幅波(AM)：幅度变化 → 防适应性</a:t>
+            </a:r>
+          </a:p>
+        </p:txBody>
+      </p:sp>
+      <p:sp>
+        <p:nvSpPr>
+          <p:cNvPr id="16" name="TextBox 15"/>
           <p:cNvSpPr txBox="1"/>
           <p:nvPr/>
         </p:nvSpPr>
@@ -4026,14 +3992,14 @@
               </a:defRPr>
             </a:pPr>
             <a:r>
-              <a:t>▸ 高张力型：基线高，收缩受限→放松训练</a:t>
-            </a:r>
-          </a:p>
-        </p:txBody>
-      </p:sp>
-      <p:sp>
-        <p:nvSpPr>
-          <p:cNvPr id="18" name="TextBox 17"/>
+              <a:t>▸ 调频波(FM)：频率变化 → 覆盖多肌纤维</a:t>
+            </a:r>
+          </a:p>
+        </p:txBody>
+      </p:sp>
+      <p:sp>
+        <p:nvSpPr>
+          <p:cNvPr id="17" name="TextBox 16"/>
           <p:cNvSpPr txBox="1"/>
           <p:nvPr/>
         </p:nvSpPr>
@@ -4062,14 +4028,14 @@
               </a:defRPr>
             </a:pPr>
             <a:r>
-              <a:t>▸ 低张力型：基线正常，收缩低→NMES强化</a:t>
-            </a:r>
-          </a:p>
-        </p:txBody>
-      </p:sp>
-      <p:sp>
-        <p:nvSpPr>
-          <p:cNvPr id="19" name="TextBox 18"/>
+              <a:t>▸ ## 关键关系</a:t>
+            </a:r>
+          </a:p>
+        </p:txBody>
+      </p:sp>
+      <p:sp>
+        <p:nvSpPr>
+          <p:cNvPr id="18" name="TextBox 17"/>
           <p:cNvSpPr txBox="1"/>
           <p:nvPr/>
         </p:nvSpPr>
@@ -4098,14 +4064,14 @@
               </a:defRPr>
             </a:pPr>
             <a:r>
-              <a:t>▸ 混合型：先放松后强化</a:t>
-            </a:r>
-          </a:p>
-        </p:txBody>
-      </p:sp>
-      <p:sp>
-        <p:nvSpPr>
-          <p:cNvPr id="20" name="TextBox 19"/>
+              <a:t>▸ 窄脉宽 → 需更高强度才能激活运动单位</a:t>
+            </a:r>
+          </a:p>
+        </p:txBody>
+      </p:sp>
+      <p:sp>
+        <p:nvSpPr>
+          <p:cNvPr id="19" name="TextBox 18"/>
           <p:cNvSpPr txBox="1"/>
           <p:nvPr/>
         </p:nvSpPr>
@@ -4134,43 +4100,7 @@
               </a:defRPr>
             </a:pPr>
             <a:r>
-              <a:t>▸ 📌 AI辅助分析趋势：部分高端设备已支持自动识别收缩模式异常</a:t>
-            </a:r>
-          </a:p>
-        </p:txBody>
-      </p:sp>
-      <p:sp>
-        <p:nvSpPr>
-          <p:cNvPr id="21" name="TextBox 20"/>
-          <p:cNvSpPr txBox="1"/>
-          <p:nvPr/>
-        </p:nvSpPr>
-        <p:spPr>
-          <a:xfrm>
-            <a:off x="6217920" y="4114800"/>
-            <a:ext cx="5486400" cy="320040"/>
-          </a:xfrm>
-          <a:prstGeom prst="rect">
-            <a:avLst/>
-          </a:prstGeom>
-          <a:noFill/>
-        </p:spPr>
-        <p:txBody>
-          <a:bodyPr wrap="square">
-            <a:spAutoFit/>
-          </a:bodyPr>
-          <a:lstStyle/>
-          <a:p>
-            <a:pPr algn="l">
-              <a:defRPr sz="1500" b="0">
-                <a:solidFill>
-                  <a:srgbClr val="282828"/>
-                </a:solidFill>
-                <a:latin typeface="微软雅黑"/>
-              </a:defRPr>
-            </a:pPr>
-            <a:r>
-              <a:t>▸ 📌 可配合评估报告样例截图，使教学更具体</a:t>
+              <a:t>▸ 宽脉宽(&gt;300μs) → 激活阈值低，舒适度下降</a:t>
             </a:r>
           </a:p>
         </p:txBody>
@@ -4275,7 +4205,7 @@
               </a:defRPr>
             </a:pPr>
             <a:r>
-              <a:t>第五章  综合治疗路径</a:t>
+              <a:t>波形选择决策树</a:t>
             </a:r>
           </a:p>
         </p:txBody>
@@ -4288,30 +4218,30 @@
         </p:nvSpPr>
         <p:spPr>
           <a:xfrm>
-            <a:off x="640080" y="1463040"/>
-            <a:ext cx="10972800" cy="365760"/>
-          </a:xfrm>
-          <a:prstGeom prst="rect">
-            <a:avLst/>
-          </a:prstGeom>
-          <a:noFill/>
-        </p:spPr>
-        <p:txBody>
-          <a:bodyPr wrap="square">
-            <a:spAutoFit/>
-          </a:bodyPr>
-          <a:lstStyle/>
-          <a:p>
-            <a:pPr algn="l">
-              <a:defRPr sz="1700" b="1">
-                <a:solidFill>
-                  <a:srgbClr val="004C80"/>
-                </a:solidFill>
-                <a:latin typeface="微软雅黑"/>
-              </a:defRPr>
-            </a:pPr>
-            <a:r>
-              <a:t>标准接诊流程</a:t>
+            <a:off x="822960" y="1463040"/>
+            <a:ext cx="10332720" cy="320040"/>
+          </a:xfrm>
+          <a:prstGeom prst="rect">
+            <a:avLst/>
+          </a:prstGeom>
+          <a:noFill/>
+        </p:spPr>
+        <p:txBody>
+          <a:bodyPr wrap="square">
+            <a:spAutoFit/>
+          </a:bodyPr>
+          <a:lstStyle/>
+          <a:p>
+            <a:pPr algn="l">
+              <a:defRPr sz="1600" b="0">
+                <a:solidFill>
+                  <a:srgbClr val="282828"/>
+                </a:solidFill>
+                <a:latin typeface="微软雅黑"/>
+              </a:defRPr>
+            </a:pPr>
+            <a:r>
+              <a:t>▸ 是否需要深层作用？</a:t>
             </a:r>
           </a:p>
         </p:txBody>
@@ -4324,7 +4254,7 @@
         </p:nvSpPr>
         <p:spPr>
           <a:xfrm>
-            <a:off x="822960" y="1828800"/>
+            <a:off x="822960" y="1783080"/>
             <a:ext cx="10332720" cy="320040"/>
           </a:xfrm>
           <a:prstGeom prst="rect">
@@ -4347,7 +4277,7 @@
               </a:defRPr>
             </a:pPr>
             <a:r>
-              <a:t>▸ 第一步：问诊（主诉、分娩史、手术史、生活方式）</a:t>
+              <a:t>▸   ├─ 是 → 中频干扰电（IFC）</a:t>
             </a:r>
           </a:p>
         </p:txBody>
@@ -4360,7 +4290,7 @@
         </p:nvSpPr>
         <p:spPr>
           <a:xfrm>
-            <a:off x="822960" y="2148840"/>
+            <a:off x="822960" y="2103120"/>
             <a:ext cx="10332720" cy="320040"/>
           </a:xfrm>
           <a:prstGeom prst="rect">
@@ -4383,7 +4313,7 @@
               </a:defRPr>
             </a:pPr>
             <a:r>
-              <a:t>▸ 第二步：体格检查（盆腔/POP-Q/触诊）</a:t>
+              <a:t>▸   └─ 否 → 继续判断</a:t>
             </a:r>
           </a:p>
         </p:txBody>
@@ -4396,7 +4326,7 @@
         </p:nvSpPr>
         <p:spPr>
           <a:xfrm>
-            <a:off x="822960" y="2468880"/>
+            <a:off x="822960" y="2423160"/>
             <a:ext cx="10332720" cy="320040"/>
           </a:xfrm>
           <a:prstGeom prst="rect">
@@ -4419,7 +4349,7 @@
               </a:defRPr>
             </a:pPr>
             <a:r>
-              <a:t>▸ 第三步：辅助评估（Glazer/尿流率/超声）</a:t>
+              <a:t>▸ 是否需要组织修复（外阴白斑、伤口愈合）？</a:t>
             </a:r>
           </a:p>
         </p:txBody>
@@ -4432,7 +4362,7 @@
         </p:nvSpPr>
         <p:spPr>
           <a:xfrm>
-            <a:off x="822960" y="2788920"/>
+            <a:off x="822960" y="2743200"/>
             <a:ext cx="10332720" cy="320040"/>
           </a:xfrm>
           <a:prstGeom prst="rect">
@@ -4455,7 +4385,7 @@
               </a:defRPr>
             </a:pPr>
             <a:r>
-              <a:t>▸ 第四步：制定方案（分型→目标→参数选择）</a:t>
+              <a:t>▸   ├─ 是 → MENS微电流 + 双向平衡波</a:t>
             </a:r>
           </a:p>
         </p:txBody>
@@ -4468,7 +4398,7 @@
         </p:nvSpPr>
         <p:spPr>
           <a:xfrm>
-            <a:off x="822960" y="3108960"/>
+            <a:off x="822960" y="3063240"/>
             <a:ext cx="10332720" cy="320040"/>
           </a:xfrm>
           <a:prstGeom prst="rect">
@@ -4491,7 +4421,7 @@
               </a:defRPr>
             </a:pPr>
             <a:r>
-              <a:t>▸ 第五步：执行与随访（每周2-3次，10-15次/疗程）</a:t>
+              <a:t>▸   └─ 否 → 继续判断</a:t>
             </a:r>
           </a:p>
         </p:txBody>
@@ -4504,30 +4434,30 @@
         </p:nvSpPr>
         <p:spPr>
           <a:xfrm>
-            <a:off x="640080" y="3429000"/>
-            <a:ext cx="10972800" cy="365760"/>
-          </a:xfrm>
-          <a:prstGeom prst="rect">
-            <a:avLst/>
-          </a:prstGeom>
-          <a:noFill/>
-        </p:spPr>
-        <p:txBody>
-          <a:bodyPr wrap="square">
-            <a:spAutoFit/>
-          </a:bodyPr>
-          <a:lstStyle/>
-          <a:p>
-            <a:pPr algn="l">
-              <a:defRPr sz="1700" b="1">
-                <a:solidFill>
-                  <a:srgbClr val="004C80"/>
-                </a:solidFill>
-                <a:latin typeface="微软雅黑"/>
-              </a:defRPr>
-            </a:pPr>
-            <a:r>
-              <a:t>三阶段治疗策略</a:t>
+            <a:off x="822960" y="3383280"/>
+            <a:ext cx="10332720" cy="320040"/>
+          </a:xfrm>
+          <a:prstGeom prst="rect">
+            <a:avLst/>
+          </a:prstGeom>
+          <a:noFill/>
+        </p:spPr>
+        <p:txBody>
+          <a:bodyPr wrap="square">
+            <a:spAutoFit/>
+          </a:bodyPr>
+          <a:lstStyle/>
+          <a:p>
+            <a:pPr algn="l">
+              <a:defRPr sz="1600" b="0">
+                <a:solidFill>
+                  <a:srgbClr val="282828"/>
+                </a:solidFill>
+                <a:latin typeface="微软雅黑"/>
+              </a:defRPr>
+            </a:pPr>
+            <a:r>
+              <a:t>▸ 是否需要肌肉力量重建？</a:t>
             </a:r>
           </a:p>
         </p:txBody>
@@ -4540,7 +4470,7 @@
         </p:nvSpPr>
         <p:spPr>
           <a:xfrm>
-            <a:off x="822960" y="3794760"/>
+            <a:off x="822960" y="3703320"/>
             <a:ext cx="10332720" cy="320040"/>
           </a:xfrm>
           <a:prstGeom prst="rect">
@@ -4563,7 +4493,7 @@
               </a:defRPr>
             </a:pPr>
             <a:r>
-              <a:t>▸ 引导期(第1-4次)：电刺激70%+生物反馈30% → 建立肌肉激活感</a:t>
+              <a:t>▸   ├─ 是 → NMES + 方波/双向平衡波</a:t>
             </a:r>
           </a:p>
         </p:txBody>
@@ -4576,7 +4506,7 @@
         </p:nvSpPr>
         <p:spPr>
           <a:xfrm>
-            <a:off x="822960" y="4114800"/>
+            <a:off x="822960" y="4023360"/>
             <a:ext cx="10332720" cy="320040"/>
           </a:xfrm>
           <a:prstGeom prst="rect">
@@ -4599,7 +4529,7 @@
               </a:defRPr>
             </a:pPr>
             <a:r>
-              <a:t>▸ 强化期(第5-10次)：电刺激40%+生物反馈60% → 提升肌力耐力</a:t>
+              <a:t>▸   └─ 否 → 继续判断</a:t>
             </a:r>
           </a:p>
         </p:txBody>
@@ -4612,7 +4542,7 @@
         </p:nvSpPr>
         <p:spPr>
           <a:xfrm>
-            <a:off x="822960" y="4434840"/>
+            <a:off x="822960" y="4343400"/>
             <a:ext cx="10332720" cy="320040"/>
           </a:xfrm>
           <a:prstGeom prst="rect">
@@ -4635,7 +4565,7 @@
               </a:defRPr>
             </a:pPr>
             <a:r>
-              <a:t>▸ 自主期(第11-15次)：电刺激10%+生物反馈90% → 完全自主控制</a:t>
+              <a:t>▸ 是否以镇痛为主？</a:t>
             </a:r>
           </a:p>
         </p:txBody>
@@ -4648,30 +4578,30 @@
         </p:nvSpPr>
         <p:spPr>
           <a:xfrm>
-            <a:off x="640080" y="4754880"/>
-            <a:ext cx="10972800" cy="365760"/>
-          </a:xfrm>
-          <a:prstGeom prst="rect">
-            <a:avLst/>
-          </a:prstGeom>
-          <a:noFill/>
-        </p:spPr>
-        <p:txBody>
-          <a:bodyPr wrap="square">
-            <a:spAutoFit/>
-          </a:bodyPr>
-          <a:lstStyle/>
-          <a:p>
-            <a:pPr algn="l">
-              <a:defRPr sz="1700" b="1">
-                <a:solidFill>
-                  <a:srgbClr val="004C80"/>
-                </a:solidFill>
-                <a:latin typeface="微软雅黑"/>
-              </a:defRPr>
-            </a:pPr>
-            <a:r>
-              <a:t>家庭训练依从性管理</a:t>
+            <a:off x="822960" y="4663440"/>
+            <a:ext cx="10332720" cy="320040"/>
+          </a:xfrm>
+          <a:prstGeom prst="rect">
+            <a:avLst/>
+          </a:prstGeom>
+          <a:noFill/>
+        </p:spPr>
+        <p:txBody>
+          <a:bodyPr wrap="square">
+            <a:spAutoFit/>
+          </a:bodyPr>
+          <a:lstStyle/>
+          <a:p>
+            <a:pPr algn="l">
+              <a:defRPr sz="1600" b="0">
+                <a:solidFill>
+                  <a:srgbClr val="282828"/>
+                </a:solidFill>
+                <a:latin typeface="微软雅黑"/>
+              </a:defRPr>
+            </a:pPr>
+            <a:r>
+              <a:t>▸   ├─ 是 → TENS + 正弦波/三角波</a:t>
             </a:r>
           </a:p>
         </p:txBody>
@@ -4684,7 +4614,7 @@
         </p:nvSpPr>
         <p:spPr>
           <a:xfrm>
-            <a:off x="822960" y="5120640"/>
+            <a:off x="822960" y="4983480"/>
             <a:ext cx="10332720" cy="320040"/>
           </a:xfrm>
           <a:prstGeom prst="rect">
@@ -4707,7 +4637,7 @@
               </a:defRPr>
             </a:pPr>
             <a:r>
-              <a:t>▸ APP打卡+视频指导 → 提升居家康复完成率</a:t>
+              <a:t>▸   └─ 否 → 综合评估后定制</a:t>
             </a:r>
           </a:p>
         </p:txBody>
@@ -4720,30 +4650,30 @@
         </p:nvSpPr>
         <p:spPr>
           <a:xfrm>
-            <a:off x="822960" y="5440680"/>
-            <a:ext cx="10332720" cy="320040"/>
-          </a:xfrm>
-          <a:prstGeom prst="rect">
-            <a:avLst/>
-          </a:prstGeom>
-          <a:noFill/>
-        </p:spPr>
-        <p:txBody>
-          <a:bodyPr wrap="square">
-            <a:spAutoFit/>
-          </a:bodyPr>
-          <a:lstStyle/>
-          <a:p>
-            <a:pPr algn="l">
-              <a:defRPr sz="1600" b="0">
-                <a:solidFill>
-                  <a:srgbClr val="282828"/>
-                </a:solidFill>
-                <a:latin typeface="微软雅黑"/>
-              </a:defRPr>
-            </a:pPr>
-            <a:r>
-              <a:t>▸ 参考ACOG指南：产后42天开始干预（恶露干净后）</a:t>
+            <a:off x="640080" y="5303520"/>
+            <a:ext cx="10515600" cy="320040"/>
+          </a:xfrm>
+          <a:prstGeom prst="rect">
+            <a:avLst/>
+          </a:prstGeom>
+          <a:noFill/>
+        </p:spPr>
+        <p:txBody>
+          <a:bodyPr wrap="square">
+            <a:spAutoFit/>
+          </a:bodyPr>
+          <a:lstStyle/>
+          <a:p>
+            <a:pPr algn="l">
+              <a:defRPr sz="1400" b="0">
+                <a:solidFill>
+                  <a:srgbClr val="E67E22"/>
+                </a:solidFill>
+                <a:latin typeface="微软雅黑"/>
+              </a:defRPr>
+            </a:pPr>
+            <a:r>
+              <a:t>📌 补充：指数波适用于去神经肌肉（如脊髓损伤后），因模拟动作电位上升支更接近生理状态</a:t>
             </a:r>
           </a:p>
         </p:txBody>
@@ -4756,7 +4686,7 @@
         </p:nvSpPr>
         <p:spPr>
           <a:xfrm>
-            <a:off x="640080" y="5760720"/>
+            <a:off x="640080" y="5623560"/>
             <a:ext cx="10515600" cy="320040"/>
           </a:xfrm>
           <a:prstGeom prst="rect">
@@ -4779,7 +4709,7 @@
               </a:defRPr>
             </a:pPr>
             <a:r>
-              <a:t>📌 扩展：加入'家庭训练依从性管理'模块，呼应居家康复主题</a:t>
+              <a:t>📌 补充：窄脉宽需更高电流强度才能激活运动单位——脉宽与阈值电流呈反比关系</a:t>
             </a:r>
           </a:p>
         </p:txBody>
@@ -4876,7 +4806,7 @@
           <a:lstStyle/>
           <a:p>
             <a:pPr algn="l">
-              <a:defRPr sz="2800" b="1">
+              <a:defRPr sz="2600" b="1">
                 <a:solidFill>
                   <a:srgbClr val="FFFFFF"/>
                 </a:solidFill>
@@ -4884,7 +4814,7 @@
               </a:defRPr>
             </a:pPr>
             <a:r>
-              <a:t>第六章  常见误区澄清与患者教育</a:t>
+              <a:t>第四章  生物反馈与Glazer评估</a:t>
             </a:r>
           </a:p>
         </p:txBody>
@@ -4897,30 +4827,30 @@
         </p:nvSpPr>
         <p:spPr>
           <a:xfrm>
-            <a:off x="640080" y="1463040"/>
-            <a:ext cx="10972800" cy="365760"/>
-          </a:xfrm>
-          <a:prstGeom prst="rect">
-            <a:avLst/>
-          </a:prstGeom>
-          <a:noFill/>
-        </p:spPr>
-        <p:txBody>
-          <a:bodyPr wrap="square">
-            <a:spAutoFit/>
-          </a:bodyPr>
-          <a:lstStyle/>
-          <a:p>
-            <a:pPr algn="l">
-              <a:defRPr sz="1700" b="1">
-                <a:solidFill>
-                  <a:srgbClr val="004C80"/>
-                </a:solidFill>
-                <a:latin typeface="微软雅黑"/>
-              </a:defRPr>
-            </a:pPr>
-            <a:r>
-              <a:t>误区与真相</a:t>
+            <a:off x="457200" y="1554480"/>
+            <a:ext cx="5303520" cy="320040"/>
+          </a:xfrm>
+          <a:prstGeom prst="rect">
+            <a:avLst/>
+          </a:prstGeom>
+          <a:noFill/>
+        </p:spPr>
+        <p:txBody>
+          <a:bodyPr wrap="square">
+            <a:spAutoFit/>
+          </a:bodyPr>
+          <a:lstStyle/>
+          <a:p>
+            <a:pPr algn="l">
+              <a:defRPr sz="1500" b="0">
+                <a:solidFill>
+                  <a:srgbClr val="282828"/>
+                </a:solidFill>
+                <a:latin typeface="微软雅黑"/>
+              </a:defRPr>
+            </a:pPr>
+            <a:r>
+              <a:t>▸ ## 生物反馈原理</a:t>
             </a:r>
           </a:p>
         </p:txBody>
@@ -4933,30 +4863,30 @@
         </p:nvSpPr>
         <p:spPr>
           <a:xfrm>
-            <a:off x="822960" y="1828800"/>
-            <a:ext cx="10332720" cy="320040"/>
-          </a:xfrm>
-          <a:prstGeom prst="rect">
-            <a:avLst/>
-          </a:prstGeom>
-          <a:noFill/>
-        </p:spPr>
-        <p:txBody>
-          <a:bodyPr wrap="square">
-            <a:spAutoFit/>
-          </a:bodyPr>
-          <a:lstStyle/>
-          <a:p>
-            <a:pPr algn="l">
-              <a:defRPr sz="1600" b="0">
-                <a:solidFill>
-                  <a:srgbClr val="282828"/>
-                </a:solidFill>
-                <a:latin typeface="微软雅黑"/>
-              </a:defRPr>
-            </a:pPr>
-            <a:r>
-              <a:t>▸ 误区1：只有顺产才需盆底康复 → 80%产后女性存在损伤，剖宫产同需评估</a:t>
+            <a:off x="457200" y="1874520"/>
+            <a:ext cx="5303520" cy="320040"/>
+          </a:xfrm>
+          <a:prstGeom prst="rect">
+            <a:avLst/>
+          </a:prstGeom>
+          <a:noFill/>
+        </p:spPr>
+        <p:txBody>
+          <a:bodyPr wrap="square">
+            <a:spAutoFit/>
+          </a:bodyPr>
+          <a:lstStyle/>
+          <a:p>
+            <a:pPr algn="l">
+              <a:defRPr sz="1500" b="0">
+                <a:solidFill>
+                  <a:srgbClr val="282828"/>
+                </a:solidFill>
+                <a:latin typeface="微软雅黑"/>
+              </a:defRPr>
+            </a:pPr>
+            <a:r>
+              <a:t>▸ 将生理信号→可视/可听信号</a:t>
             </a:r>
           </a:p>
         </p:txBody>
@@ -4969,30 +4899,30 @@
         </p:nvSpPr>
         <p:spPr>
           <a:xfrm>
-            <a:off x="822960" y="2148840"/>
-            <a:ext cx="10332720" cy="320040"/>
-          </a:xfrm>
-          <a:prstGeom prst="rect">
-            <a:avLst/>
-          </a:prstGeom>
-          <a:noFill/>
-        </p:spPr>
-        <p:txBody>
-          <a:bodyPr wrap="square">
-            <a:spAutoFit/>
-          </a:bodyPr>
-          <a:lstStyle/>
-          <a:p>
-            <a:pPr algn="l">
-              <a:defRPr sz="1600" b="0">
-                <a:solidFill>
-                  <a:srgbClr val="282828"/>
-                </a:solidFill>
-                <a:latin typeface="微软雅黑"/>
-              </a:defRPr>
-            </a:pPr>
-            <a:r>
-              <a:t>▸    ➤ 依据：妊娠本身对盆底的压迫和激素影响（《中华妇产科杂志》2023综述）</a:t>
+            <a:off x="457200" y="2194560"/>
+            <a:ext cx="5303520" cy="320040"/>
+          </a:xfrm>
+          <a:prstGeom prst="rect">
+            <a:avLst/>
+          </a:prstGeom>
+          <a:noFill/>
+        </p:spPr>
+        <p:txBody>
+          <a:bodyPr wrap="square">
+            <a:spAutoFit/>
+          </a:bodyPr>
+          <a:lstStyle/>
+          <a:p>
+            <a:pPr algn="l">
+              <a:defRPr sz="1500" b="0">
+                <a:solidFill>
+                  <a:srgbClr val="282828"/>
+                </a:solidFill>
+                <a:latin typeface="微软雅黑"/>
+              </a:defRPr>
+            </a:pPr>
+            <a:r>
+              <a:t>▸ 50%初学Kegel发力错误→提升至90%+</a:t>
             </a:r>
           </a:p>
         </p:txBody>
@@ -5005,30 +4935,30 @@
         </p:nvSpPr>
         <p:spPr>
           <a:xfrm>
-            <a:off x="822960" y="2468880"/>
-            <a:ext cx="10332720" cy="320040"/>
-          </a:xfrm>
-          <a:prstGeom prst="rect">
-            <a:avLst/>
-          </a:prstGeom>
-          <a:noFill/>
-        </p:spPr>
-        <p:txBody>
-          <a:bodyPr wrap="square">
-            <a:spAutoFit/>
-          </a:bodyPr>
-          <a:lstStyle/>
-          <a:p>
-            <a:pPr algn="l">
-              <a:defRPr sz="1600" b="0">
-                <a:solidFill>
-                  <a:srgbClr val="282828"/>
-                </a:solidFill>
-                <a:latin typeface="微软雅黑"/>
-              </a:defRPr>
-            </a:pPr>
-            <a:r>
-              <a:t>▸ 误区2：电刺激=疼痛 → 正确参数下应仅有酥麻感或肌肉收缩感</a:t>
+            <a:off x="457200" y="2514600"/>
+            <a:ext cx="5303520" cy="320040"/>
+          </a:xfrm>
+          <a:prstGeom prst="rect">
+            <a:avLst/>
+          </a:prstGeom>
+          <a:noFill/>
+        </p:spPr>
+        <p:txBody>
+          <a:bodyPr wrap="square">
+            <a:spAutoFit/>
+          </a:bodyPr>
+          <a:lstStyle/>
+          <a:p>
+            <a:pPr algn="l">
+              <a:defRPr sz="1500" b="0">
+                <a:solidFill>
+                  <a:srgbClr val="282828"/>
+                </a:solidFill>
+                <a:latin typeface="微软雅黑"/>
+              </a:defRPr>
+            </a:pPr>
+            <a:r>
+              <a:t>▸ 类型：sEMG / 压力 / 视觉</a:t>
             </a:r>
           </a:p>
         </p:txBody>
@@ -5041,30 +4971,30 @@
         </p:nvSpPr>
         <p:spPr>
           <a:xfrm>
-            <a:off x="822960" y="2788920"/>
-            <a:ext cx="10332720" cy="320040"/>
-          </a:xfrm>
-          <a:prstGeom prst="rect">
-            <a:avLst/>
-          </a:prstGeom>
-          <a:noFill/>
-        </p:spPr>
-        <p:txBody>
-          <a:bodyPr wrap="square">
-            <a:spAutoFit/>
-          </a:bodyPr>
-          <a:lstStyle/>
-          <a:p>
-            <a:pPr algn="l">
-              <a:defRPr sz="1600" b="0">
-                <a:solidFill>
-                  <a:srgbClr val="282828"/>
-                </a:solidFill>
-                <a:latin typeface="微软雅黑"/>
-              </a:defRPr>
-            </a:pPr>
-            <a:r>
-              <a:t>▸    ➤ 话术：'如果有刺痛感，请立即告诉我，我们调整参数'</a:t>
+            <a:off x="457200" y="2834640"/>
+            <a:ext cx="5303520" cy="320040"/>
+          </a:xfrm>
+          <a:prstGeom prst="rect">
+            <a:avLst/>
+          </a:prstGeom>
+          <a:noFill/>
+        </p:spPr>
+        <p:txBody>
+          <a:bodyPr wrap="square">
+            <a:spAutoFit/>
+          </a:bodyPr>
+          <a:lstStyle/>
+          <a:p>
+            <a:pPr algn="l">
+              <a:defRPr sz="1500" b="0">
+                <a:solidFill>
+                  <a:srgbClr val="282828"/>
+                </a:solidFill>
+                <a:latin typeface="微软雅黑"/>
+              </a:defRPr>
+            </a:pPr>
+            <a:r>
+              <a:t>▸ ## Glazer五步法</a:t>
             </a:r>
           </a:p>
         </p:txBody>
@@ -5077,30 +5007,30 @@
         </p:nvSpPr>
         <p:spPr>
           <a:xfrm>
-            <a:off x="822960" y="3108960"/>
-            <a:ext cx="10332720" cy="320040"/>
-          </a:xfrm>
-          <a:prstGeom prst="rect">
-            <a:avLst/>
-          </a:prstGeom>
-          <a:noFill/>
-        </p:spPr>
-        <p:txBody>
-          <a:bodyPr wrap="square">
-            <a:spAutoFit/>
-          </a:bodyPr>
-          <a:lstStyle/>
-          <a:p>
-            <a:pPr algn="l">
-              <a:defRPr sz="1600" b="0">
-                <a:solidFill>
-                  <a:srgbClr val="282828"/>
-                </a:solidFill>
-                <a:latin typeface="微软雅黑"/>
-              </a:defRPr>
-            </a:pPr>
-            <a:r>
-              <a:t>▸ 误区3：Kegel可替代电刺激 → 50%发力错误，电刺激精准激活</a:t>
+            <a:off x="457200" y="3154680"/>
+            <a:ext cx="5303520" cy="320040"/>
+          </a:xfrm>
+          <a:prstGeom prst="rect">
+            <a:avLst/>
+          </a:prstGeom>
+          <a:noFill/>
+        </p:spPr>
+        <p:txBody>
+          <a:bodyPr wrap="square">
+            <a:spAutoFit/>
+          </a:bodyPr>
+          <a:lstStyle/>
+          <a:p>
+            <a:pPr algn="l">
+              <a:defRPr sz="1500" b="0">
+                <a:solidFill>
+                  <a:srgbClr val="282828"/>
+                </a:solidFill>
+                <a:latin typeface="微软雅黑"/>
+              </a:defRPr>
+            </a:pPr>
+            <a:r>
+              <a:t>▸ 1) 前静息60s — 静息张力(&lt;4μV)</a:t>
             </a:r>
           </a:p>
         </p:txBody>
@@ -5113,30 +5043,30 @@
         </p:nvSpPr>
         <p:spPr>
           <a:xfrm>
-            <a:off x="822960" y="3429000"/>
-            <a:ext cx="10332720" cy="320040"/>
-          </a:xfrm>
-          <a:prstGeom prst="rect">
-            <a:avLst/>
-          </a:prstGeom>
-          <a:noFill/>
-        </p:spPr>
-        <p:txBody>
-          <a:bodyPr wrap="square">
-            <a:spAutoFit/>
-          </a:bodyPr>
-          <a:lstStyle/>
-          <a:p>
-            <a:pPr algn="l">
-              <a:defRPr sz="1600" b="0">
-                <a:solidFill>
-                  <a:srgbClr val="282828"/>
-                </a:solidFill>
-                <a:latin typeface="微软雅黑"/>
-              </a:defRPr>
-            </a:pPr>
-            <a:r>
-              <a:t>▸    ➤ 话术：'电刺激帮你找到正确的肌肉，Kegel是巩固训练'</a:t>
+            <a:off x="457200" y="3474720"/>
+            <a:ext cx="5303520" cy="320040"/>
+          </a:xfrm>
+          <a:prstGeom prst="rect">
+            <a:avLst/>
+          </a:prstGeom>
+          <a:noFill/>
+        </p:spPr>
+        <p:txBody>
+          <a:bodyPr wrap="square">
+            <a:spAutoFit/>
+          </a:bodyPr>
+          <a:lstStyle/>
+          <a:p>
+            <a:pPr algn="l">
+              <a:defRPr sz="1500" b="0">
+                <a:solidFill>
+                  <a:srgbClr val="282828"/>
+                </a:solidFill>
+                <a:latin typeface="微软雅黑"/>
+              </a:defRPr>
+            </a:pPr>
+            <a:r>
+              <a:t>▸ 2) 快速收缩10次 — Ⅱ类肌(快肌)</a:t>
             </a:r>
           </a:p>
         </p:txBody>
@@ -5149,67 +5079,74 @@
         </p:nvSpPr>
         <p:spPr>
           <a:xfrm>
-            <a:off x="822960" y="3749040"/>
-            <a:ext cx="10332720" cy="320040"/>
-          </a:xfrm>
-          <a:prstGeom prst="rect">
-            <a:avLst/>
-          </a:prstGeom>
-          <a:noFill/>
-        </p:spPr>
-        <p:txBody>
-          <a:bodyPr wrap="square">
-            <a:spAutoFit/>
-          </a:bodyPr>
-          <a:lstStyle/>
-          <a:p>
-            <a:pPr algn="l">
-              <a:defRPr sz="1600" b="0">
-                <a:solidFill>
-                  <a:srgbClr val="282828"/>
-                </a:solidFill>
-                <a:latin typeface="微软雅黑"/>
-              </a:defRPr>
-            </a:pPr>
-            <a:r>
-              <a:t>▸ 误区4：没有症状不需治疗 → PFD进展缓慢，预防性干预效果更佳</a:t>
-            </a:r>
-          </a:p>
-        </p:txBody>
-      </p:sp>
-      <p:sp>
-        <p:nvSpPr>
-          <p:cNvPr id="12" name="TextBox 11"/>
-          <p:cNvSpPr txBox="1"/>
-          <p:nvPr/>
-        </p:nvSpPr>
-        <p:spPr>
-          <a:xfrm>
-            <a:off x="822960" y="4069080"/>
-            <a:ext cx="10332720" cy="320040"/>
-          </a:xfrm>
-          <a:prstGeom prst="rect">
-            <a:avLst/>
-          </a:prstGeom>
-          <a:noFill/>
-        </p:spPr>
-        <p:txBody>
-          <a:bodyPr wrap="square">
-            <a:spAutoFit/>
-          </a:bodyPr>
-          <a:lstStyle/>
-          <a:p>
-            <a:pPr algn="l">
-              <a:defRPr sz="1600" b="0">
-                <a:solidFill>
-                  <a:srgbClr val="282828"/>
-                </a:solidFill>
-                <a:latin typeface="微软雅黑"/>
-              </a:defRPr>
-            </a:pPr>
-            <a:r>
-              <a:t>▸    ➤ 话术：'等出现症状时，治疗难度和周期都会增加'</a:t>
-            </a:r>
+            <a:off x="457200" y="3794760"/>
+            <a:ext cx="5303520" cy="320040"/>
+          </a:xfrm>
+          <a:prstGeom prst="rect">
+            <a:avLst/>
+          </a:prstGeom>
+          <a:noFill/>
+        </p:spPr>
+        <p:txBody>
+          <a:bodyPr wrap="square">
+            <a:spAutoFit/>
+          </a:bodyPr>
+          <a:lstStyle/>
+          <a:p>
+            <a:pPr algn="l">
+              <a:defRPr sz="1500" b="0">
+                <a:solidFill>
+                  <a:srgbClr val="282828"/>
+                </a:solidFill>
+                <a:latin typeface="微软雅黑"/>
+              </a:defRPr>
+            </a:pPr>
+            <a:r>
+              <a:t>▸ 3) 持续收缩5次×10s — Ⅰ类肌(慢肌)</a:t>
+            </a:r>
+          </a:p>
+        </p:txBody>
+      </p:sp>
+      <p:sp>
+        <p:nvSpPr>
+          <p:cNvPr id="12" name="Rectangle 11"/>
+          <p:cNvSpPr/>
+          <p:nvPr/>
+        </p:nvSpPr>
+        <p:spPr>
+          <a:xfrm>
+            <a:off x="6035040" y="1371600"/>
+            <a:ext cx="18288" cy="5029200"/>
+          </a:xfrm>
+          <a:prstGeom prst="rect">
+            <a:avLst/>
+          </a:prstGeom>
+          <a:solidFill>
+            <a:srgbClr val="B4B4B4"/>
+          </a:solidFill>
+          <a:ln>
+            <a:noFill/>
+          </a:ln>
+        </p:spPr>
+        <p:style>
+          <a:lnRef idx="1">
+            <a:schemeClr val="accent1"/>
+          </a:lnRef>
+          <a:fillRef idx="3">
+            <a:schemeClr val="accent1"/>
+          </a:fillRef>
+          <a:effectRef idx="2">
+            <a:schemeClr val="accent1"/>
+          </a:effectRef>
+          <a:fontRef idx="minor">
+            <a:schemeClr val="lt1"/>
+          </a:fontRef>
+        </p:style>
+        <p:txBody>
+          <a:bodyPr rtlCol="0" anchor="ctr"/>
+          <a:lstStyle/>
+          <a:p>
+            <a:pPr algn="ctr"/>
           </a:p>
         </p:txBody>
       </p:sp>
@@ -5221,30 +5158,30 @@
         </p:nvSpPr>
         <p:spPr>
           <a:xfrm>
-            <a:off x="640080" y="4389120"/>
-            <a:ext cx="10515600" cy="320040"/>
-          </a:xfrm>
-          <a:prstGeom prst="rect">
-            <a:avLst/>
-          </a:prstGeom>
-          <a:noFill/>
-        </p:spPr>
-        <p:txBody>
-          <a:bodyPr wrap="square">
-            <a:spAutoFit/>
-          </a:bodyPr>
-          <a:lstStyle/>
-          <a:p>
-            <a:pPr algn="l">
-              <a:defRPr sz="1400" b="0">
-                <a:solidFill>
-                  <a:srgbClr val="E67E22"/>
-                </a:solidFill>
-                <a:latin typeface="微软雅黑"/>
-              </a:defRPr>
-            </a:pPr>
-            <a:r>
-              <a:t>📌 每个误区附证据来源+患者教育话术模板，便于一线沟通</a:t>
+            <a:off x="6217920" y="1554480"/>
+            <a:ext cx="5486400" cy="320040"/>
+          </a:xfrm>
+          <a:prstGeom prst="rect">
+            <a:avLst/>
+          </a:prstGeom>
+          <a:noFill/>
+        </p:spPr>
+        <p:txBody>
+          <a:bodyPr wrap="square">
+            <a:spAutoFit/>
+          </a:bodyPr>
+          <a:lstStyle/>
+          <a:p>
+            <a:pPr algn="l">
+              <a:defRPr sz="1500" b="0">
+                <a:solidFill>
+                  <a:srgbClr val="282828"/>
+                </a:solidFill>
+                <a:latin typeface="微软雅黑"/>
+              </a:defRPr>
+            </a:pPr>
+            <a:r>
+              <a:t>▸ ## Glazer五步法（续）</a:t>
             </a:r>
           </a:p>
         </p:txBody>
@@ -5257,30 +5194,282 @@
         </p:nvSpPr>
         <p:spPr>
           <a:xfrm>
-            <a:off x="640080" y="4709160"/>
-            <a:ext cx="10515600" cy="320040"/>
-          </a:xfrm>
-          <a:prstGeom prst="rect">
-            <a:avLst/>
-          </a:prstGeom>
-          <a:noFill/>
-        </p:spPr>
-        <p:txBody>
-          <a:bodyPr wrap="square">
-            <a:spAutoFit/>
-          </a:bodyPr>
-          <a:lstStyle/>
-          <a:p>
-            <a:pPr algn="l">
-              <a:defRPr sz="1400" b="0">
-                <a:solidFill>
-                  <a:srgbClr val="E67E22"/>
-                </a:solidFill>
-                <a:latin typeface="微软雅黑"/>
-              </a:defRPr>
-            </a:pPr>
-            <a:r>
-              <a:t>📌 心脏起搏器患者禁用TENS → 禁忌症提醒列已加入后续速查表</a:t>
+            <a:off x="6217920" y="1874520"/>
+            <a:ext cx="5486400" cy="320040"/>
+          </a:xfrm>
+          <a:prstGeom prst="rect">
+            <a:avLst/>
+          </a:prstGeom>
+          <a:noFill/>
+        </p:spPr>
+        <p:txBody>
+          <a:bodyPr wrap="square">
+            <a:spAutoFit/>
+          </a:bodyPr>
+          <a:lstStyle/>
+          <a:p>
+            <a:pPr algn="l">
+              <a:defRPr sz="1500" b="0">
+                <a:solidFill>
+                  <a:srgbClr val="282828"/>
+                </a:solidFill>
+                <a:latin typeface="微软雅黑"/>
+              </a:defRPr>
+            </a:pPr>
+            <a:r>
+              <a:t>▸ 4) 耐力收缩60s — 肌肉耐力</a:t>
+            </a:r>
+          </a:p>
+        </p:txBody>
+      </p:sp>
+      <p:sp>
+        <p:nvSpPr>
+          <p:cNvPr id="15" name="TextBox 14"/>
+          <p:cNvSpPr txBox="1"/>
+          <p:nvPr/>
+        </p:nvSpPr>
+        <p:spPr>
+          <a:xfrm>
+            <a:off x="6217920" y="2194560"/>
+            <a:ext cx="5486400" cy="320040"/>
+          </a:xfrm>
+          <a:prstGeom prst="rect">
+            <a:avLst/>
+          </a:prstGeom>
+          <a:noFill/>
+        </p:spPr>
+        <p:txBody>
+          <a:bodyPr wrap="square">
+            <a:spAutoFit/>
+          </a:bodyPr>
+          <a:lstStyle/>
+          <a:p>
+            <a:pPr algn="l">
+              <a:defRPr sz="1500" b="0">
+                <a:solidFill>
+                  <a:srgbClr val="282828"/>
+                </a:solidFill>
+                <a:latin typeface="微软雅黑"/>
+              </a:defRPr>
+            </a:pPr>
+            <a:r>
+              <a:t>▸ 5) 后静息60s — 放松能力</a:t>
+            </a:r>
+          </a:p>
+        </p:txBody>
+      </p:sp>
+      <p:sp>
+        <p:nvSpPr>
+          <p:cNvPr id="16" name="TextBox 15"/>
+          <p:cNvSpPr txBox="1"/>
+          <p:nvPr/>
+        </p:nvSpPr>
+        <p:spPr>
+          <a:xfrm>
+            <a:off x="6217920" y="2514600"/>
+            <a:ext cx="5486400" cy="320040"/>
+          </a:xfrm>
+          <a:prstGeom prst="rect">
+            <a:avLst/>
+          </a:prstGeom>
+          <a:noFill/>
+        </p:spPr>
+        <p:txBody>
+          <a:bodyPr wrap="square">
+            <a:spAutoFit/>
+          </a:bodyPr>
+          <a:lstStyle/>
+          <a:p>
+            <a:pPr algn="l">
+              <a:defRPr sz="1500" b="0">
+                <a:solidFill>
+                  <a:srgbClr val="282828"/>
+                </a:solidFill>
+                <a:latin typeface="微软雅黑"/>
+              </a:defRPr>
+            </a:pPr>
+            <a:r>
+              <a:t>▸ ## 报告解读三型</a:t>
+            </a:r>
+          </a:p>
+        </p:txBody>
+      </p:sp>
+      <p:sp>
+        <p:nvSpPr>
+          <p:cNvPr id="17" name="TextBox 16"/>
+          <p:cNvSpPr txBox="1"/>
+          <p:nvPr/>
+        </p:nvSpPr>
+        <p:spPr>
+          <a:xfrm>
+            <a:off x="6217920" y="2834640"/>
+            <a:ext cx="5486400" cy="320040"/>
+          </a:xfrm>
+          <a:prstGeom prst="rect">
+            <a:avLst/>
+          </a:prstGeom>
+          <a:noFill/>
+        </p:spPr>
+        <p:txBody>
+          <a:bodyPr wrap="square">
+            <a:spAutoFit/>
+          </a:bodyPr>
+          <a:lstStyle/>
+          <a:p>
+            <a:pPr algn="l">
+              <a:defRPr sz="1500" b="0">
+                <a:solidFill>
+                  <a:srgbClr val="282828"/>
+                </a:solidFill>
+                <a:latin typeface="微软雅黑"/>
+              </a:defRPr>
+            </a:pPr>
+            <a:r>
+              <a:t>▸ 高张力型：基线高，收缩受限→放松训练</a:t>
+            </a:r>
+          </a:p>
+        </p:txBody>
+      </p:sp>
+      <p:sp>
+        <p:nvSpPr>
+          <p:cNvPr id="18" name="TextBox 17"/>
+          <p:cNvSpPr txBox="1"/>
+          <p:nvPr/>
+        </p:nvSpPr>
+        <p:spPr>
+          <a:xfrm>
+            <a:off x="6217920" y="3154680"/>
+            <a:ext cx="5486400" cy="320040"/>
+          </a:xfrm>
+          <a:prstGeom prst="rect">
+            <a:avLst/>
+          </a:prstGeom>
+          <a:noFill/>
+        </p:spPr>
+        <p:txBody>
+          <a:bodyPr wrap="square">
+            <a:spAutoFit/>
+          </a:bodyPr>
+          <a:lstStyle/>
+          <a:p>
+            <a:pPr algn="l">
+              <a:defRPr sz="1500" b="0">
+                <a:solidFill>
+                  <a:srgbClr val="282828"/>
+                </a:solidFill>
+                <a:latin typeface="微软雅黑"/>
+              </a:defRPr>
+            </a:pPr>
+            <a:r>
+              <a:t>▸ 低张力型：基线正常，收缩低→NMES强化</a:t>
+            </a:r>
+          </a:p>
+        </p:txBody>
+      </p:sp>
+      <p:sp>
+        <p:nvSpPr>
+          <p:cNvPr id="19" name="TextBox 18"/>
+          <p:cNvSpPr txBox="1"/>
+          <p:nvPr/>
+        </p:nvSpPr>
+        <p:spPr>
+          <a:xfrm>
+            <a:off x="6217920" y="3474720"/>
+            <a:ext cx="5486400" cy="320040"/>
+          </a:xfrm>
+          <a:prstGeom prst="rect">
+            <a:avLst/>
+          </a:prstGeom>
+          <a:noFill/>
+        </p:spPr>
+        <p:txBody>
+          <a:bodyPr wrap="square">
+            <a:spAutoFit/>
+          </a:bodyPr>
+          <a:lstStyle/>
+          <a:p>
+            <a:pPr algn="l">
+              <a:defRPr sz="1500" b="0">
+                <a:solidFill>
+                  <a:srgbClr val="282828"/>
+                </a:solidFill>
+                <a:latin typeface="微软雅黑"/>
+              </a:defRPr>
+            </a:pPr>
+            <a:r>
+              <a:t>▸ 混合型：先放松后强化</a:t>
+            </a:r>
+          </a:p>
+        </p:txBody>
+      </p:sp>
+      <p:sp>
+        <p:nvSpPr>
+          <p:cNvPr id="20" name="TextBox 19"/>
+          <p:cNvSpPr txBox="1"/>
+          <p:nvPr/>
+        </p:nvSpPr>
+        <p:spPr>
+          <a:xfrm>
+            <a:off x="6217920" y="3794760"/>
+            <a:ext cx="5486400" cy="320040"/>
+          </a:xfrm>
+          <a:prstGeom prst="rect">
+            <a:avLst/>
+          </a:prstGeom>
+          <a:noFill/>
+        </p:spPr>
+        <p:txBody>
+          <a:bodyPr wrap="square">
+            <a:spAutoFit/>
+          </a:bodyPr>
+          <a:lstStyle/>
+          <a:p>
+            <a:pPr algn="l">
+              <a:defRPr sz="1500" b="0">
+                <a:solidFill>
+                  <a:srgbClr val="282828"/>
+                </a:solidFill>
+                <a:latin typeface="微软雅黑"/>
+              </a:defRPr>
+            </a:pPr>
+            <a:r>
+              <a:t>▸ 📌 AI辅助分析趋势：部分高端设备已支持自动识别收缩模式异常</a:t>
+            </a:r>
+          </a:p>
+        </p:txBody>
+      </p:sp>
+      <p:sp>
+        <p:nvSpPr>
+          <p:cNvPr id="21" name="TextBox 20"/>
+          <p:cNvSpPr txBox="1"/>
+          <p:nvPr/>
+        </p:nvSpPr>
+        <p:spPr>
+          <a:xfrm>
+            <a:off x="6217920" y="4114800"/>
+            <a:ext cx="5486400" cy="320040"/>
+          </a:xfrm>
+          <a:prstGeom prst="rect">
+            <a:avLst/>
+          </a:prstGeom>
+          <a:noFill/>
+        </p:spPr>
+        <p:txBody>
+          <a:bodyPr wrap="square">
+            <a:spAutoFit/>
+          </a:bodyPr>
+          <a:lstStyle/>
+          <a:p>
+            <a:pPr algn="l">
+              <a:defRPr sz="1500" b="0">
+                <a:solidFill>
+                  <a:srgbClr val="282828"/>
+                </a:solidFill>
+                <a:latin typeface="微软雅黑"/>
+              </a:defRPr>
+            </a:pPr>
+            <a:r>
+              <a:t>▸ 📌 可配合评估报告样例截图，使教学更具体</a:t>
             </a:r>
           </a:p>
         </p:txBody>
@@ -5294,6 +5483,1116 @@
 </file>
 
 <file path=ppt/slides/slide13.xml><?xml version="1.0" encoding="utf-8"?>
+<p:sld xmlns:a="http://schemas.openxmlformats.org/drawingml/2006/main" xmlns:p="http://schemas.openxmlformats.org/presentationml/2006/main" xmlns:r="http://schemas.openxmlformats.org/officeDocument/2006/relationships">
+  <p:cSld>
+    <p:bg>
+      <p:bgPr>
+        <a:solidFill>
+          <a:srgbClr val="FFFFFF"/>
+        </a:solidFill>
+        <a:effectLst/>
+      </p:bgPr>
+    </p:bg>
+    <p:spTree>
+      <p:nvGrpSpPr>
+        <p:cNvPr id="1" name=""/>
+        <p:cNvGrpSpPr/>
+        <p:nvPr/>
+      </p:nvGrpSpPr>
+      <p:grpSpPr/>
+      <p:sp>
+        <p:nvSpPr>
+          <p:cNvPr id="2" name="Rectangle 1"/>
+          <p:cNvSpPr/>
+          <p:nvPr/>
+        </p:nvSpPr>
+        <p:spPr>
+          <a:xfrm>
+            <a:off x="0" y="0"/>
+            <a:ext cx="12191695" cy="1005840"/>
+          </a:xfrm>
+          <a:prstGeom prst="rect">
+            <a:avLst/>
+          </a:prstGeom>
+          <a:solidFill>
+            <a:srgbClr val="003366"/>
+          </a:solidFill>
+          <a:ln>
+            <a:noFill/>
+          </a:ln>
+        </p:spPr>
+        <p:style>
+          <a:lnRef idx="1">
+            <a:schemeClr val="accent1"/>
+          </a:lnRef>
+          <a:fillRef idx="3">
+            <a:schemeClr val="accent1"/>
+          </a:fillRef>
+          <a:effectRef idx="2">
+            <a:schemeClr val="accent1"/>
+          </a:effectRef>
+          <a:fontRef idx="minor">
+            <a:schemeClr val="lt1"/>
+          </a:fontRef>
+        </p:style>
+        <p:txBody>
+          <a:bodyPr rtlCol="0" anchor="ctr"/>
+          <a:lstStyle/>
+          <a:p>
+            <a:pPr algn="ctr"/>
+          </a:p>
+        </p:txBody>
+      </p:sp>
+      <p:sp>
+        <p:nvSpPr>
+          <p:cNvPr id="3" name="TextBox 2"/>
+          <p:cNvSpPr txBox="1"/>
+          <p:nvPr/>
+        </p:nvSpPr>
+        <p:spPr>
+          <a:xfrm>
+            <a:off x="457200" y="137160"/>
+            <a:ext cx="10972800" cy="731520"/>
+          </a:xfrm>
+          <a:prstGeom prst="rect">
+            <a:avLst/>
+          </a:prstGeom>
+          <a:noFill/>
+        </p:spPr>
+        <p:txBody>
+          <a:bodyPr wrap="square">
+            <a:spAutoFit/>
+          </a:bodyPr>
+          <a:lstStyle/>
+          <a:p>
+            <a:pPr algn="l">
+              <a:defRPr sz="2800" b="1">
+                <a:solidFill>
+                  <a:srgbClr val="FFFFFF"/>
+                </a:solidFill>
+                <a:latin typeface="微软雅黑"/>
+              </a:defRPr>
+            </a:pPr>
+            <a:r>
+              <a:t>第五章  综合治疗路径</a:t>
+            </a:r>
+          </a:p>
+        </p:txBody>
+      </p:sp>
+      <p:sp>
+        <p:nvSpPr>
+          <p:cNvPr id="4" name="TextBox 3"/>
+          <p:cNvSpPr txBox="1"/>
+          <p:nvPr/>
+        </p:nvSpPr>
+        <p:spPr>
+          <a:xfrm>
+            <a:off x="640080" y="1463040"/>
+            <a:ext cx="10972800" cy="365760"/>
+          </a:xfrm>
+          <a:prstGeom prst="rect">
+            <a:avLst/>
+          </a:prstGeom>
+          <a:noFill/>
+        </p:spPr>
+        <p:txBody>
+          <a:bodyPr wrap="square">
+            <a:spAutoFit/>
+          </a:bodyPr>
+          <a:lstStyle/>
+          <a:p>
+            <a:pPr algn="l">
+              <a:defRPr sz="1700" b="1">
+                <a:solidFill>
+                  <a:srgbClr val="004C80"/>
+                </a:solidFill>
+                <a:latin typeface="微软雅黑"/>
+              </a:defRPr>
+            </a:pPr>
+            <a:r>
+              <a:t>标准接诊流程</a:t>
+            </a:r>
+          </a:p>
+        </p:txBody>
+      </p:sp>
+      <p:sp>
+        <p:nvSpPr>
+          <p:cNvPr id="5" name="TextBox 4"/>
+          <p:cNvSpPr txBox="1"/>
+          <p:nvPr/>
+        </p:nvSpPr>
+        <p:spPr>
+          <a:xfrm>
+            <a:off x="822960" y="1828800"/>
+            <a:ext cx="10332720" cy="320040"/>
+          </a:xfrm>
+          <a:prstGeom prst="rect">
+            <a:avLst/>
+          </a:prstGeom>
+          <a:noFill/>
+        </p:spPr>
+        <p:txBody>
+          <a:bodyPr wrap="square">
+            <a:spAutoFit/>
+          </a:bodyPr>
+          <a:lstStyle/>
+          <a:p>
+            <a:pPr algn="l">
+              <a:defRPr sz="1600" b="0">
+                <a:solidFill>
+                  <a:srgbClr val="282828"/>
+                </a:solidFill>
+                <a:latin typeface="微软雅黑"/>
+              </a:defRPr>
+            </a:pPr>
+            <a:r>
+              <a:t>▸ 第一步：问诊（主诉、分娩史、手术史、生活方式）</a:t>
+            </a:r>
+          </a:p>
+        </p:txBody>
+      </p:sp>
+      <p:sp>
+        <p:nvSpPr>
+          <p:cNvPr id="6" name="TextBox 5"/>
+          <p:cNvSpPr txBox="1"/>
+          <p:nvPr/>
+        </p:nvSpPr>
+        <p:spPr>
+          <a:xfrm>
+            <a:off x="822960" y="2148840"/>
+            <a:ext cx="10332720" cy="320040"/>
+          </a:xfrm>
+          <a:prstGeom prst="rect">
+            <a:avLst/>
+          </a:prstGeom>
+          <a:noFill/>
+        </p:spPr>
+        <p:txBody>
+          <a:bodyPr wrap="square">
+            <a:spAutoFit/>
+          </a:bodyPr>
+          <a:lstStyle/>
+          <a:p>
+            <a:pPr algn="l">
+              <a:defRPr sz="1600" b="0">
+                <a:solidFill>
+                  <a:srgbClr val="282828"/>
+                </a:solidFill>
+                <a:latin typeface="微软雅黑"/>
+              </a:defRPr>
+            </a:pPr>
+            <a:r>
+              <a:t>▸ 第二步：体格检查（盆腔/POP-Q/触诊）</a:t>
+            </a:r>
+          </a:p>
+        </p:txBody>
+      </p:sp>
+      <p:sp>
+        <p:nvSpPr>
+          <p:cNvPr id="7" name="TextBox 6"/>
+          <p:cNvSpPr txBox="1"/>
+          <p:nvPr/>
+        </p:nvSpPr>
+        <p:spPr>
+          <a:xfrm>
+            <a:off x="822960" y="2468880"/>
+            <a:ext cx="10332720" cy="320040"/>
+          </a:xfrm>
+          <a:prstGeom prst="rect">
+            <a:avLst/>
+          </a:prstGeom>
+          <a:noFill/>
+        </p:spPr>
+        <p:txBody>
+          <a:bodyPr wrap="square">
+            <a:spAutoFit/>
+          </a:bodyPr>
+          <a:lstStyle/>
+          <a:p>
+            <a:pPr algn="l">
+              <a:defRPr sz="1600" b="0">
+                <a:solidFill>
+                  <a:srgbClr val="282828"/>
+                </a:solidFill>
+                <a:latin typeface="微软雅黑"/>
+              </a:defRPr>
+            </a:pPr>
+            <a:r>
+              <a:t>▸ 第三步：辅助评估（Glazer/尿流率/超声）</a:t>
+            </a:r>
+          </a:p>
+        </p:txBody>
+      </p:sp>
+      <p:sp>
+        <p:nvSpPr>
+          <p:cNvPr id="8" name="TextBox 7"/>
+          <p:cNvSpPr txBox="1"/>
+          <p:nvPr/>
+        </p:nvSpPr>
+        <p:spPr>
+          <a:xfrm>
+            <a:off x="822960" y="2788920"/>
+            <a:ext cx="10332720" cy="320040"/>
+          </a:xfrm>
+          <a:prstGeom prst="rect">
+            <a:avLst/>
+          </a:prstGeom>
+          <a:noFill/>
+        </p:spPr>
+        <p:txBody>
+          <a:bodyPr wrap="square">
+            <a:spAutoFit/>
+          </a:bodyPr>
+          <a:lstStyle/>
+          <a:p>
+            <a:pPr algn="l">
+              <a:defRPr sz="1600" b="0">
+                <a:solidFill>
+                  <a:srgbClr val="282828"/>
+                </a:solidFill>
+                <a:latin typeface="微软雅黑"/>
+              </a:defRPr>
+            </a:pPr>
+            <a:r>
+              <a:t>▸ 第四步：制定方案（分型→目标→参数选择）</a:t>
+            </a:r>
+          </a:p>
+        </p:txBody>
+      </p:sp>
+      <p:sp>
+        <p:nvSpPr>
+          <p:cNvPr id="9" name="TextBox 8"/>
+          <p:cNvSpPr txBox="1"/>
+          <p:nvPr/>
+        </p:nvSpPr>
+        <p:spPr>
+          <a:xfrm>
+            <a:off x="822960" y="3108960"/>
+            <a:ext cx="10332720" cy="320040"/>
+          </a:xfrm>
+          <a:prstGeom prst="rect">
+            <a:avLst/>
+          </a:prstGeom>
+          <a:noFill/>
+        </p:spPr>
+        <p:txBody>
+          <a:bodyPr wrap="square">
+            <a:spAutoFit/>
+          </a:bodyPr>
+          <a:lstStyle/>
+          <a:p>
+            <a:pPr algn="l">
+              <a:defRPr sz="1600" b="0">
+                <a:solidFill>
+                  <a:srgbClr val="282828"/>
+                </a:solidFill>
+                <a:latin typeface="微软雅黑"/>
+              </a:defRPr>
+            </a:pPr>
+            <a:r>
+              <a:t>▸ 第五步：执行与随访（每周2-3次，10-15次/疗程）</a:t>
+            </a:r>
+          </a:p>
+        </p:txBody>
+      </p:sp>
+      <p:sp>
+        <p:nvSpPr>
+          <p:cNvPr id="10" name="TextBox 9"/>
+          <p:cNvSpPr txBox="1"/>
+          <p:nvPr/>
+        </p:nvSpPr>
+        <p:spPr>
+          <a:xfrm>
+            <a:off x="640080" y="3429000"/>
+            <a:ext cx="10972800" cy="365760"/>
+          </a:xfrm>
+          <a:prstGeom prst="rect">
+            <a:avLst/>
+          </a:prstGeom>
+          <a:noFill/>
+        </p:spPr>
+        <p:txBody>
+          <a:bodyPr wrap="square">
+            <a:spAutoFit/>
+          </a:bodyPr>
+          <a:lstStyle/>
+          <a:p>
+            <a:pPr algn="l">
+              <a:defRPr sz="1700" b="1">
+                <a:solidFill>
+                  <a:srgbClr val="004C80"/>
+                </a:solidFill>
+                <a:latin typeface="微软雅黑"/>
+              </a:defRPr>
+            </a:pPr>
+            <a:r>
+              <a:t>三阶段治疗策略</a:t>
+            </a:r>
+          </a:p>
+        </p:txBody>
+      </p:sp>
+      <p:sp>
+        <p:nvSpPr>
+          <p:cNvPr id="11" name="TextBox 10"/>
+          <p:cNvSpPr txBox="1"/>
+          <p:nvPr/>
+        </p:nvSpPr>
+        <p:spPr>
+          <a:xfrm>
+            <a:off x="822960" y="3794760"/>
+            <a:ext cx="10332720" cy="320040"/>
+          </a:xfrm>
+          <a:prstGeom prst="rect">
+            <a:avLst/>
+          </a:prstGeom>
+          <a:noFill/>
+        </p:spPr>
+        <p:txBody>
+          <a:bodyPr wrap="square">
+            <a:spAutoFit/>
+          </a:bodyPr>
+          <a:lstStyle/>
+          <a:p>
+            <a:pPr algn="l">
+              <a:defRPr sz="1600" b="0">
+                <a:solidFill>
+                  <a:srgbClr val="282828"/>
+                </a:solidFill>
+                <a:latin typeface="微软雅黑"/>
+              </a:defRPr>
+            </a:pPr>
+            <a:r>
+              <a:t>▸ 引导期(第1-4次)：电刺激70%+生物反馈30% → 建立肌肉激活感</a:t>
+            </a:r>
+          </a:p>
+        </p:txBody>
+      </p:sp>
+      <p:sp>
+        <p:nvSpPr>
+          <p:cNvPr id="12" name="TextBox 11"/>
+          <p:cNvSpPr txBox="1"/>
+          <p:nvPr/>
+        </p:nvSpPr>
+        <p:spPr>
+          <a:xfrm>
+            <a:off x="822960" y="4114800"/>
+            <a:ext cx="10332720" cy="320040"/>
+          </a:xfrm>
+          <a:prstGeom prst="rect">
+            <a:avLst/>
+          </a:prstGeom>
+          <a:noFill/>
+        </p:spPr>
+        <p:txBody>
+          <a:bodyPr wrap="square">
+            <a:spAutoFit/>
+          </a:bodyPr>
+          <a:lstStyle/>
+          <a:p>
+            <a:pPr algn="l">
+              <a:defRPr sz="1600" b="0">
+                <a:solidFill>
+                  <a:srgbClr val="282828"/>
+                </a:solidFill>
+                <a:latin typeface="微软雅黑"/>
+              </a:defRPr>
+            </a:pPr>
+            <a:r>
+              <a:t>▸ 强化期(第5-10次)：电刺激40%+生物反馈60% → 提升肌力耐力</a:t>
+            </a:r>
+          </a:p>
+        </p:txBody>
+      </p:sp>
+      <p:sp>
+        <p:nvSpPr>
+          <p:cNvPr id="13" name="TextBox 12"/>
+          <p:cNvSpPr txBox="1"/>
+          <p:nvPr/>
+        </p:nvSpPr>
+        <p:spPr>
+          <a:xfrm>
+            <a:off x="822960" y="4434840"/>
+            <a:ext cx="10332720" cy="320040"/>
+          </a:xfrm>
+          <a:prstGeom prst="rect">
+            <a:avLst/>
+          </a:prstGeom>
+          <a:noFill/>
+        </p:spPr>
+        <p:txBody>
+          <a:bodyPr wrap="square">
+            <a:spAutoFit/>
+          </a:bodyPr>
+          <a:lstStyle/>
+          <a:p>
+            <a:pPr algn="l">
+              <a:defRPr sz="1600" b="0">
+                <a:solidFill>
+                  <a:srgbClr val="282828"/>
+                </a:solidFill>
+                <a:latin typeface="微软雅黑"/>
+              </a:defRPr>
+            </a:pPr>
+            <a:r>
+              <a:t>▸ 自主期(第11-15次)：电刺激10%+生物反馈90% → 完全自主控制</a:t>
+            </a:r>
+          </a:p>
+        </p:txBody>
+      </p:sp>
+      <p:sp>
+        <p:nvSpPr>
+          <p:cNvPr id="14" name="TextBox 13"/>
+          <p:cNvSpPr txBox="1"/>
+          <p:nvPr/>
+        </p:nvSpPr>
+        <p:spPr>
+          <a:xfrm>
+            <a:off x="640080" y="4754880"/>
+            <a:ext cx="10972800" cy="365760"/>
+          </a:xfrm>
+          <a:prstGeom prst="rect">
+            <a:avLst/>
+          </a:prstGeom>
+          <a:noFill/>
+        </p:spPr>
+        <p:txBody>
+          <a:bodyPr wrap="square">
+            <a:spAutoFit/>
+          </a:bodyPr>
+          <a:lstStyle/>
+          <a:p>
+            <a:pPr algn="l">
+              <a:defRPr sz="1700" b="1">
+                <a:solidFill>
+                  <a:srgbClr val="004C80"/>
+                </a:solidFill>
+                <a:latin typeface="微软雅黑"/>
+              </a:defRPr>
+            </a:pPr>
+            <a:r>
+              <a:t>家庭训练依从性管理</a:t>
+            </a:r>
+          </a:p>
+        </p:txBody>
+      </p:sp>
+      <p:sp>
+        <p:nvSpPr>
+          <p:cNvPr id="15" name="TextBox 14"/>
+          <p:cNvSpPr txBox="1"/>
+          <p:nvPr/>
+        </p:nvSpPr>
+        <p:spPr>
+          <a:xfrm>
+            <a:off x="822960" y="5120640"/>
+            <a:ext cx="10332720" cy="320040"/>
+          </a:xfrm>
+          <a:prstGeom prst="rect">
+            <a:avLst/>
+          </a:prstGeom>
+          <a:noFill/>
+        </p:spPr>
+        <p:txBody>
+          <a:bodyPr wrap="square">
+            <a:spAutoFit/>
+          </a:bodyPr>
+          <a:lstStyle/>
+          <a:p>
+            <a:pPr algn="l">
+              <a:defRPr sz="1600" b="0">
+                <a:solidFill>
+                  <a:srgbClr val="282828"/>
+                </a:solidFill>
+                <a:latin typeface="微软雅黑"/>
+              </a:defRPr>
+            </a:pPr>
+            <a:r>
+              <a:t>▸ APP打卡+视频指导 → 提升居家康复完成率</a:t>
+            </a:r>
+          </a:p>
+        </p:txBody>
+      </p:sp>
+      <p:sp>
+        <p:nvSpPr>
+          <p:cNvPr id="16" name="TextBox 15"/>
+          <p:cNvSpPr txBox="1"/>
+          <p:nvPr/>
+        </p:nvSpPr>
+        <p:spPr>
+          <a:xfrm>
+            <a:off x="822960" y="5440680"/>
+            <a:ext cx="10332720" cy="320040"/>
+          </a:xfrm>
+          <a:prstGeom prst="rect">
+            <a:avLst/>
+          </a:prstGeom>
+          <a:noFill/>
+        </p:spPr>
+        <p:txBody>
+          <a:bodyPr wrap="square">
+            <a:spAutoFit/>
+          </a:bodyPr>
+          <a:lstStyle/>
+          <a:p>
+            <a:pPr algn="l">
+              <a:defRPr sz="1600" b="0">
+                <a:solidFill>
+                  <a:srgbClr val="282828"/>
+                </a:solidFill>
+                <a:latin typeface="微软雅黑"/>
+              </a:defRPr>
+            </a:pPr>
+            <a:r>
+              <a:t>▸ 参考ACOG指南：产后42天开始干预（恶露干净后）</a:t>
+            </a:r>
+          </a:p>
+        </p:txBody>
+      </p:sp>
+      <p:sp>
+        <p:nvSpPr>
+          <p:cNvPr id="17" name="TextBox 16"/>
+          <p:cNvSpPr txBox="1"/>
+          <p:nvPr/>
+        </p:nvSpPr>
+        <p:spPr>
+          <a:xfrm>
+            <a:off x="640080" y="5760720"/>
+            <a:ext cx="10515600" cy="320040"/>
+          </a:xfrm>
+          <a:prstGeom prst="rect">
+            <a:avLst/>
+          </a:prstGeom>
+          <a:noFill/>
+        </p:spPr>
+        <p:txBody>
+          <a:bodyPr wrap="square">
+            <a:spAutoFit/>
+          </a:bodyPr>
+          <a:lstStyle/>
+          <a:p>
+            <a:pPr algn="l">
+              <a:defRPr sz="1400" b="0">
+                <a:solidFill>
+                  <a:srgbClr val="E67E22"/>
+                </a:solidFill>
+                <a:latin typeface="微软雅黑"/>
+              </a:defRPr>
+            </a:pPr>
+            <a:r>
+              <a:t>📌 扩展：加入'家庭训练依从性管理'模块，呼应居家康复主题</a:t>
+            </a:r>
+          </a:p>
+        </p:txBody>
+      </p:sp>
+    </p:spTree>
+  </p:cSld>
+  <p:clrMapOvr>
+    <a:masterClrMapping/>
+  </p:clrMapOvr>
+</p:sld>
+</file>
+
+<file path=ppt/slides/slide14.xml><?xml version="1.0" encoding="utf-8"?>
+<p:sld xmlns:a="http://schemas.openxmlformats.org/drawingml/2006/main" xmlns:p="http://schemas.openxmlformats.org/presentationml/2006/main" xmlns:r="http://schemas.openxmlformats.org/officeDocument/2006/relationships">
+  <p:cSld>
+    <p:bg>
+      <p:bgPr>
+        <a:solidFill>
+          <a:srgbClr val="FFFFFF"/>
+        </a:solidFill>
+        <a:effectLst/>
+      </p:bgPr>
+    </p:bg>
+    <p:spTree>
+      <p:nvGrpSpPr>
+        <p:cNvPr id="1" name=""/>
+        <p:cNvGrpSpPr/>
+        <p:nvPr/>
+      </p:nvGrpSpPr>
+      <p:grpSpPr/>
+      <p:sp>
+        <p:nvSpPr>
+          <p:cNvPr id="2" name="Rectangle 1"/>
+          <p:cNvSpPr/>
+          <p:nvPr/>
+        </p:nvSpPr>
+        <p:spPr>
+          <a:xfrm>
+            <a:off x="0" y="0"/>
+            <a:ext cx="12191695" cy="1005840"/>
+          </a:xfrm>
+          <a:prstGeom prst="rect">
+            <a:avLst/>
+          </a:prstGeom>
+          <a:solidFill>
+            <a:srgbClr val="003366"/>
+          </a:solidFill>
+          <a:ln>
+            <a:noFill/>
+          </a:ln>
+        </p:spPr>
+        <p:style>
+          <a:lnRef idx="1">
+            <a:schemeClr val="accent1"/>
+          </a:lnRef>
+          <a:fillRef idx="3">
+            <a:schemeClr val="accent1"/>
+          </a:fillRef>
+          <a:effectRef idx="2">
+            <a:schemeClr val="accent1"/>
+          </a:effectRef>
+          <a:fontRef idx="minor">
+            <a:schemeClr val="lt1"/>
+          </a:fontRef>
+        </p:style>
+        <p:txBody>
+          <a:bodyPr rtlCol="0" anchor="ctr"/>
+          <a:lstStyle/>
+          <a:p>
+            <a:pPr algn="ctr"/>
+          </a:p>
+        </p:txBody>
+      </p:sp>
+      <p:sp>
+        <p:nvSpPr>
+          <p:cNvPr id="3" name="TextBox 2"/>
+          <p:cNvSpPr txBox="1"/>
+          <p:nvPr/>
+        </p:nvSpPr>
+        <p:spPr>
+          <a:xfrm>
+            <a:off x="457200" y="137160"/>
+            <a:ext cx="10972800" cy="731520"/>
+          </a:xfrm>
+          <a:prstGeom prst="rect">
+            <a:avLst/>
+          </a:prstGeom>
+          <a:noFill/>
+        </p:spPr>
+        <p:txBody>
+          <a:bodyPr wrap="square">
+            <a:spAutoFit/>
+          </a:bodyPr>
+          <a:lstStyle/>
+          <a:p>
+            <a:pPr algn="l">
+              <a:defRPr sz="2800" b="1">
+                <a:solidFill>
+                  <a:srgbClr val="FFFFFF"/>
+                </a:solidFill>
+                <a:latin typeface="微软雅黑"/>
+              </a:defRPr>
+            </a:pPr>
+            <a:r>
+              <a:t>第六章  常见误区澄清与患者教育</a:t>
+            </a:r>
+          </a:p>
+        </p:txBody>
+      </p:sp>
+      <p:sp>
+        <p:nvSpPr>
+          <p:cNvPr id="4" name="TextBox 3"/>
+          <p:cNvSpPr txBox="1"/>
+          <p:nvPr/>
+        </p:nvSpPr>
+        <p:spPr>
+          <a:xfrm>
+            <a:off x="640080" y="1463040"/>
+            <a:ext cx="10972800" cy="365760"/>
+          </a:xfrm>
+          <a:prstGeom prst="rect">
+            <a:avLst/>
+          </a:prstGeom>
+          <a:noFill/>
+        </p:spPr>
+        <p:txBody>
+          <a:bodyPr wrap="square">
+            <a:spAutoFit/>
+          </a:bodyPr>
+          <a:lstStyle/>
+          <a:p>
+            <a:pPr algn="l">
+              <a:defRPr sz="1700" b="1">
+                <a:solidFill>
+                  <a:srgbClr val="004C80"/>
+                </a:solidFill>
+                <a:latin typeface="微软雅黑"/>
+              </a:defRPr>
+            </a:pPr>
+            <a:r>
+              <a:t>误区与真相</a:t>
+            </a:r>
+          </a:p>
+        </p:txBody>
+      </p:sp>
+      <p:sp>
+        <p:nvSpPr>
+          <p:cNvPr id="5" name="TextBox 4"/>
+          <p:cNvSpPr txBox="1"/>
+          <p:nvPr/>
+        </p:nvSpPr>
+        <p:spPr>
+          <a:xfrm>
+            <a:off x="822960" y="1828800"/>
+            <a:ext cx="10332720" cy="320040"/>
+          </a:xfrm>
+          <a:prstGeom prst="rect">
+            <a:avLst/>
+          </a:prstGeom>
+          <a:noFill/>
+        </p:spPr>
+        <p:txBody>
+          <a:bodyPr wrap="square">
+            <a:spAutoFit/>
+          </a:bodyPr>
+          <a:lstStyle/>
+          <a:p>
+            <a:pPr algn="l">
+              <a:defRPr sz="1600" b="0">
+                <a:solidFill>
+                  <a:srgbClr val="282828"/>
+                </a:solidFill>
+                <a:latin typeface="微软雅黑"/>
+              </a:defRPr>
+            </a:pPr>
+            <a:r>
+              <a:t>▸ 误区1：只有顺产才需盆底康复 → 80%产后女性存在损伤，剖宫产同需评估</a:t>
+            </a:r>
+          </a:p>
+        </p:txBody>
+      </p:sp>
+      <p:sp>
+        <p:nvSpPr>
+          <p:cNvPr id="6" name="TextBox 5"/>
+          <p:cNvSpPr txBox="1"/>
+          <p:nvPr/>
+        </p:nvSpPr>
+        <p:spPr>
+          <a:xfrm>
+            <a:off x="822960" y="2148840"/>
+            <a:ext cx="10332720" cy="320040"/>
+          </a:xfrm>
+          <a:prstGeom prst="rect">
+            <a:avLst/>
+          </a:prstGeom>
+          <a:noFill/>
+        </p:spPr>
+        <p:txBody>
+          <a:bodyPr wrap="square">
+            <a:spAutoFit/>
+          </a:bodyPr>
+          <a:lstStyle/>
+          <a:p>
+            <a:pPr algn="l">
+              <a:defRPr sz="1600" b="0">
+                <a:solidFill>
+                  <a:srgbClr val="282828"/>
+                </a:solidFill>
+                <a:latin typeface="微软雅黑"/>
+              </a:defRPr>
+            </a:pPr>
+            <a:r>
+              <a:t>▸    ➤ 依据：妊娠本身对盆底的压迫和激素影响（《中华妇产科杂志》2023综述）</a:t>
+            </a:r>
+          </a:p>
+        </p:txBody>
+      </p:sp>
+      <p:sp>
+        <p:nvSpPr>
+          <p:cNvPr id="7" name="TextBox 6"/>
+          <p:cNvSpPr txBox="1"/>
+          <p:nvPr/>
+        </p:nvSpPr>
+        <p:spPr>
+          <a:xfrm>
+            <a:off x="822960" y="2468880"/>
+            <a:ext cx="10332720" cy="320040"/>
+          </a:xfrm>
+          <a:prstGeom prst="rect">
+            <a:avLst/>
+          </a:prstGeom>
+          <a:noFill/>
+        </p:spPr>
+        <p:txBody>
+          <a:bodyPr wrap="square">
+            <a:spAutoFit/>
+          </a:bodyPr>
+          <a:lstStyle/>
+          <a:p>
+            <a:pPr algn="l">
+              <a:defRPr sz="1600" b="0">
+                <a:solidFill>
+                  <a:srgbClr val="282828"/>
+                </a:solidFill>
+                <a:latin typeface="微软雅黑"/>
+              </a:defRPr>
+            </a:pPr>
+            <a:r>
+              <a:t>▸ 误区2：电刺激=疼痛 → 正确参数下应仅有酥麻感或肌肉收缩感</a:t>
+            </a:r>
+          </a:p>
+        </p:txBody>
+      </p:sp>
+      <p:sp>
+        <p:nvSpPr>
+          <p:cNvPr id="8" name="TextBox 7"/>
+          <p:cNvSpPr txBox="1"/>
+          <p:nvPr/>
+        </p:nvSpPr>
+        <p:spPr>
+          <a:xfrm>
+            <a:off x="822960" y="2788920"/>
+            <a:ext cx="10332720" cy="320040"/>
+          </a:xfrm>
+          <a:prstGeom prst="rect">
+            <a:avLst/>
+          </a:prstGeom>
+          <a:noFill/>
+        </p:spPr>
+        <p:txBody>
+          <a:bodyPr wrap="square">
+            <a:spAutoFit/>
+          </a:bodyPr>
+          <a:lstStyle/>
+          <a:p>
+            <a:pPr algn="l">
+              <a:defRPr sz="1600" b="0">
+                <a:solidFill>
+                  <a:srgbClr val="282828"/>
+                </a:solidFill>
+                <a:latin typeface="微软雅黑"/>
+              </a:defRPr>
+            </a:pPr>
+            <a:r>
+              <a:t>▸    ➤ 话术：'如果有刺痛感，请立即告诉我，我们调整参数'</a:t>
+            </a:r>
+          </a:p>
+        </p:txBody>
+      </p:sp>
+      <p:sp>
+        <p:nvSpPr>
+          <p:cNvPr id="9" name="TextBox 8"/>
+          <p:cNvSpPr txBox="1"/>
+          <p:nvPr/>
+        </p:nvSpPr>
+        <p:spPr>
+          <a:xfrm>
+            <a:off x="822960" y="3108960"/>
+            <a:ext cx="10332720" cy="320040"/>
+          </a:xfrm>
+          <a:prstGeom prst="rect">
+            <a:avLst/>
+          </a:prstGeom>
+          <a:noFill/>
+        </p:spPr>
+        <p:txBody>
+          <a:bodyPr wrap="square">
+            <a:spAutoFit/>
+          </a:bodyPr>
+          <a:lstStyle/>
+          <a:p>
+            <a:pPr algn="l">
+              <a:defRPr sz="1600" b="0">
+                <a:solidFill>
+                  <a:srgbClr val="282828"/>
+                </a:solidFill>
+                <a:latin typeface="微软雅黑"/>
+              </a:defRPr>
+            </a:pPr>
+            <a:r>
+              <a:t>▸ 误区3：Kegel可替代电刺激 → 50%发力错误，电刺激精准激活</a:t>
+            </a:r>
+          </a:p>
+        </p:txBody>
+      </p:sp>
+      <p:sp>
+        <p:nvSpPr>
+          <p:cNvPr id="10" name="TextBox 9"/>
+          <p:cNvSpPr txBox="1"/>
+          <p:nvPr/>
+        </p:nvSpPr>
+        <p:spPr>
+          <a:xfrm>
+            <a:off x="822960" y="3429000"/>
+            <a:ext cx="10332720" cy="320040"/>
+          </a:xfrm>
+          <a:prstGeom prst="rect">
+            <a:avLst/>
+          </a:prstGeom>
+          <a:noFill/>
+        </p:spPr>
+        <p:txBody>
+          <a:bodyPr wrap="square">
+            <a:spAutoFit/>
+          </a:bodyPr>
+          <a:lstStyle/>
+          <a:p>
+            <a:pPr algn="l">
+              <a:defRPr sz="1600" b="0">
+                <a:solidFill>
+                  <a:srgbClr val="282828"/>
+                </a:solidFill>
+                <a:latin typeface="微软雅黑"/>
+              </a:defRPr>
+            </a:pPr>
+            <a:r>
+              <a:t>▸    ➤ 话术：'电刺激帮你找到正确的肌肉，Kegel是巩固训练'</a:t>
+            </a:r>
+          </a:p>
+        </p:txBody>
+      </p:sp>
+      <p:sp>
+        <p:nvSpPr>
+          <p:cNvPr id="11" name="TextBox 10"/>
+          <p:cNvSpPr txBox="1"/>
+          <p:nvPr/>
+        </p:nvSpPr>
+        <p:spPr>
+          <a:xfrm>
+            <a:off x="822960" y="3749040"/>
+            <a:ext cx="10332720" cy="320040"/>
+          </a:xfrm>
+          <a:prstGeom prst="rect">
+            <a:avLst/>
+          </a:prstGeom>
+          <a:noFill/>
+        </p:spPr>
+        <p:txBody>
+          <a:bodyPr wrap="square">
+            <a:spAutoFit/>
+          </a:bodyPr>
+          <a:lstStyle/>
+          <a:p>
+            <a:pPr algn="l">
+              <a:defRPr sz="1600" b="0">
+                <a:solidFill>
+                  <a:srgbClr val="282828"/>
+                </a:solidFill>
+                <a:latin typeface="微软雅黑"/>
+              </a:defRPr>
+            </a:pPr>
+            <a:r>
+              <a:t>▸ 误区4：没有症状不需治疗 → PFD进展缓慢，预防性干预效果更佳</a:t>
+            </a:r>
+          </a:p>
+        </p:txBody>
+      </p:sp>
+      <p:sp>
+        <p:nvSpPr>
+          <p:cNvPr id="12" name="TextBox 11"/>
+          <p:cNvSpPr txBox="1"/>
+          <p:nvPr/>
+        </p:nvSpPr>
+        <p:spPr>
+          <a:xfrm>
+            <a:off x="822960" y="4069080"/>
+            <a:ext cx="10332720" cy="320040"/>
+          </a:xfrm>
+          <a:prstGeom prst="rect">
+            <a:avLst/>
+          </a:prstGeom>
+          <a:noFill/>
+        </p:spPr>
+        <p:txBody>
+          <a:bodyPr wrap="square">
+            <a:spAutoFit/>
+          </a:bodyPr>
+          <a:lstStyle/>
+          <a:p>
+            <a:pPr algn="l">
+              <a:defRPr sz="1600" b="0">
+                <a:solidFill>
+                  <a:srgbClr val="282828"/>
+                </a:solidFill>
+                <a:latin typeface="微软雅黑"/>
+              </a:defRPr>
+            </a:pPr>
+            <a:r>
+              <a:t>▸    ➤ 话术：'等出现症状时，治疗难度和周期都会增加'</a:t>
+            </a:r>
+          </a:p>
+        </p:txBody>
+      </p:sp>
+      <p:sp>
+        <p:nvSpPr>
+          <p:cNvPr id="13" name="TextBox 12"/>
+          <p:cNvSpPr txBox="1"/>
+          <p:nvPr/>
+        </p:nvSpPr>
+        <p:spPr>
+          <a:xfrm>
+            <a:off x="640080" y="4389120"/>
+            <a:ext cx="10515600" cy="320040"/>
+          </a:xfrm>
+          <a:prstGeom prst="rect">
+            <a:avLst/>
+          </a:prstGeom>
+          <a:noFill/>
+        </p:spPr>
+        <p:txBody>
+          <a:bodyPr wrap="square">
+            <a:spAutoFit/>
+          </a:bodyPr>
+          <a:lstStyle/>
+          <a:p>
+            <a:pPr algn="l">
+              <a:defRPr sz="1400" b="0">
+                <a:solidFill>
+                  <a:srgbClr val="E67E22"/>
+                </a:solidFill>
+                <a:latin typeface="微软雅黑"/>
+              </a:defRPr>
+            </a:pPr>
+            <a:r>
+              <a:t>📌 每个误区附证据来源+患者教育话术模板，便于一线沟通</a:t>
+            </a:r>
+          </a:p>
+        </p:txBody>
+      </p:sp>
+      <p:sp>
+        <p:nvSpPr>
+          <p:cNvPr id="14" name="TextBox 13"/>
+          <p:cNvSpPr txBox="1"/>
+          <p:nvPr/>
+        </p:nvSpPr>
+        <p:spPr>
+          <a:xfrm>
+            <a:off x="640080" y="4709160"/>
+            <a:ext cx="10515600" cy="320040"/>
+          </a:xfrm>
+          <a:prstGeom prst="rect">
+            <a:avLst/>
+          </a:prstGeom>
+          <a:noFill/>
+        </p:spPr>
+        <p:txBody>
+          <a:bodyPr wrap="square">
+            <a:spAutoFit/>
+          </a:bodyPr>
+          <a:lstStyle/>
+          <a:p>
+            <a:pPr algn="l">
+              <a:defRPr sz="1400" b="0">
+                <a:solidFill>
+                  <a:srgbClr val="E67E22"/>
+                </a:solidFill>
+                <a:latin typeface="微软雅黑"/>
+              </a:defRPr>
+            </a:pPr>
+            <a:r>
+              <a:t>📌 心脏起搏器患者禁用TENS → 禁忌症提醒列已加入后续速查表</a:t>
+            </a:r>
+          </a:p>
+        </p:txBody>
+      </p:sp>
+    </p:spTree>
+  </p:cSld>
+  <p:clrMapOvr>
+    <a:masterClrMapping/>
+  </p:clrMapOvr>
+</p:sld>
+</file>
+
+<file path=ppt/slides/slide15.xml><?xml version="1.0" encoding="utf-8"?>
 <p:sld xmlns:a="http://schemas.openxmlformats.org/drawingml/2006/main" xmlns:p="http://schemas.openxmlformats.org/presentationml/2006/main" xmlns:r="http://schemas.openxmlformats.org/officeDocument/2006/relationships">
   <p:cSld>
     <p:bg>
@@ -6963,7 +8262,7 @@
 </p:sld>
 </file>
 
-<file path=ppt/slides/slide14.xml><?xml version="1.0" encoding="utf-8"?>
+<file path=ppt/slides/slide16.xml><?xml version="1.0" encoding="utf-8"?>
 <p:sld xmlns:a="http://schemas.openxmlformats.org/drawingml/2006/main" xmlns:p="http://schemas.openxmlformats.org/presentationml/2006/main" xmlns:r="http://schemas.openxmlformats.org/officeDocument/2006/relationships">
   <p:cSld>
     <p:bg>
@@ -8165,979 +9464,6 @@
 </p:sld>
 </file>
 
-<file path=ppt/slides/slide15.xml><?xml version="1.0" encoding="utf-8"?>
-<p:sld xmlns:a="http://schemas.openxmlformats.org/drawingml/2006/main" xmlns:p="http://schemas.openxmlformats.org/presentationml/2006/main" xmlns:r="http://schemas.openxmlformats.org/officeDocument/2006/relationships">
-  <p:cSld>
-    <p:bg>
-      <p:bgPr>
-        <a:solidFill>
-          <a:srgbClr val="FFFFFF"/>
-        </a:solidFill>
-        <a:effectLst/>
-      </p:bgPr>
-    </p:bg>
-    <p:spTree>
-      <p:nvGrpSpPr>
-        <p:cNvPr id="1" name=""/>
-        <p:cNvGrpSpPr/>
-        <p:nvPr/>
-      </p:nvGrpSpPr>
-      <p:grpSpPr/>
-      <p:sp>
-        <p:nvSpPr>
-          <p:cNvPr id="2" name="Rectangle 1"/>
-          <p:cNvSpPr/>
-          <p:nvPr/>
-        </p:nvSpPr>
-        <p:spPr>
-          <a:xfrm>
-            <a:off x="0" y="0"/>
-            <a:ext cx="12191695" cy="1005840"/>
-          </a:xfrm>
-          <a:prstGeom prst="rect">
-            <a:avLst/>
-          </a:prstGeom>
-          <a:solidFill>
-            <a:srgbClr val="003366"/>
-          </a:solidFill>
-          <a:ln>
-            <a:noFill/>
-          </a:ln>
-        </p:spPr>
-        <p:style>
-          <a:lnRef idx="1">
-            <a:schemeClr val="accent1"/>
-          </a:lnRef>
-          <a:fillRef idx="3">
-            <a:schemeClr val="accent1"/>
-          </a:fillRef>
-          <a:effectRef idx="2">
-            <a:schemeClr val="accent1"/>
-          </a:effectRef>
-          <a:fontRef idx="minor">
-            <a:schemeClr val="lt1"/>
-          </a:fontRef>
-        </p:style>
-        <p:txBody>
-          <a:bodyPr rtlCol="0" anchor="ctr"/>
-          <a:lstStyle/>
-          <a:p>
-            <a:pPr algn="ctr"/>
-          </a:p>
-        </p:txBody>
-      </p:sp>
-      <p:sp>
-        <p:nvSpPr>
-          <p:cNvPr id="3" name="TextBox 2"/>
-          <p:cNvSpPr txBox="1"/>
-          <p:nvPr/>
-        </p:nvSpPr>
-        <p:spPr>
-          <a:xfrm>
-            <a:off x="457200" y="137160"/>
-            <a:ext cx="10972800" cy="731520"/>
-          </a:xfrm>
-          <a:prstGeom prst="rect">
-            <a:avLst/>
-          </a:prstGeom>
-          <a:noFill/>
-        </p:spPr>
-        <p:txBody>
-          <a:bodyPr wrap="square">
-            <a:spAutoFit/>
-          </a:bodyPr>
-          <a:lstStyle/>
-          <a:p>
-            <a:pPr algn="l">
-              <a:defRPr sz="2800" b="1">
-                <a:solidFill>
-                  <a:srgbClr val="FFFFFF"/>
-                </a:solidFill>
-                <a:latin typeface="微软雅黑"/>
-              </a:defRPr>
-            </a:pPr>
-            <a:r>
-              <a:t>第九章  扩展适应症——超越盆底功能障碍</a:t>
-            </a:r>
-          </a:p>
-        </p:txBody>
-      </p:sp>
-      <p:sp>
-        <p:nvSpPr>
-          <p:cNvPr id="4" name="TextBox 3"/>
-          <p:cNvSpPr txBox="1"/>
-          <p:nvPr/>
-        </p:nvSpPr>
-        <p:spPr>
-          <a:xfrm>
-            <a:off x="640080" y="1463040"/>
-            <a:ext cx="10972800" cy="365760"/>
-          </a:xfrm>
-          <a:prstGeom prst="rect">
-            <a:avLst/>
-          </a:prstGeom>
-          <a:noFill/>
-        </p:spPr>
-        <p:txBody>
-          <a:bodyPr wrap="square">
-            <a:spAutoFit/>
-          </a:bodyPr>
-          <a:lstStyle/>
-          <a:p>
-            <a:pPr algn="l">
-              <a:defRPr sz="1700" b="1">
-                <a:solidFill>
-                  <a:srgbClr val="004C80"/>
-                </a:solidFill>
-                <a:latin typeface="微软雅黑"/>
-              </a:defRPr>
-            </a:pPr>
-            <a:r>
-              <a:t>电刺激在非PFD领域的精准应用</a:t>
-            </a:r>
-          </a:p>
-        </p:txBody>
-      </p:sp>
-      <p:sp>
-        <p:nvSpPr>
-          <p:cNvPr id="5" name="TextBox 4"/>
-          <p:cNvSpPr txBox="1"/>
-          <p:nvPr/>
-        </p:nvSpPr>
-        <p:spPr>
-          <a:xfrm>
-            <a:off x="822960" y="1828800"/>
-            <a:ext cx="10332720" cy="320040"/>
-          </a:xfrm>
-          <a:prstGeom prst="rect">
-            <a:avLst/>
-          </a:prstGeom>
-          <a:noFill/>
-        </p:spPr>
-        <p:txBody>
-          <a:bodyPr wrap="square">
-            <a:spAutoFit/>
-          </a:bodyPr>
-          <a:lstStyle/>
-          <a:p>
-            <a:pPr algn="l">
-              <a:defRPr sz="1600" b="0">
-                <a:solidFill>
-                  <a:srgbClr val="282828"/>
-                </a:solidFill>
-                <a:latin typeface="微软雅黑"/>
-              </a:defRPr>
-            </a:pPr>
-            <a:r>
-              <a:t>▸ 外阴白斑：MENS微电流促进局部血供和色素代谢</a:t>
-            </a:r>
-          </a:p>
-        </p:txBody>
-      </p:sp>
-      <p:sp>
-        <p:nvSpPr>
-          <p:cNvPr id="6" name="TextBox 5"/>
-          <p:cNvSpPr txBox="1"/>
-          <p:nvPr/>
-        </p:nvSpPr>
-        <p:spPr>
-          <a:xfrm>
-            <a:off x="822960" y="2148840"/>
-            <a:ext cx="10332720" cy="320040"/>
-          </a:xfrm>
-          <a:prstGeom prst="rect">
-            <a:avLst/>
-          </a:prstGeom>
-          <a:noFill/>
-        </p:spPr>
-        <p:txBody>
-          <a:bodyPr wrap="square">
-            <a:spAutoFit/>
-          </a:bodyPr>
-          <a:lstStyle/>
-          <a:p>
-            <a:pPr algn="l">
-              <a:defRPr sz="1600" b="0">
-                <a:solidFill>
-                  <a:srgbClr val="282828"/>
-                </a:solidFill>
-                <a:latin typeface="微软雅黑"/>
-              </a:defRPr>
-            </a:pPr>
-            <a:r>
-              <a:t>▸ 阴道萎缩：低频电刺激+局部雌激素联合，促进胶原重塑</a:t>
-            </a:r>
-          </a:p>
-        </p:txBody>
-      </p:sp>
-      <p:sp>
-        <p:nvSpPr>
-          <p:cNvPr id="7" name="TextBox 6"/>
-          <p:cNvSpPr txBox="1"/>
-          <p:nvPr/>
-        </p:nvSpPr>
-        <p:spPr>
-          <a:xfrm>
-            <a:off x="822960" y="2468880"/>
-            <a:ext cx="10332720" cy="320040"/>
-          </a:xfrm>
-          <a:prstGeom prst="rect">
-            <a:avLst/>
-          </a:prstGeom>
-          <a:noFill/>
-        </p:spPr>
-        <p:txBody>
-          <a:bodyPr wrap="square">
-            <a:spAutoFit/>
-          </a:bodyPr>
-          <a:lstStyle/>
-          <a:p>
-            <a:pPr algn="l">
-              <a:defRPr sz="1600" b="0">
-                <a:solidFill>
-                  <a:srgbClr val="282828"/>
-                </a:solidFill>
-                <a:latin typeface="微软雅黑"/>
-              </a:defRPr>
-            </a:pPr>
-            <a:r>
-              <a:t>▸ 会阴撕裂愈合：MENS促进ATP合成、减轻炎症因子</a:t>
-            </a:r>
-          </a:p>
-        </p:txBody>
-      </p:sp>
-      <p:sp>
-        <p:nvSpPr>
-          <p:cNvPr id="8" name="TextBox 7"/>
-          <p:cNvSpPr txBox="1"/>
-          <p:nvPr/>
-        </p:nvSpPr>
-        <p:spPr>
-          <a:xfrm>
-            <a:off x="822960" y="2788920"/>
-            <a:ext cx="10332720" cy="320040"/>
-          </a:xfrm>
-          <a:prstGeom prst="rect">
-            <a:avLst/>
-          </a:prstGeom>
-          <a:noFill/>
-        </p:spPr>
-        <p:txBody>
-          <a:bodyPr wrap="square">
-            <a:spAutoFit/>
-          </a:bodyPr>
-          <a:lstStyle/>
-          <a:p>
-            <a:pPr algn="l">
-              <a:defRPr sz="1600" b="0">
-                <a:solidFill>
-                  <a:srgbClr val="282828"/>
-                </a:solidFill>
-                <a:latin typeface="微软雅黑"/>
-              </a:defRPr>
-            </a:pPr>
-            <a:r>
-              <a:t>▸ 慢性盆腔炎：IFC干扰电深层消炎镇痛</a:t>
-            </a:r>
-          </a:p>
-        </p:txBody>
-      </p:sp>
-      <p:sp>
-        <p:nvSpPr>
-          <p:cNvPr id="9" name="TextBox 8"/>
-          <p:cNvSpPr txBox="1"/>
-          <p:nvPr/>
-        </p:nvSpPr>
-        <p:spPr>
-          <a:xfrm>
-            <a:off x="822960" y="3108960"/>
-            <a:ext cx="10332720" cy="320040"/>
-          </a:xfrm>
-          <a:prstGeom prst="rect">
-            <a:avLst/>
-          </a:prstGeom>
-          <a:noFill/>
-        </p:spPr>
-        <p:txBody>
-          <a:bodyPr wrap="square">
-            <a:spAutoFit/>
-          </a:bodyPr>
-          <a:lstStyle/>
-          <a:p>
-            <a:pPr algn="l">
-              <a:defRPr sz="1600" b="0">
-                <a:solidFill>
-                  <a:srgbClr val="282828"/>
-                </a:solidFill>
-                <a:latin typeface="微软雅黑"/>
-              </a:defRPr>
-            </a:pPr>
-            <a:r>
-              <a:t>▸ 术后尿潴留：FES辅助膀胱排空，减少导尿管留置时间</a:t>
-            </a:r>
-          </a:p>
-        </p:txBody>
-      </p:sp>
-      <p:sp>
-        <p:nvSpPr>
-          <p:cNvPr id="10" name="TextBox 9"/>
-          <p:cNvSpPr txBox="1"/>
-          <p:nvPr/>
-        </p:nvSpPr>
-        <p:spPr>
-          <a:xfrm>
-            <a:off x="822960" y="3429000"/>
-            <a:ext cx="10332720" cy="320040"/>
-          </a:xfrm>
-          <a:prstGeom prst="rect">
-            <a:avLst/>
-          </a:prstGeom>
-          <a:noFill/>
-        </p:spPr>
-        <p:txBody>
-          <a:bodyPr wrap="square">
-            <a:spAutoFit/>
-          </a:bodyPr>
-          <a:lstStyle/>
-          <a:p>
-            <a:pPr algn="l">
-              <a:defRPr sz="1600" b="0">
-                <a:solidFill>
-                  <a:srgbClr val="282828"/>
-                </a:solidFill>
-                <a:latin typeface="微软雅黑"/>
-              </a:defRPr>
-            </a:pPr>
-            <a:r>
-              <a:t>▸ 肛肠术后：促进括约肌功能恢复</a:t>
-            </a:r>
-          </a:p>
-        </p:txBody>
-      </p:sp>
-      <p:sp>
-        <p:nvSpPr>
-          <p:cNvPr id="11" name="TextBox 10"/>
-          <p:cNvSpPr txBox="1"/>
-          <p:nvPr/>
-        </p:nvSpPr>
-        <p:spPr>
-          <a:xfrm>
-            <a:off x="640080" y="3749040"/>
-            <a:ext cx="10972800" cy="365760"/>
-          </a:xfrm>
-          <a:prstGeom prst="rect">
-            <a:avLst/>
-          </a:prstGeom>
-          <a:noFill/>
-        </p:spPr>
-        <p:txBody>
-          <a:bodyPr wrap="square">
-            <a:spAutoFit/>
-          </a:bodyPr>
-          <a:lstStyle/>
-          <a:p>
-            <a:pPr algn="l">
-              <a:defRPr sz="1700" b="1">
-                <a:solidFill>
-                  <a:srgbClr val="004C80"/>
-                </a:solidFill>
-                <a:latin typeface="微软雅黑"/>
-              </a:defRPr>
-            </a:pPr>
-            <a:r>
-              <a:t>电刺激与组织修复机制</a:t>
-            </a:r>
-          </a:p>
-        </p:txBody>
-      </p:sp>
-      <p:sp>
-        <p:nvSpPr>
-          <p:cNvPr id="12" name="TextBox 11"/>
-          <p:cNvSpPr txBox="1"/>
-          <p:nvPr/>
-        </p:nvSpPr>
-        <p:spPr>
-          <a:xfrm>
-            <a:off x="822960" y="4114800"/>
-            <a:ext cx="10332720" cy="320040"/>
-          </a:xfrm>
-          <a:prstGeom prst="rect">
-            <a:avLst/>
-          </a:prstGeom>
-          <a:noFill/>
-        </p:spPr>
-        <p:txBody>
-          <a:bodyPr wrap="square">
-            <a:spAutoFit/>
-          </a:bodyPr>
-          <a:lstStyle/>
-          <a:p>
-            <a:pPr algn="l">
-              <a:defRPr sz="1600" b="0">
-                <a:solidFill>
-                  <a:srgbClr val="282828"/>
-                </a:solidFill>
-                <a:latin typeface="微软雅黑"/>
-              </a:defRPr>
-            </a:pPr>
-            <a:r>
-              <a:t>▸ 促进ATP合成 → 细胞能量供应增强</a:t>
-            </a:r>
-          </a:p>
-        </p:txBody>
-      </p:sp>
-      <p:sp>
-        <p:nvSpPr>
-          <p:cNvPr id="13" name="TextBox 12"/>
-          <p:cNvSpPr txBox="1"/>
-          <p:nvPr/>
-        </p:nvSpPr>
-        <p:spPr>
-          <a:xfrm>
-            <a:off x="822960" y="4434840"/>
-            <a:ext cx="10332720" cy="320040"/>
-          </a:xfrm>
-          <a:prstGeom prst="rect">
-            <a:avLst/>
-          </a:prstGeom>
-          <a:noFill/>
-        </p:spPr>
-        <p:txBody>
-          <a:bodyPr wrap="square">
-            <a:spAutoFit/>
-          </a:bodyPr>
-          <a:lstStyle/>
-          <a:p>
-            <a:pPr algn="l">
-              <a:defRPr sz="1600" b="0">
-                <a:solidFill>
-                  <a:srgbClr val="282828"/>
-                </a:solidFill>
-                <a:latin typeface="微软雅黑"/>
-              </a:defRPr>
-            </a:pPr>
-            <a:r>
-              <a:t>▸ 调节炎症因子 → 减轻局部炎性反应</a:t>
-            </a:r>
-          </a:p>
-        </p:txBody>
-      </p:sp>
-      <p:sp>
-        <p:nvSpPr>
-          <p:cNvPr id="14" name="TextBox 13"/>
-          <p:cNvSpPr txBox="1"/>
-          <p:nvPr/>
-        </p:nvSpPr>
-        <p:spPr>
-          <a:xfrm>
-            <a:off x="822960" y="4754880"/>
-            <a:ext cx="10332720" cy="320040"/>
-          </a:xfrm>
-          <a:prstGeom prst="rect">
-            <a:avLst/>
-          </a:prstGeom>
-          <a:noFill/>
-        </p:spPr>
-        <p:txBody>
-          <a:bodyPr wrap="square">
-            <a:spAutoFit/>
-          </a:bodyPr>
-          <a:lstStyle/>
-          <a:p>
-            <a:pPr algn="l">
-              <a:defRPr sz="1600" b="0">
-                <a:solidFill>
-                  <a:srgbClr val="282828"/>
-                </a:solidFill>
-                <a:latin typeface="微软雅黑"/>
-              </a:defRPr>
-            </a:pPr>
-            <a:r>
-              <a:t>▸ 促进胶原重塑 → 改善组织弹性和支撑力</a:t>
-            </a:r>
-          </a:p>
-        </p:txBody>
-      </p:sp>
-      <p:sp>
-        <p:nvSpPr>
-          <p:cNvPr id="15" name="TextBox 14"/>
-          <p:cNvSpPr txBox="1"/>
-          <p:nvPr/>
-        </p:nvSpPr>
-        <p:spPr>
-          <a:xfrm>
-            <a:off x="640080" y="5074920"/>
-            <a:ext cx="10515600" cy="320040"/>
-          </a:xfrm>
-          <a:prstGeom prst="rect">
-            <a:avLst/>
-          </a:prstGeom>
-          <a:noFill/>
-        </p:spPr>
-        <p:txBody>
-          <a:bodyPr wrap="square">
-            <a:spAutoFit/>
-          </a:bodyPr>
-          <a:lstStyle/>
-          <a:p>
-            <a:pPr algn="l">
-              <a:defRPr sz="1400" b="0">
-                <a:solidFill>
-                  <a:srgbClr val="E67E22"/>
-                </a:solidFill>
-                <a:latin typeface="微软雅黑"/>
-              </a:defRPr>
-            </a:pPr>
-            <a:r>
-              <a:t>📌 学术引用：相关机制研究可参考Journal of Tissue Engineering文献</a:t>
-            </a:r>
-          </a:p>
-        </p:txBody>
-      </p:sp>
-    </p:spTree>
-  </p:cSld>
-  <p:clrMapOvr>
-    <a:masterClrMapping/>
-  </p:clrMapOvr>
-</p:sld>
-</file>
-
-<file path=ppt/slides/slide16.xml><?xml version="1.0" encoding="utf-8"?>
-<p:sld xmlns:a="http://schemas.openxmlformats.org/drawingml/2006/main" xmlns:p="http://schemas.openxmlformats.org/presentationml/2006/main" xmlns:r="http://schemas.openxmlformats.org/officeDocument/2006/relationships">
-  <p:cSld>
-    <p:bg>
-      <p:bgPr>
-        <a:solidFill>
-          <a:srgbClr val="003366"/>
-        </a:solidFill>
-        <a:effectLst/>
-      </p:bgPr>
-    </p:bg>
-    <p:spTree>
-      <p:nvGrpSpPr>
-        <p:cNvPr id="1" name=""/>
-        <p:cNvGrpSpPr/>
-        <p:nvPr/>
-      </p:nvGrpSpPr>
-      <p:grpSpPr/>
-      <p:sp>
-        <p:nvSpPr>
-          <p:cNvPr id="2" name="Rectangle 1"/>
-          <p:cNvSpPr/>
-          <p:nvPr/>
-        </p:nvSpPr>
-        <p:spPr>
-          <a:xfrm>
-            <a:off x="0" y="5943600"/>
-            <a:ext cx="12191695" cy="914400"/>
-          </a:xfrm>
-          <a:prstGeom prst="rect">
-            <a:avLst/>
-          </a:prstGeom>
-          <a:solidFill>
-            <a:srgbClr val="004C80"/>
-          </a:solidFill>
-          <a:ln>
-            <a:noFill/>
-          </a:ln>
-        </p:spPr>
-        <p:style>
-          <a:lnRef idx="1">
-            <a:schemeClr val="accent1"/>
-          </a:lnRef>
-          <a:fillRef idx="3">
-            <a:schemeClr val="accent1"/>
-          </a:fillRef>
-          <a:effectRef idx="2">
-            <a:schemeClr val="accent1"/>
-          </a:effectRef>
-          <a:fontRef idx="minor">
-            <a:schemeClr val="lt1"/>
-          </a:fontRef>
-        </p:style>
-        <p:txBody>
-          <a:bodyPr rtlCol="0" anchor="ctr"/>
-          <a:lstStyle/>
-          <a:p>
-            <a:pPr algn="ctr"/>
-          </a:p>
-        </p:txBody>
-      </p:sp>
-      <p:sp>
-        <p:nvSpPr>
-          <p:cNvPr id="3" name="TextBox 2"/>
-          <p:cNvSpPr txBox="1"/>
-          <p:nvPr/>
-        </p:nvSpPr>
-        <p:spPr>
-          <a:xfrm>
-            <a:off x="914400" y="1371600"/>
-            <a:ext cx="10058400" cy="914400"/>
-          </a:xfrm>
-          <a:prstGeom prst="rect">
-            <a:avLst/>
-          </a:prstGeom>
-          <a:noFill/>
-        </p:spPr>
-        <p:txBody>
-          <a:bodyPr wrap="square">
-            <a:spAutoFit/>
-          </a:bodyPr>
-          <a:lstStyle/>
-          <a:p>
-            <a:pPr algn="l">
-              <a:defRPr sz="3400" b="1">
-                <a:solidFill>
-                  <a:srgbClr val="FFFFFF"/>
-                </a:solidFill>
-                <a:latin typeface="微软雅黑"/>
-              </a:defRPr>
-            </a:pPr>
-            <a:r>
-              <a:t>总结与核心要点</a:t>
-            </a:r>
-          </a:p>
-        </p:txBody>
-      </p:sp>
-      <p:sp>
-        <p:nvSpPr>
-          <p:cNvPr id="4" name="Rectangle 3"/>
-          <p:cNvSpPr/>
-          <p:nvPr/>
-        </p:nvSpPr>
-        <p:spPr>
-          <a:xfrm>
-            <a:off x="914400" y="2377440"/>
-            <a:ext cx="3657600" cy="36576"/>
-          </a:xfrm>
-          <a:prstGeom prst="rect">
-            <a:avLst/>
-          </a:prstGeom>
-          <a:solidFill>
-            <a:srgbClr val="E67E22"/>
-          </a:solidFill>
-          <a:ln>
-            <a:noFill/>
-          </a:ln>
-        </p:spPr>
-        <p:style>
-          <a:lnRef idx="1">
-            <a:schemeClr val="accent1"/>
-          </a:lnRef>
-          <a:fillRef idx="3">
-            <a:schemeClr val="accent1"/>
-          </a:fillRef>
-          <a:effectRef idx="2">
-            <a:schemeClr val="accent1"/>
-          </a:effectRef>
-          <a:fontRef idx="minor">
-            <a:schemeClr val="lt1"/>
-          </a:fontRef>
-        </p:style>
-        <p:txBody>
-          <a:bodyPr rtlCol="0" anchor="ctr"/>
-          <a:lstStyle/>
-          <a:p>
-            <a:pPr algn="ctr"/>
-          </a:p>
-        </p:txBody>
-      </p:sp>
-      <p:sp>
-        <p:nvSpPr>
-          <p:cNvPr id="5" name="TextBox 4"/>
-          <p:cNvSpPr txBox="1"/>
-          <p:nvPr/>
-        </p:nvSpPr>
-        <p:spPr>
-          <a:xfrm>
-            <a:off x="1097280" y="2743200"/>
-            <a:ext cx="10058400" cy="365760"/>
-          </a:xfrm>
-          <a:prstGeom prst="rect">
-            <a:avLst/>
-          </a:prstGeom>
-          <a:noFill/>
-        </p:spPr>
-        <p:txBody>
-          <a:bodyPr wrap="square">
-            <a:spAutoFit/>
-          </a:bodyPr>
-          <a:lstStyle/>
-          <a:p>
-            <a:pPr algn="l">
-              <a:defRPr sz="1800" b="0">
-                <a:solidFill>
-                  <a:srgbClr val="FFFFFF"/>
-                </a:solidFill>
-                <a:latin typeface="微软雅黑"/>
-              </a:defRPr>
-            </a:pPr>
-            <a:r>
-              <a:t>▸ PFD不只是女性问题——打破认知误区</a:t>
-            </a:r>
-          </a:p>
-        </p:txBody>
-      </p:sp>
-      <p:sp>
-        <p:nvSpPr>
-          <p:cNvPr id="6" name="TextBox 5"/>
-          <p:cNvSpPr txBox="1"/>
-          <p:nvPr/>
-        </p:nvSpPr>
-        <p:spPr>
-          <a:xfrm>
-            <a:off x="1097280" y="3154680"/>
-            <a:ext cx="10058400" cy="365760"/>
-          </a:xfrm>
-          <a:prstGeom prst="rect">
-            <a:avLst/>
-          </a:prstGeom>
-          <a:noFill/>
-        </p:spPr>
-        <p:txBody>
-          <a:bodyPr wrap="square">
-            <a:spAutoFit/>
-          </a:bodyPr>
-          <a:lstStyle/>
-          <a:p>
-            <a:pPr algn="l">
-              <a:defRPr sz="1800" b="0">
-                <a:solidFill>
-                  <a:srgbClr val="FFFFFF"/>
-                </a:solidFill>
-                <a:latin typeface="微软雅黑"/>
-              </a:defRPr>
-            </a:pPr>
-            <a:r>
-              <a:t>▸ 电刺激分类体系：TENS/NMES/MENS/FES/IFC各有所长</a:t>
-            </a:r>
-          </a:p>
-        </p:txBody>
-      </p:sp>
-      <p:sp>
-        <p:nvSpPr>
-          <p:cNvPr id="7" name="TextBox 6"/>
-          <p:cNvSpPr txBox="1"/>
-          <p:nvPr/>
-        </p:nvSpPr>
-        <p:spPr>
-          <a:xfrm>
-            <a:off x="1097280" y="3566160"/>
-            <a:ext cx="10058400" cy="365760"/>
-          </a:xfrm>
-          <a:prstGeom prst="rect">
-            <a:avLst/>
-          </a:prstGeom>
-          <a:noFill/>
-        </p:spPr>
-        <p:txBody>
-          <a:bodyPr wrap="square">
-            <a:spAutoFit/>
-          </a:bodyPr>
-          <a:lstStyle/>
-          <a:p>
-            <a:pPr algn="l">
-              <a:defRPr sz="1800" b="0">
-                <a:solidFill>
-                  <a:srgbClr val="FFFFFF"/>
-                </a:solidFill>
-                <a:latin typeface="微软雅黑"/>
-              </a:defRPr>
-            </a:pPr>
-            <a:r>
-              <a:t>▸ 波形选择决定治疗效果与患者体验——双相平衡波为盆底首选</a:t>
-            </a:r>
-          </a:p>
-        </p:txBody>
-      </p:sp>
-      <p:sp>
-        <p:nvSpPr>
-          <p:cNvPr id="8" name="TextBox 7"/>
-          <p:cNvSpPr txBox="1"/>
-          <p:nvPr/>
-        </p:nvSpPr>
-        <p:spPr>
-          <a:xfrm>
-            <a:off x="1097280" y="3977640"/>
-            <a:ext cx="10058400" cy="365760"/>
-          </a:xfrm>
-          <a:prstGeom prst="rect">
-            <a:avLst/>
-          </a:prstGeom>
-          <a:noFill/>
-        </p:spPr>
-        <p:txBody>
-          <a:bodyPr wrap="square">
-            <a:spAutoFit/>
-          </a:bodyPr>
-          <a:lstStyle/>
-          <a:p>
-            <a:pPr algn="l">
-              <a:defRPr sz="1800" b="0">
-                <a:solidFill>
-                  <a:srgbClr val="FFFFFF"/>
-                </a:solidFill>
-                <a:latin typeface="微软雅黑"/>
-              </a:defRPr>
-            </a:pPr>
-            <a:r>
-              <a:t>▸ Glazer评估五步法是精准治疗的基石</a:t>
-            </a:r>
-          </a:p>
-        </p:txBody>
-      </p:sp>
-      <p:sp>
-        <p:nvSpPr>
-          <p:cNvPr id="9" name="TextBox 8"/>
-          <p:cNvSpPr txBox="1"/>
-          <p:nvPr/>
-        </p:nvSpPr>
-        <p:spPr>
-          <a:xfrm>
-            <a:off x="1097280" y="4389120"/>
-            <a:ext cx="10058400" cy="365760"/>
-          </a:xfrm>
-          <a:prstGeom prst="rect">
-            <a:avLst/>
-          </a:prstGeom>
-          <a:noFill/>
-        </p:spPr>
-        <p:txBody>
-          <a:bodyPr wrap="square">
-            <a:spAutoFit/>
-          </a:bodyPr>
-          <a:lstStyle/>
-          <a:p>
-            <a:pPr algn="l">
-              <a:defRPr sz="1800" b="0">
-                <a:solidFill>
-                  <a:srgbClr val="FFFFFF"/>
-                </a:solidFill>
-                <a:latin typeface="微软雅黑"/>
-              </a:defRPr>
-            </a:pPr>
-            <a:r>
-              <a:t>▸ 三阶段策略：引导期→强化期→自主期</a:t>
-            </a:r>
-          </a:p>
-        </p:txBody>
-      </p:sp>
-      <p:sp>
-        <p:nvSpPr>
-          <p:cNvPr id="10" name="TextBox 9"/>
-          <p:cNvSpPr txBox="1"/>
-          <p:nvPr/>
-        </p:nvSpPr>
-        <p:spPr>
-          <a:xfrm>
-            <a:off x="1097280" y="4800600"/>
-            <a:ext cx="10058400" cy="365760"/>
-          </a:xfrm>
-          <a:prstGeom prst="rect">
-            <a:avLst/>
-          </a:prstGeom>
-          <a:noFill/>
-        </p:spPr>
-        <p:txBody>
-          <a:bodyPr wrap="square">
-            <a:spAutoFit/>
-          </a:bodyPr>
-          <a:lstStyle/>
-          <a:p>
-            <a:pPr algn="l">
-              <a:defRPr sz="1800" b="0">
-                <a:solidFill>
-                  <a:srgbClr val="FFFFFF"/>
-                </a:solidFill>
-                <a:latin typeface="微软雅黑"/>
-              </a:defRPr>
-            </a:pPr>
-            <a:r>
-              <a:t>▸ 产品选择：院内伟思/杉山 → 居家圆小汫</a:t>
-            </a:r>
-          </a:p>
-        </p:txBody>
-      </p:sp>
-      <p:sp>
-        <p:nvSpPr>
-          <p:cNvPr id="11" name="TextBox 10"/>
-          <p:cNvSpPr txBox="1"/>
-          <p:nvPr/>
-        </p:nvSpPr>
-        <p:spPr>
-          <a:xfrm>
-            <a:off x="1097280" y="5212080"/>
-            <a:ext cx="10058400" cy="365760"/>
-          </a:xfrm>
-          <a:prstGeom prst="rect">
-            <a:avLst/>
-          </a:prstGeom>
-          <a:noFill/>
-        </p:spPr>
-        <p:txBody>
-          <a:bodyPr wrap="square">
-            <a:spAutoFit/>
-          </a:bodyPr>
-          <a:lstStyle/>
-          <a:p>
-            <a:pPr algn="l">
-              <a:defRPr sz="1800" b="0">
-                <a:solidFill>
-                  <a:srgbClr val="FFFFFF"/>
-                </a:solidFill>
-                <a:latin typeface="微软雅黑"/>
-              </a:defRPr>
-            </a:pPr>
-            <a:r>
-              <a:t>▸ 扩展适应症：外阴白斑、慢性盆腔炎、术后康复</a:t>
-            </a:r>
-          </a:p>
-        </p:txBody>
-      </p:sp>
-      <p:sp>
-        <p:nvSpPr>
-          <p:cNvPr id="12" name="TextBox 11"/>
-          <p:cNvSpPr txBox="1"/>
-          <p:nvPr/>
-        </p:nvSpPr>
-        <p:spPr>
-          <a:xfrm>
-            <a:off x="914400" y="5486400"/>
-            <a:ext cx="10058400" cy="365760"/>
-          </a:xfrm>
-          <a:prstGeom prst="rect">
-            <a:avLst/>
-          </a:prstGeom>
-          <a:noFill/>
-        </p:spPr>
-        <p:txBody>
-          <a:bodyPr wrap="square">
-            <a:spAutoFit/>
-          </a:bodyPr>
-          <a:lstStyle/>
-          <a:p>
-            <a:pPr algn="l">
-              <a:defRPr sz="1300" b="0">
-                <a:solidFill>
-                  <a:srgbClr val="B4B4B4"/>
-                </a:solidFill>
-                <a:latin typeface="微软雅黑"/>
-              </a:defRPr>
-            </a:pPr>
-            <a:r>
-              <a:t>广州圆爱康生物科技有限公司  |  www.yuanekang.com  |  版本V4.0 专业升级版</a:t>
-            </a:r>
-          </a:p>
-        </p:txBody>
-      </p:sp>
-    </p:spTree>
-  </p:cSld>
-  <p:clrMapOvr>
-    <a:masterClrMapping/>
-  </p:clrMapOvr>
-</p:sld>
-</file>
-
 <file path=ppt/slides/slide17.xml><?xml version="1.0" encoding="utf-8"?>
 <p:sld xmlns:a="http://schemas.openxmlformats.org/drawingml/2006/main" xmlns:p="http://schemas.openxmlformats.org/presentationml/2006/main" xmlns:r="http://schemas.openxmlformats.org/officeDocument/2006/relationships">
   <p:cSld>
@@ -9230,7 +9556,7 @@
               </a:defRPr>
             </a:pPr>
             <a:r>
-              <a:t>参考资料与学术引用</a:t>
+              <a:t>第九章  扩展适应症——超越盆底功能障碍</a:t>
             </a:r>
           </a:p>
         </p:txBody>
@@ -9243,7 +9569,43 @@
         </p:nvSpPr>
         <p:spPr>
           <a:xfrm>
-            <a:off x="822960" y="1463040"/>
+            <a:off x="640080" y="1463040"/>
+            <a:ext cx="10972800" cy="365760"/>
+          </a:xfrm>
+          <a:prstGeom prst="rect">
+            <a:avLst/>
+          </a:prstGeom>
+          <a:noFill/>
+        </p:spPr>
+        <p:txBody>
+          <a:bodyPr wrap="square">
+            <a:spAutoFit/>
+          </a:bodyPr>
+          <a:lstStyle/>
+          <a:p>
+            <a:pPr algn="l">
+              <a:defRPr sz="1700" b="1">
+                <a:solidFill>
+                  <a:srgbClr val="004C80"/>
+                </a:solidFill>
+                <a:latin typeface="微软雅黑"/>
+              </a:defRPr>
+            </a:pPr>
+            <a:r>
+              <a:t>电刺激在非PFD领域的精准应用</a:t>
+            </a:r>
+          </a:p>
+        </p:txBody>
+      </p:sp>
+      <p:sp>
+        <p:nvSpPr>
+          <p:cNvPr id="5" name="TextBox 4"/>
+          <p:cNvSpPr txBox="1"/>
+          <p:nvPr/>
+        </p:nvSpPr>
+        <p:spPr>
+          <a:xfrm>
+            <a:off x="822960" y="1828800"/>
             <a:ext cx="10332720" cy="320040"/>
           </a:xfrm>
           <a:prstGeom prst="rect">
@@ -9266,20 +9628,20 @@
               </a:defRPr>
             </a:pPr>
             <a:r>
-              <a:t>▸ 1. Glazer HI, et al. Pelvic floor muscle surface electromyography: reliability and clinical significance. J Urol. 1995.</a:t>
-            </a:r>
-          </a:p>
-        </p:txBody>
-      </p:sp>
-      <p:sp>
-        <p:nvSpPr>
-          <p:cNvPr id="5" name="TextBox 4"/>
-          <p:cNvSpPr txBox="1"/>
-          <p:nvPr/>
-        </p:nvSpPr>
-        <p:spPr>
-          <a:xfrm>
-            <a:off x="822960" y="1783080"/>
+              <a:t>▸ 外阴白斑：MENS微电流促进局部血供和色素代谢</a:t>
+            </a:r>
+          </a:p>
+        </p:txBody>
+      </p:sp>
+      <p:sp>
+        <p:nvSpPr>
+          <p:cNvPr id="6" name="TextBox 5"/>
+          <p:cNvSpPr txBox="1"/>
+          <p:nvPr/>
+        </p:nvSpPr>
+        <p:spPr>
+          <a:xfrm>
+            <a:off x="822960" y="2148840"/>
             <a:ext cx="10332720" cy="320040"/>
           </a:xfrm>
           <a:prstGeom prst="rect">
@@ -9302,20 +9664,20 @@
               </a:defRPr>
             </a:pPr>
             <a:r>
-              <a:t>▸ 2. ACOG Committee Opinion No. 687: Approaches to Prevention of Pelvic Floor Disorders. 2017.</a:t>
-            </a:r>
-          </a:p>
-        </p:txBody>
-      </p:sp>
-      <p:sp>
-        <p:nvSpPr>
-          <p:cNvPr id="6" name="TextBox 5"/>
-          <p:cNvSpPr txBox="1"/>
-          <p:nvPr/>
-        </p:nvSpPr>
-        <p:spPr>
-          <a:xfrm>
-            <a:off x="822960" y="2103120"/>
+              <a:t>▸ 阴道萎缩：低频电刺激+局部雌激素联合，促进胶原重塑</a:t>
+            </a:r>
+          </a:p>
+        </p:txBody>
+      </p:sp>
+      <p:sp>
+        <p:nvSpPr>
+          <p:cNvPr id="7" name="TextBox 6"/>
+          <p:cNvSpPr txBox="1"/>
+          <p:nvPr/>
+        </p:nvSpPr>
+        <p:spPr>
+          <a:xfrm>
+            <a:off x="822960" y="2468880"/>
             <a:ext cx="10332720" cy="320040"/>
           </a:xfrm>
           <a:prstGeom prst="rect">
@@ -9338,20 +9700,20 @@
               </a:defRPr>
             </a:pPr>
             <a:r>
-              <a:t>▸ 3. 中华医学会妇产科学分会. 盆底功能障碍性疾病诊治指南(2022版).</a:t>
-            </a:r>
-          </a:p>
-        </p:txBody>
-      </p:sp>
-      <p:sp>
-        <p:nvSpPr>
-          <p:cNvPr id="7" name="TextBox 6"/>
-          <p:cNvSpPr txBox="1"/>
-          <p:nvPr/>
-        </p:nvSpPr>
-        <p:spPr>
-          <a:xfrm>
-            <a:off x="822960" y="2423160"/>
+              <a:t>▸ 会阴撕裂愈合：MENS促进ATP合成、减轻炎症因子</a:t>
+            </a:r>
+          </a:p>
+        </p:txBody>
+      </p:sp>
+      <p:sp>
+        <p:nvSpPr>
+          <p:cNvPr id="8" name="TextBox 7"/>
+          <p:cNvSpPr txBox="1"/>
+          <p:nvPr/>
+        </p:nvSpPr>
+        <p:spPr>
+          <a:xfrm>
+            <a:off x="822960" y="2788920"/>
             <a:ext cx="10332720" cy="320040"/>
           </a:xfrm>
           <a:prstGeom prst="rect">
@@ -9374,20 +9736,20 @@
               </a:defRPr>
             </a:pPr>
             <a:r>
-              <a:t>▸ 4. Sheffler LR, Chae J. Neuromuscular electrical stimulation in neurorehabilitation. Muscle Nerve. 2007.</a:t>
-            </a:r>
-          </a:p>
-        </p:txBody>
-      </p:sp>
-      <p:sp>
-        <p:nvSpPr>
-          <p:cNvPr id="8" name="TextBox 7"/>
-          <p:cNvSpPr txBox="1"/>
-          <p:nvPr/>
-        </p:nvSpPr>
-        <p:spPr>
-          <a:xfrm>
-            <a:off x="822960" y="2743200"/>
+              <a:t>▸ 慢性盆腔炎：IFC干扰电深层消炎镇痛</a:t>
+            </a:r>
+          </a:p>
+        </p:txBody>
+      </p:sp>
+      <p:sp>
+        <p:nvSpPr>
+          <p:cNvPr id="9" name="TextBox 8"/>
+          <p:cNvSpPr txBox="1"/>
+          <p:nvPr/>
+        </p:nvSpPr>
+        <p:spPr>
+          <a:xfrm>
+            <a:off x="822960" y="3108960"/>
             <a:ext cx="10332720" cy="320040"/>
           </a:xfrm>
           <a:prstGeom prst="rect">
@@ -9410,20 +9772,20 @@
               </a:defRPr>
             </a:pPr>
             <a:r>
-              <a:t>▸ 5. 国家药品监督管理局. 低频电刺激治疗设备注册技术审查指导原则.</a:t>
-            </a:r>
-          </a:p>
-        </p:txBody>
-      </p:sp>
-      <p:sp>
-        <p:nvSpPr>
-          <p:cNvPr id="9" name="TextBox 8"/>
-          <p:cNvSpPr txBox="1"/>
-          <p:nvPr/>
-        </p:nvSpPr>
-        <p:spPr>
-          <a:xfrm>
-            <a:off x="822960" y="3063240"/>
+              <a:t>▸ 术后尿潴留：FES辅助膀胱排空，减少导尿管留置时间</a:t>
+            </a:r>
+          </a:p>
+        </p:txBody>
+      </p:sp>
+      <p:sp>
+        <p:nvSpPr>
+          <p:cNvPr id="10" name="TextBox 9"/>
+          <p:cNvSpPr txBox="1"/>
+          <p:nvPr/>
+        </p:nvSpPr>
+        <p:spPr>
+          <a:xfrm>
+            <a:off x="822960" y="3429000"/>
             <a:ext cx="10332720" cy="320040"/>
           </a:xfrm>
           <a:prstGeom prst="rect">
@@ -9446,20 +9808,56 @@
               </a:defRPr>
             </a:pPr>
             <a:r>
-              <a:t>▸ 6. ICS (International Continence Society). Standardization of Terminology of Pelvic Floor Muscle Function. 2021.</a:t>
-            </a:r>
-          </a:p>
-        </p:txBody>
-      </p:sp>
-      <p:sp>
-        <p:nvSpPr>
-          <p:cNvPr id="10" name="TextBox 9"/>
-          <p:cNvSpPr txBox="1"/>
-          <p:nvPr/>
-        </p:nvSpPr>
-        <p:spPr>
-          <a:xfrm>
-            <a:off x="822960" y="3383280"/>
+              <a:t>▸ 肛肠术后：促进括约肌功能恢复</a:t>
+            </a:r>
+          </a:p>
+        </p:txBody>
+      </p:sp>
+      <p:sp>
+        <p:nvSpPr>
+          <p:cNvPr id="11" name="TextBox 10"/>
+          <p:cNvSpPr txBox="1"/>
+          <p:nvPr/>
+        </p:nvSpPr>
+        <p:spPr>
+          <a:xfrm>
+            <a:off x="640080" y="3749040"/>
+            <a:ext cx="10972800" cy="365760"/>
+          </a:xfrm>
+          <a:prstGeom prst="rect">
+            <a:avLst/>
+          </a:prstGeom>
+          <a:noFill/>
+        </p:spPr>
+        <p:txBody>
+          <a:bodyPr wrap="square">
+            <a:spAutoFit/>
+          </a:bodyPr>
+          <a:lstStyle/>
+          <a:p>
+            <a:pPr algn="l">
+              <a:defRPr sz="1700" b="1">
+                <a:solidFill>
+                  <a:srgbClr val="004C80"/>
+                </a:solidFill>
+                <a:latin typeface="微软雅黑"/>
+              </a:defRPr>
+            </a:pPr>
+            <a:r>
+              <a:t>电刺激与组织修复机制</a:t>
+            </a:r>
+          </a:p>
+        </p:txBody>
+      </p:sp>
+      <p:sp>
+        <p:nvSpPr>
+          <p:cNvPr id="12" name="TextBox 11"/>
+          <p:cNvSpPr txBox="1"/>
+          <p:nvPr/>
+        </p:nvSpPr>
+        <p:spPr>
+          <a:xfrm>
+            <a:off x="822960" y="4114800"/>
             <a:ext cx="10332720" cy="320040"/>
           </a:xfrm>
           <a:prstGeom prst="rect">
@@ -9482,20 +9880,92 @@
               </a:defRPr>
             </a:pPr>
             <a:r>
-              <a:t>▸ 7. 中国医师协会. 产后盆底康复治疗专家共识(2020).</a:t>
-            </a:r>
-          </a:p>
-        </p:txBody>
-      </p:sp>
-      <p:sp>
-        <p:nvSpPr>
-          <p:cNvPr id="11" name="TextBox 10"/>
-          <p:cNvSpPr txBox="1"/>
-          <p:nvPr/>
-        </p:nvSpPr>
-        <p:spPr>
-          <a:xfrm>
-            <a:off x="640080" y="3703320"/>
+              <a:t>▸ 促进ATP合成 → 细胞能量供应增强</a:t>
+            </a:r>
+          </a:p>
+        </p:txBody>
+      </p:sp>
+      <p:sp>
+        <p:nvSpPr>
+          <p:cNvPr id="13" name="TextBox 12"/>
+          <p:cNvSpPr txBox="1"/>
+          <p:nvPr/>
+        </p:nvSpPr>
+        <p:spPr>
+          <a:xfrm>
+            <a:off x="822960" y="4434840"/>
+            <a:ext cx="10332720" cy="320040"/>
+          </a:xfrm>
+          <a:prstGeom prst="rect">
+            <a:avLst/>
+          </a:prstGeom>
+          <a:noFill/>
+        </p:spPr>
+        <p:txBody>
+          <a:bodyPr wrap="square">
+            <a:spAutoFit/>
+          </a:bodyPr>
+          <a:lstStyle/>
+          <a:p>
+            <a:pPr algn="l">
+              <a:defRPr sz="1600" b="0">
+                <a:solidFill>
+                  <a:srgbClr val="282828"/>
+                </a:solidFill>
+                <a:latin typeface="微软雅黑"/>
+              </a:defRPr>
+            </a:pPr>
+            <a:r>
+              <a:t>▸ 调节炎症因子 → 减轻局部炎性反应</a:t>
+            </a:r>
+          </a:p>
+        </p:txBody>
+      </p:sp>
+      <p:sp>
+        <p:nvSpPr>
+          <p:cNvPr id="14" name="TextBox 13"/>
+          <p:cNvSpPr txBox="1"/>
+          <p:nvPr/>
+        </p:nvSpPr>
+        <p:spPr>
+          <a:xfrm>
+            <a:off x="822960" y="4754880"/>
+            <a:ext cx="10332720" cy="320040"/>
+          </a:xfrm>
+          <a:prstGeom prst="rect">
+            <a:avLst/>
+          </a:prstGeom>
+          <a:noFill/>
+        </p:spPr>
+        <p:txBody>
+          <a:bodyPr wrap="square">
+            <a:spAutoFit/>
+          </a:bodyPr>
+          <a:lstStyle/>
+          <a:p>
+            <a:pPr algn="l">
+              <a:defRPr sz="1600" b="0">
+                <a:solidFill>
+                  <a:srgbClr val="282828"/>
+                </a:solidFill>
+                <a:latin typeface="微软雅黑"/>
+              </a:defRPr>
+            </a:pPr>
+            <a:r>
+              <a:t>▸ 促进胶原重塑 → 改善组织弹性和支撑力</a:t>
+            </a:r>
+          </a:p>
+        </p:txBody>
+      </p:sp>
+      <p:sp>
+        <p:nvSpPr>
+          <p:cNvPr id="15" name="TextBox 14"/>
+          <p:cNvSpPr txBox="1"/>
+          <p:nvPr/>
+        </p:nvSpPr>
+        <p:spPr>
+          <a:xfrm>
+            <a:off x="640080" y="5074920"/>
             <a:ext cx="10515600" cy="320040"/>
           </a:xfrm>
           <a:prstGeom prst="rect">
@@ -9518,43 +9988,7 @@
               </a:defRPr>
             </a:pPr>
             <a:r>
-              <a:t>📌 本培训材料仅用于专业知识教学，不构成具体临床处方建议</a:t>
-            </a:r>
-          </a:p>
-        </p:txBody>
-      </p:sp>
-      <p:sp>
-        <p:nvSpPr>
-          <p:cNvPr id="12" name="TextBox 11"/>
-          <p:cNvSpPr txBox="1"/>
-          <p:nvPr/>
-        </p:nvSpPr>
-        <p:spPr>
-          <a:xfrm>
-            <a:off x="640080" y="4023360"/>
-            <a:ext cx="10515600" cy="320040"/>
-          </a:xfrm>
-          <a:prstGeom prst="rect">
-            <a:avLst/>
-          </a:prstGeom>
-          <a:noFill/>
-        </p:spPr>
-        <p:txBody>
-          <a:bodyPr wrap="square">
-            <a:spAutoFit/>
-          </a:bodyPr>
-          <a:lstStyle/>
-          <a:p>
-            <a:pPr algn="l">
-              <a:defRPr sz="1400" b="0">
-                <a:solidFill>
-                  <a:srgbClr val="E67E22"/>
-                </a:solidFill>
-                <a:latin typeface="微软雅黑"/>
-              </a:defRPr>
-            </a:pPr>
-            <a:r>
-              <a:t>📌 具体治疗参数需结合患者个体情况由执业医师制定</a:t>
+              <a:t>📌 学术引用：相关机制研究可参考Journal of Tissue Engineering文献</a:t>
             </a:r>
           </a:p>
         </p:txBody>
@@ -9568,6 +10002,442 @@
 </file>
 
 <file path=ppt/slides/slide18.xml><?xml version="1.0" encoding="utf-8"?>
+<p:sld xmlns:a="http://schemas.openxmlformats.org/drawingml/2006/main" xmlns:p="http://schemas.openxmlformats.org/presentationml/2006/main" xmlns:r="http://schemas.openxmlformats.org/officeDocument/2006/relationships">
+  <p:cSld>
+    <p:bg>
+      <p:bgPr>
+        <a:solidFill>
+          <a:srgbClr val="003366"/>
+        </a:solidFill>
+        <a:effectLst/>
+      </p:bgPr>
+    </p:bg>
+    <p:spTree>
+      <p:nvGrpSpPr>
+        <p:cNvPr id="1" name=""/>
+        <p:cNvGrpSpPr/>
+        <p:nvPr/>
+      </p:nvGrpSpPr>
+      <p:grpSpPr/>
+      <p:sp>
+        <p:nvSpPr>
+          <p:cNvPr id="2" name="Rectangle 1"/>
+          <p:cNvSpPr/>
+          <p:nvPr/>
+        </p:nvSpPr>
+        <p:spPr>
+          <a:xfrm>
+            <a:off x="0" y="5943600"/>
+            <a:ext cx="12191695" cy="914400"/>
+          </a:xfrm>
+          <a:prstGeom prst="rect">
+            <a:avLst/>
+          </a:prstGeom>
+          <a:solidFill>
+            <a:srgbClr val="004C80"/>
+          </a:solidFill>
+          <a:ln>
+            <a:noFill/>
+          </a:ln>
+        </p:spPr>
+        <p:style>
+          <a:lnRef idx="1">
+            <a:schemeClr val="accent1"/>
+          </a:lnRef>
+          <a:fillRef idx="3">
+            <a:schemeClr val="accent1"/>
+          </a:fillRef>
+          <a:effectRef idx="2">
+            <a:schemeClr val="accent1"/>
+          </a:effectRef>
+          <a:fontRef idx="minor">
+            <a:schemeClr val="lt1"/>
+          </a:fontRef>
+        </p:style>
+        <p:txBody>
+          <a:bodyPr rtlCol="0" anchor="ctr"/>
+          <a:lstStyle/>
+          <a:p>
+            <a:pPr algn="ctr"/>
+          </a:p>
+        </p:txBody>
+      </p:sp>
+      <p:sp>
+        <p:nvSpPr>
+          <p:cNvPr id="3" name="TextBox 2"/>
+          <p:cNvSpPr txBox="1"/>
+          <p:nvPr/>
+        </p:nvSpPr>
+        <p:spPr>
+          <a:xfrm>
+            <a:off x="914400" y="1371600"/>
+            <a:ext cx="10058400" cy="914400"/>
+          </a:xfrm>
+          <a:prstGeom prst="rect">
+            <a:avLst/>
+          </a:prstGeom>
+          <a:noFill/>
+        </p:spPr>
+        <p:txBody>
+          <a:bodyPr wrap="square">
+            <a:spAutoFit/>
+          </a:bodyPr>
+          <a:lstStyle/>
+          <a:p>
+            <a:pPr algn="l">
+              <a:defRPr sz="3400" b="1">
+                <a:solidFill>
+                  <a:srgbClr val="FFFFFF"/>
+                </a:solidFill>
+                <a:latin typeface="微软雅黑"/>
+              </a:defRPr>
+            </a:pPr>
+            <a:r>
+              <a:t>总结与核心要点</a:t>
+            </a:r>
+          </a:p>
+        </p:txBody>
+      </p:sp>
+      <p:sp>
+        <p:nvSpPr>
+          <p:cNvPr id="4" name="Rectangle 3"/>
+          <p:cNvSpPr/>
+          <p:nvPr/>
+        </p:nvSpPr>
+        <p:spPr>
+          <a:xfrm>
+            <a:off x="914400" y="2377440"/>
+            <a:ext cx="3657600" cy="36576"/>
+          </a:xfrm>
+          <a:prstGeom prst="rect">
+            <a:avLst/>
+          </a:prstGeom>
+          <a:solidFill>
+            <a:srgbClr val="E67E22"/>
+          </a:solidFill>
+          <a:ln>
+            <a:noFill/>
+          </a:ln>
+        </p:spPr>
+        <p:style>
+          <a:lnRef idx="1">
+            <a:schemeClr val="accent1"/>
+          </a:lnRef>
+          <a:fillRef idx="3">
+            <a:schemeClr val="accent1"/>
+          </a:fillRef>
+          <a:effectRef idx="2">
+            <a:schemeClr val="accent1"/>
+          </a:effectRef>
+          <a:fontRef idx="minor">
+            <a:schemeClr val="lt1"/>
+          </a:fontRef>
+        </p:style>
+        <p:txBody>
+          <a:bodyPr rtlCol="0" anchor="ctr"/>
+          <a:lstStyle/>
+          <a:p>
+            <a:pPr algn="ctr"/>
+          </a:p>
+        </p:txBody>
+      </p:sp>
+      <p:sp>
+        <p:nvSpPr>
+          <p:cNvPr id="5" name="TextBox 4"/>
+          <p:cNvSpPr txBox="1"/>
+          <p:nvPr/>
+        </p:nvSpPr>
+        <p:spPr>
+          <a:xfrm>
+            <a:off x="1097280" y="2743200"/>
+            <a:ext cx="10058400" cy="365760"/>
+          </a:xfrm>
+          <a:prstGeom prst="rect">
+            <a:avLst/>
+          </a:prstGeom>
+          <a:noFill/>
+        </p:spPr>
+        <p:txBody>
+          <a:bodyPr wrap="square">
+            <a:spAutoFit/>
+          </a:bodyPr>
+          <a:lstStyle/>
+          <a:p>
+            <a:pPr algn="l">
+              <a:defRPr sz="1800" b="0">
+                <a:solidFill>
+                  <a:srgbClr val="FFFFFF"/>
+                </a:solidFill>
+                <a:latin typeface="微软雅黑"/>
+              </a:defRPr>
+            </a:pPr>
+            <a:r>
+              <a:t>▸ PFD不只是女性问题——打破认知误区</a:t>
+            </a:r>
+          </a:p>
+        </p:txBody>
+      </p:sp>
+      <p:sp>
+        <p:nvSpPr>
+          <p:cNvPr id="6" name="TextBox 5"/>
+          <p:cNvSpPr txBox="1"/>
+          <p:nvPr/>
+        </p:nvSpPr>
+        <p:spPr>
+          <a:xfrm>
+            <a:off x="1097280" y="3154680"/>
+            <a:ext cx="10058400" cy="365760"/>
+          </a:xfrm>
+          <a:prstGeom prst="rect">
+            <a:avLst/>
+          </a:prstGeom>
+          <a:noFill/>
+        </p:spPr>
+        <p:txBody>
+          <a:bodyPr wrap="square">
+            <a:spAutoFit/>
+          </a:bodyPr>
+          <a:lstStyle/>
+          <a:p>
+            <a:pPr algn="l">
+              <a:defRPr sz="1800" b="0">
+                <a:solidFill>
+                  <a:srgbClr val="FFFFFF"/>
+                </a:solidFill>
+                <a:latin typeface="微软雅黑"/>
+              </a:defRPr>
+            </a:pPr>
+            <a:r>
+              <a:t>▸ 电刺激分类体系：TENS/NMES/MENS/FES/IFC各有所长</a:t>
+            </a:r>
+          </a:p>
+        </p:txBody>
+      </p:sp>
+      <p:sp>
+        <p:nvSpPr>
+          <p:cNvPr id="7" name="TextBox 6"/>
+          <p:cNvSpPr txBox="1"/>
+          <p:nvPr/>
+        </p:nvSpPr>
+        <p:spPr>
+          <a:xfrm>
+            <a:off x="1097280" y="3566160"/>
+            <a:ext cx="10058400" cy="365760"/>
+          </a:xfrm>
+          <a:prstGeom prst="rect">
+            <a:avLst/>
+          </a:prstGeom>
+          <a:noFill/>
+        </p:spPr>
+        <p:txBody>
+          <a:bodyPr wrap="square">
+            <a:spAutoFit/>
+          </a:bodyPr>
+          <a:lstStyle/>
+          <a:p>
+            <a:pPr algn="l">
+              <a:defRPr sz="1800" b="0">
+                <a:solidFill>
+                  <a:srgbClr val="FFFFFF"/>
+                </a:solidFill>
+                <a:latin typeface="微软雅黑"/>
+              </a:defRPr>
+            </a:pPr>
+            <a:r>
+              <a:t>▸ 波形选择决定治疗效果与患者体验——双相平衡波为盆底首选</a:t>
+            </a:r>
+          </a:p>
+        </p:txBody>
+      </p:sp>
+      <p:sp>
+        <p:nvSpPr>
+          <p:cNvPr id="8" name="TextBox 7"/>
+          <p:cNvSpPr txBox="1"/>
+          <p:nvPr/>
+        </p:nvSpPr>
+        <p:spPr>
+          <a:xfrm>
+            <a:off x="1097280" y="3977640"/>
+            <a:ext cx="10058400" cy="365760"/>
+          </a:xfrm>
+          <a:prstGeom prst="rect">
+            <a:avLst/>
+          </a:prstGeom>
+          <a:noFill/>
+        </p:spPr>
+        <p:txBody>
+          <a:bodyPr wrap="square">
+            <a:spAutoFit/>
+          </a:bodyPr>
+          <a:lstStyle/>
+          <a:p>
+            <a:pPr algn="l">
+              <a:defRPr sz="1800" b="0">
+                <a:solidFill>
+                  <a:srgbClr val="FFFFFF"/>
+                </a:solidFill>
+                <a:latin typeface="微软雅黑"/>
+              </a:defRPr>
+            </a:pPr>
+            <a:r>
+              <a:t>▸ Glazer评估五步法是精准治疗的基石</a:t>
+            </a:r>
+          </a:p>
+        </p:txBody>
+      </p:sp>
+      <p:sp>
+        <p:nvSpPr>
+          <p:cNvPr id="9" name="TextBox 8"/>
+          <p:cNvSpPr txBox="1"/>
+          <p:nvPr/>
+        </p:nvSpPr>
+        <p:spPr>
+          <a:xfrm>
+            <a:off x="1097280" y="4389120"/>
+            <a:ext cx="10058400" cy="365760"/>
+          </a:xfrm>
+          <a:prstGeom prst="rect">
+            <a:avLst/>
+          </a:prstGeom>
+          <a:noFill/>
+        </p:spPr>
+        <p:txBody>
+          <a:bodyPr wrap="square">
+            <a:spAutoFit/>
+          </a:bodyPr>
+          <a:lstStyle/>
+          <a:p>
+            <a:pPr algn="l">
+              <a:defRPr sz="1800" b="0">
+                <a:solidFill>
+                  <a:srgbClr val="FFFFFF"/>
+                </a:solidFill>
+                <a:latin typeface="微软雅黑"/>
+              </a:defRPr>
+            </a:pPr>
+            <a:r>
+              <a:t>▸ 三阶段策略：引导期→强化期→自主期</a:t>
+            </a:r>
+          </a:p>
+        </p:txBody>
+      </p:sp>
+      <p:sp>
+        <p:nvSpPr>
+          <p:cNvPr id="10" name="TextBox 9"/>
+          <p:cNvSpPr txBox="1"/>
+          <p:nvPr/>
+        </p:nvSpPr>
+        <p:spPr>
+          <a:xfrm>
+            <a:off x="1097280" y="4800600"/>
+            <a:ext cx="10058400" cy="365760"/>
+          </a:xfrm>
+          <a:prstGeom prst="rect">
+            <a:avLst/>
+          </a:prstGeom>
+          <a:noFill/>
+        </p:spPr>
+        <p:txBody>
+          <a:bodyPr wrap="square">
+            <a:spAutoFit/>
+          </a:bodyPr>
+          <a:lstStyle/>
+          <a:p>
+            <a:pPr algn="l">
+              <a:defRPr sz="1800" b="0">
+                <a:solidFill>
+                  <a:srgbClr val="FFFFFF"/>
+                </a:solidFill>
+                <a:latin typeface="微软雅黑"/>
+              </a:defRPr>
+            </a:pPr>
+            <a:r>
+              <a:t>▸ 产品选择：院内伟思/杉山 → 居家圆小汫</a:t>
+            </a:r>
+          </a:p>
+        </p:txBody>
+      </p:sp>
+      <p:sp>
+        <p:nvSpPr>
+          <p:cNvPr id="11" name="TextBox 10"/>
+          <p:cNvSpPr txBox="1"/>
+          <p:nvPr/>
+        </p:nvSpPr>
+        <p:spPr>
+          <a:xfrm>
+            <a:off x="1097280" y="5212080"/>
+            <a:ext cx="10058400" cy="365760"/>
+          </a:xfrm>
+          <a:prstGeom prst="rect">
+            <a:avLst/>
+          </a:prstGeom>
+          <a:noFill/>
+        </p:spPr>
+        <p:txBody>
+          <a:bodyPr wrap="square">
+            <a:spAutoFit/>
+          </a:bodyPr>
+          <a:lstStyle/>
+          <a:p>
+            <a:pPr algn="l">
+              <a:defRPr sz="1800" b="0">
+                <a:solidFill>
+                  <a:srgbClr val="FFFFFF"/>
+                </a:solidFill>
+                <a:latin typeface="微软雅黑"/>
+              </a:defRPr>
+            </a:pPr>
+            <a:r>
+              <a:t>▸ 扩展适应症：外阴白斑、慢性盆腔炎、术后康复</a:t>
+            </a:r>
+          </a:p>
+        </p:txBody>
+      </p:sp>
+      <p:sp>
+        <p:nvSpPr>
+          <p:cNvPr id="12" name="TextBox 11"/>
+          <p:cNvSpPr txBox="1"/>
+          <p:nvPr/>
+        </p:nvSpPr>
+        <p:spPr>
+          <a:xfrm>
+            <a:off x="914400" y="5486400"/>
+            <a:ext cx="10058400" cy="365760"/>
+          </a:xfrm>
+          <a:prstGeom prst="rect">
+            <a:avLst/>
+          </a:prstGeom>
+          <a:noFill/>
+        </p:spPr>
+        <p:txBody>
+          <a:bodyPr wrap="square">
+            <a:spAutoFit/>
+          </a:bodyPr>
+          <a:lstStyle/>
+          <a:p>
+            <a:pPr algn="l">
+              <a:defRPr sz="1300" b="0">
+                <a:solidFill>
+                  <a:srgbClr val="B4B4B4"/>
+                </a:solidFill>
+                <a:latin typeface="微软雅黑"/>
+              </a:defRPr>
+            </a:pPr>
+            <a:r>
+              <a:t>广州圆爱康生物科技有限公司  |  www.yuanekang.com  |  版本V4.0 专业升级版</a:t>
+            </a:r>
+          </a:p>
+        </p:txBody>
+      </p:sp>
+    </p:spTree>
+  </p:cSld>
+  <p:clrMapOvr>
+    <a:masterClrMapping/>
+  </p:clrMapOvr>
+</p:sld>
+</file>
+
+<file path=ppt/slides/slide19.xml><?xml version="1.0" encoding="utf-8"?>
 <p:sld xmlns:a="http://schemas.openxmlformats.org/drawingml/2006/main" xmlns:p="http://schemas.openxmlformats.org/presentationml/2006/main" xmlns:r="http://schemas.openxmlformats.org/officeDocument/2006/relationships">
   <p:cSld>
     <p:bg>
@@ -9659,7 +10529,7 @@
               </a:defRPr>
             </a:pPr>
             <a:r>
-              <a:t>配套资源清单</a:t>
+              <a:t>参考资料与学术引用</a:t>
             </a:r>
           </a:p>
         </p:txBody>
@@ -9695,7 +10565,7 @@
               </a:defRPr>
             </a:pPr>
             <a:r>
-              <a:t>▸ 📋 参数速查卡（单页PDF，含禁忌症提醒列）</a:t>
+              <a:t>▸ 1. Glazer HI, et al. Pelvic floor muscle surface electromyography: reliability and clinical significance. J Urol. 1995.</a:t>
             </a:r>
           </a:p>
         </p:txBody>
@@ -9731,7 +10601,7 @@
               </a:defRPr>
             </a:pPr>
             <a:r>
-              <a:t>▸ 📋 Glazer评估模板与正常值范围对照表</a:t>
+              <a:t>▸ 2. ACOG Committee Opinion No. 687: Approaches to Prevention of Pelvic Floor Disorders. 2017.</a:t>
             </a:r>
           </a:p>
         </p:txBody>
@@ -9767,7 +10637,7 @@
               </a:defRPr>
             </a:pPr>
             <a:r>
-              <a:t>▸ 📋 患者教育话术模板（针对9大常见误区）</a:t>
+              <a:t>▸ 3. 中华医学会妇产科学分会. 盆底功能障碍性疾病诊治指南(2022版).</a:t>
             </a:r>
           </a:p>
         </p:txBody>
@@ -9803,7 +10673,7 @@
               </a:defRPr>
             </a:pPr>
             <a:r>
-              <a:t>▸ 📋 案例库（含治疗前后Glazer数值对比）</a:t>
+              <a:t>▸ 4. Sheffler LR, Chae J. Neuromuscular electrical stimulation in neurorehabilitation. Muscle Nerve. 2007.</a:t>
             </a:r>
           </a:p>
         </p:txBody>
@@ -9839,7 +10709,7 @@
               </a:defRPr>
             </a:pPr>
             <a:r>
-              <a:t>▸ 📋 产品选型指南（院内/社区/居家三种场景）</a:t>
+              <a:t>▸ 5. 国家药品监督管理局. 低频电刺激治疗设备注册技术审查指导原则.</a:t>
             </a:r>
           </a:p>
         </p:txBody>
@@ -9875,7 +10745,7 @@
               </a:defRPr>
             </a:pPr>
             <a:r>
-              <a:t>▸ 📋 家庭训练依从性管理工具（APP打卡模板）</a:t>
+              <a:t>▸ 6. ICS (International Continence Society). Standardization of Terminology of Pelvic Floor Muscle Function. 2021.</a:t>
             </a:r>
           </a:p>
         </p:txBody>
@@ -9911,7 +10781,7 @@
               </a:defRPr>
             </a:pPr>
             <a:r>
-              <a:t>▸ 📋 参考文献全文索引</a:t>
+              <a:t>▸ 7. 中国医师协会. 产后盆底康复治疗专家共识(2020).</a:t>
             </a:r>
           </a:p>
         </p:txBody>
@@ -9924,30 +10794,30 @@
         </p:nvSpPr>
         <p:spPr>
           <a:xfrm>
-            <a:off x="822960" y="3703320"/>
-            <a:ext cx="10332720" cy="320040"/>
-          </a:xfrm>
-          <a:prstGeom prst="rect">
-            <a:avLst/>
-          </a:prstGeom>
-          <a:noFill/>
-        </p:spPr>
-        <p:txBody>
-          <a:bodyPr wrap="square">
-            <a:spAutoFit/>
-          </a:bodyPr>
-          <a:lstStyle/>
-          <a:p>
-            <a:pPr algn="l">
-              <a:defRPr sz="1600" b="0">
-                <a:solidFill>
-                  <a:srgbClr val="282828"/>
-                </a:solidFill>
-                <a:latin typeface="微软雅黑"/>
-              </a:defRPr>
-            </a:pPr>
-            <a:r>
-              <a:t>▸ </a:t>
+            <a:off x="640080" y="3703320"/>
+            <a:ext cx="10515600" cy="320040"/>
+          </a:xfrm>
+          <a:prstGeom prst="rect">
+            <a:avLst/>
+          </a:prstGeom>
+          <a:noFill/>
+        </p:spPr>
+        <p:txBody>
+          <a:bodyPr wrap="square">
+            <a:spAutoFit/>
+          </a:bodyPr>
+          <a:lstStyle/>
+          <a:p>
+            <a:pPr algn="l">
+              <a:defRPr sz="1400" b="0">
+                <a:solidFill>
+                  <a:srgbClr val="E67E22"/>
+                </a:solidFill>
+                <a:latin typeface="微软雅黑"/>
+              </a:defRPr>
+            </a:pPr>
+            <a:r>
+              <a:t>📌 本培训材料仅用于专业知识教学，不构成具体临床处方建议</a:t>
             </a:r>
           </a:p>
         </p:txBody>
@@ -9960,66 +10830,30 @@
         </p:nvSpPr>
         <p:spPr>
           <a:xfrm>
-            <a:off x="822960" y="4023360"/>
-            <a:ext cx="10332720" cy="320040"/>
-          </a:xfrm>
-          <a:prstGeom prst="rect">
-            <a:avLst/>
-          </a:prstGeom>
-          <a:noFill/>
-        </p:spPr>
-        <p:txBody>
-          <a:bodyPr wrap="square">
-            <a:spAutoFit/>
-          </a:bodyPr>
-          <a:lstStyle/>
-          <a:p>
-            <a:pPr algn="l">
-              <a:defRPr sz="1600" b="0">
-                <a:solidFill>
-                  <a:srgbClr val="282828"/>
-                </a:solidFill>
-                <a:latin typeface="微软雅黑"/>
-              </a:defRPr>
-            </a:pPr>
-            <a:r>
-              <a:t>▸ 如需以上配套资源，请联系广州圆爱康生物科技有限公司</a:t>
-            </a:r>
-          </a:p>
-        </p:txBody>
-      </p:sp>
-      <p:sp>
-        <p:nvSpPr>
-          <p:cNvPr id="13" name="TextBox 12"/>
-          <p:cNvSpPr txBox="1"/>
-          <p:nvPr/>
-        </p:nvSpPr>
-        <p:spPr>
-          <a:xfrm>
-            <a:off x="822960" y="4343400"/>
-            <a:ext cx="10332720" cy="320040"/>
-          </a:xfrm>
-          <a:prstGeom prst="rect">
-            <a:avLst/>
-          </a:prstGeom>
-          <a:noFill/>
-        </p:spPr>
-        <p:txBody>
-          <a:bodyPr wrap="square">
-            <a:spAutoFit/>
-          </a:bodyPr>
-          <a:lstStyle/>
-          <a:p>
-            <a:pPr algn="l">
-              <a:defRPr sz="1600" b="0">
-                <a:solidFill>
-                  <a:srgbClr val="282828"/>
-                </a:solidFill>
-                <a:latin typeface="微软雅黑"/>
-              </a:defRPr>
-            </a:pPr>
-            <a:r>
-              <a:t>▸ www.yuanekang.com</a:t>
+            <a:off x="640080" y="4023360"/>
+            <a:ext cx="10515600" cy="320040"/>
+          </a:xfrm>
+          <a:prstGeom prst="rect">
+            <a:avLst/>
+          </a:prstGeom>
+          <a:noFill/>
+        </p:spPr>
+        <p:txBody>
+          <a:bodyPr wrap="square">
+            <a:spAutoFit/>
+          </a:bodyPr>
+          <a:lstStyle/>
+          <a:p>
+            <a:pPr algn="l">
+              <a:defRPr sz="1400" b="0">
+                <a:solidFill>
+                  <a:srgbClr val="E67E22"/>
+                </a:solidFill>
+                <a:latin typeface="微软雅黑"/>
+              </a:defRPr>
+            </a:pPr>
+            <a:r>
+              <a:t>📌 具体治疗参数需结合患者个体情况由执业医师制定</a:t>
             </a:r>
           </a:p>
         </p:txBody>
@@ -10612,6 +11446,471 @@
 </p:sld>
 </file>
 
+<file path=ppt/slides/slide20.xml><?xml version="1.0" encoding="utf-8"?>
+<p:sld xmlns:a="http://schemas.openxmlformats.org/drawingml/2006/main" xmlns:p="http://schemas.openxmlformats.org/presentationml/2006/main" xmlns:r="http://schemas.openxmlformats.org/officeDocument/2006/relationships">
+  <p:cSld>
+    <p:bg>
+      <p:bgPr>
+        <a:solidFill>
+          <a:srgbClr val="FFFFFF"/>
+        </a:solidFill>
+        <a:effectLst/>
+      </p:bgPr>
+    </p:bg>
+    <p:spTree>
+      <p:nvGrpSpPr>
+        <p:cNvPr id="1" name=""/>
+        <p:cNvGrpSpPr/>
+        <p:nvPr/>
+      </p:nvGrpSpPr>
+      <p:grpSpPr/>
+      <p:sp>
+        <p:nvSpPr>
+          <p:cNvPr id="2" name="Rectangle 1"/>
+          <p:cNvSpPr/>
+          <p:nvPr/>
+        </p:nvSpPr>
+        <p:spPr>
+          <a:xfrm>
+            <a:off x="0" y="0"/>
+            <a:ext cx="12191695" cy="1005840"/>
+          </a:xfrm>
+          <a:prstGeom prst="rect">
+            <a:avLst/>
+          </a:prstGeom>
+          <a:solidFill>
+            <a:srgbClr val="003366"/>
+          </a:solidFill>
+          <a:ln>
+            <a:noFill/>
+          </a:ln>
+        </p:spPr>
+        <p:style>
+          <a:lnRef idx="1">
+            <a:schemeClr val="accent1"/>
+          </a:lnRef>
+          <a:fillRef idx="3">
+            <a:schemeClr val="accent1"/>
+          </a:fillRef>
+          <a:effectRef idx="2">
+            <a:schemeClr val="accent1"/>
+          </a:effectRef>
+          <a:fontRef idx="minor">
+            <a:schemeClr val="lt1"/>
+          </a:fontRef>
+        </p:style>
+        <p:txBody>
+          <a:bodyPr rtlCol="0" anchor="ctr"/>
+          <a:lstStyle/>
+          <a:p>
+            <a:pPr algn="ctr"/>
+          </a:p>
+        </p:txBody>
+      </p:sp>
+      <p:sp>
+        <p:nvSpPr>
+          <p:cNvPr id="3" name="TextBox 2"/>
+          <p:cNvSpPr txBox="1"/>
+          <p:nvPr/>
+        </p:nvSpPr>
+        <p:spPr>
+          <a:xfrm>
+            <a:off x="457200" y="137160"/>
+            <a:ext cx="10972800" cy="731520"/>
+          </a:xfrm>
+          <a:prstGeom prst="rect">
+            <a:avLst/>
+          </a:prstGeom>
+          <a:noFill/>
+        </p:spPr>
+        <p:txBody>
+          <a:bodyPr wrap="square">
+            <a:spAutoFit/>
+          </a:bodyPr>
+          <a:lstStyle/>
+          <a:p>
+            <a:pPr algn="l">
+              <a:defRPr sz="2800" b="1">
+                <a:solidFill>
+                  <a:srgbClr val="FFFFFF"/>
+                </a:solidFill>
+                <a:latin typeface="微软雅黑"/>
+              </a:defRPr>
+            </a:pPr>
+            <a:r>
+              <a:t>配套资源清单</a:t>
+            </a:r>
+          </a:p>
+        </p:txBody>
+      </p:sp>
+      <p:sp>
+        <p:nvSpPr>
+          <p:cNvPr id="4" name="TextBox 3"/>
+          <p:cNvSpPr txBox="1"/>
+          <p:nvPr/>
+        </p:nvSpPr>
+        <p:spPr>
+          <a:xfrm>
+            <a:off x="822960" y="1463040"/>
+            <a:ext cx="10332720" cy="320040"/>
+          </a:xfrm>
+          <a:prstGeom prst="rect">
+            <a:avLst/>
+          </a:prstGeom>
+          <a:noFill/>
+        </p:spPr>
+        <p:txBody>
+          <a:bodyPr wrap="square">
+            <a:spAutoFit/>
+          </a:bodyPr>
+          <a:lstStyle/>
+          <a:p>
+            <a:pPr algn="l">
+              <a:defRPr sz="1600" b="0">
+                <a:solidFill>
+                  <a:srgbClr val="282828"/>
+                </a:solidFill>
+                <a:latin typeface="微软雅黑"/>
+              </a:defRPr>
+            </a:pPr>
+            <a:r>
+              <a:t>▸ 📋 参数速查卡（单页PDF，含禁忌症提醒列）</a:t>
+            </a:r>
+          </a:p>
+        </p:txBody>
+      </p:sp>
+      <p:sp>
+        <p:nvSpPr>
+          <p:cNvPr id="5" name="TextBox 4"/>
+          <p:cNvSpPr txBox="1"/>
+          <p:nvPr/>
+        </p:nvSpPr>
+        <p:spPr>
+          <a:xfrm>
+            <a:off x="822960" y="1783080"/>
+            <a:ext cx="10332720" cy="320040"/>
+          </a:xfrm>
+          <a:prstGeom prst="rect">
+            <a:avLst/>
+          </a:prstGeom>
+          <a:noFill/>
+        </p:spPr>
+        <p:txBody>
+          <a:bodyPr wrap="square">
+            <a:spAutoFit/>
+          </a:bodyPr>
+          <a:lstStyle/>
+          <a:p>
+            <a:pPr algn="l">
+              <a:defRPr sz="1600" b="0">
+                <a:solidFill>
+                  <a:srgbClr val="282828"/>
+                </a:solidFill>
+                <a:latin typeface="微软雅黑"/>
+              </a:defRPr>
+            </a:pPr>
+            <a:r>
+              <a:t>▸ 📋 Glazer评估模板与正常值范围对照表</a:t>
+            </a:r>
+          </a:p>
+        </p:txBody>
+      </p:sp>
+      <p:sp>
+        <p:nvSpPr>
+          <p:cNvPr id="6" name="TextBox 5"/>
+          <p:cNvSpPr txBox="1"/>
+          <p:nvPr/>
+        </p:nvSpPr>
+        <p:spPr>
+          <a:xfrm>
+            <a:off x="822960" y="2103120"/>
+            <a:ext cx="10332720" cy="320040"/>
+          </a:xfrm>
+          <a:prstGeom prst="rect">
+            <a:avLst/>
+          </a:prstGeom>
+          <a:noFill/>
+        </p:spPr>
+        <p:txBody>
+          <a:bodyPr wrap="square">
+            <a:spAutoFit/>
+          </a:bodyPr>
+          <a:lstStyle/>
+          <a:p>
+            <a:pPr algn="l">
+              <a:defRPr sz="1600" b="0">
+                <a:solidFill>
+                  <a:srgbClr val="282828"/>
+                </a:solidFill>
+                <a:latin typeface="微软雅黑"/>
+              </a:defRPr>
+            </a:pPr>
+            <a:r>
+              <a:t>▸ 📋 患者教育话术模板（针对9大常见误区）</a:t>
+            </a:r>
+          </a:p>
+        </p:txBody>
+      </p:sp>
+      <p:sp>
+        <p:nvSpPr>
+          <p:cNvPr id="7" name="TextBox 6"/>
+          <p:cNvSpPr txBox="1"/>
+          <p:nvPr/>
+        </p:nvSpPr>
+        <p:spPr>
+          <a:xfrm>
+            <a:off x="822960" y="2423160"/>
+            <a:ext cx="10332720" cy="320040"/>
+          </a:xfrm>
+          <a:prstGeom prst="rect">
+            <a:avLst/>
+          </a:prstGeom>
+          <a:noFill/>
+        </p:spPr>
+        <p:txBody>
+          <a:bodyPr wrap="square">
+            <a:spAutoFit/>
+          </a:bodyPr>
+          <a:lstStyle/>
+          <a:p>
+            <a:pPr algn="l">
+              <a:defRPr sz="1600" b="0">
+                <a:solidFill>
+                  <a:srgbClr val="282828"/>
+                </a:solidFill>
+                <a:latin typeface="微软雅黑"/>
+              </a:defRPr>
+            </a:pPr>
+            <a:r>
+              <a:t>▸ 📋 案例库（含治疗前后Glazer数值对比）</a:t>
+            </a:r>
+          </a:p>
+        </p:txBody>
+      </p:sp>
+      <p:sp>
+        <p:nvSpPr>
+          <p:cNvPr id="8" name="TextBox 7"/>
+          <p:cNvSpPr txBox="1"/>
+          <p:nvPr/>
+        </p:nvSpPr>
+        <p:spPr>
+          <a:xfrm>
+            <a:off x="822960" y="2743200"/>
+            <a:ext cx="10332720" cy="320040"/>
+          </a:xfrm>
+          <a:prstGeom prst="rect">
+            <a:avLst/>
+          </a:prstGeom>
+          <a:noFill/>
+        </p:spPr>
+        <p:txBody>
+          <a:bodyPr wrap="square">
+            <a:spAutoFit/>
+          </a:bodyPr>
+          <a:lstStyle/>
+          <a:p>
+            <a:pPr algn="l">
+              <a:defRPr sz="1600" b="0">
+                <a:solidFill>
+                  <a:srgbClr val="282828"/>
+                </a:solidFill>
+                <a:latin typeface="微软雅黑"/>
+              </a:defRPr>
+            </a:pPr>
+            <a:r>
+              <a:t>▸ 📋 产品选型指南（院内/社区/居家三种场景）</a:t>
+            </a:r>
+          </a:p>
+        </p:txBody>
+      </p:sp>
+      <p:sp>
+        <p:nvSpPr>
+          <p:cNvPr id="9" name="TextBox 8"/>
+          <p:cNvSpPr txBox="1"/>
+          <p:nvPr/>
+        </p:nvSpPr>
+        <p:spPr>
+          <a:xfrm>
+            <a:off x="822960" y="3063240"/>
+            <a:ext cx="10332720" cy="320040"/>
+          </a:xfrm>
+          <a:prstGeom prst="rect">
+            <a:avLst/>
+          </a:prstGeom>
+          <a:noFill/>
+        </p:spPr>
+        <p:txBody>
+          <a:bodyPr wrap="square">
+            <a:spAutoFit/>
+          </a:bodyPr>
+          <a:lstStyle/>
+          <a:p>
+            <a:pPr algn="l">
+              <a:defRPr sz="1600" b="0">
+                <a:solidFill>
+                  <a:srgbClr val="282828"/>
+                </a:solidFill>
+                <a:latin typeface="微软雅黑"/>
+              </a:defRPr>
+            </a:pPr>
+            <a:r>
+              <a:t>▸ 📋 家庭训练依从性管理工具（APP打卡模板）</a:t>
+            </a:r>
+          </a:p>
+        </p:txBody>
+      </p:sp>
+      <p:sp>
+        <p:nvSpPr>
+          <p:cNvPr id="10" name="TextBox 9"/>
+          <p:cNvSpPr txBox="1"/>
+          <p:nvPr/>
+        </p:nvSpPr>
+        <p:spPr>
+          <a:xfrm>
+            <a:off x="822960" y="3383280"/>
+            <a:ext cx="10332720" cy="320040"/>
+          </a:xfrm>
+          <a:prstGeom prst="rect">
+            <a:avLst/>
+          </a:prstGeom>
+          <a:noFill/>
+        </p:spPr>
+        <p:txBody>
+          <a:bodyPr wrap="square">
+            <a:spAutoFit/>
+          </a:bodyPr>
+          <a:lstStyle/>
+          <a:p>
+            <a:pPr algn="l">
+              <a:defRPr sz="1600" b="0">
+                <a:solidFill>
+                  <a:srgbClr val="282828"/>
+                </a:solidFill>
+                <a:latin typeface="微软雅黑"/>
+              </a:defRPr>
+            </a:pPr>
+            <a:r>
+              <a:t>▸ 📋 参考文献全文索引</a:t>
+            </a:r>
+          </a:p>
+        </p:txBody>
+      </p:sp>
+      <p:sp>
+        <p:nvSpPr>
+          <p:cNvPr id="11" name="TextBox 10"/>
+          <p:cNvSpPr txBox="1"/>
+          <p:nvPr/>
+        </p:nvSpPr>
+        <p:spPr>
+          <a:xfrm>
+            <a:off x="822960" y="3703320"/>
+            <a:ext cx="10332720" cy="320040"/>
+          </a:xfrm>
+          <a:prstGeom prst="rect">
+            <a:avLst/>
+          </a:prstGeom>
+          <a:noFill/>
+        </p:spPr>
+        <p:txBody>
+          <a:bodyPr wrap="square">
+            <a:spAutoFit/>
+          </a:bodyPr>
+          <a:lstStyle/>
+          <a:p>
+            <a:pPr algn="l">
+              <a:defRPr sz="1600" b="0">
+                <a:solidFill>
+                  <a:srgbClr val="282828"/>
+                </a:solidFill>
+                <a:latin typeface="微软雅黑"/>
+              </a:defRPr>
+            </a:pPr>
+            <a:r>
+              <a:t>▸ </a:t>
+            </a:r>
+          </a:p>
+        </p:txBody>
+      </p:sp>
+      <p:sp>
+        <p:nvSpPr>
+          <p:cNvPr id="12" name="TextBox 11"/>
+          <p:cNvSpPr txBox="1"/>
+          <p:nvPr/>
+        </p:nvSpPr>
+        <p:spPr>
+          <a:xfrm>
+            <a:off x="822960" y="4023360"/>
+            <a:ext cx="10332720" cy="320040"/>
+          </a:xfrm>
+          <a:prstGeom prst="rect">
+            <a:avLst/>
+          </a:prstGeom>
+          <a:noFill/>
+        </p:spPr>
+        <p:txBody>
+          <a:bodyPr wrap="square">
+            <a:spAutoFit/>
+          </a:bodyPr>
+          <a:lstStyle/>
+          <a:p>
+            <a:pPr algn="l">
+              <a:defRPr sz="1600" b="0">
+                <a:solidFill>
+                  <a:srgbClr val="282828"/>
+                </a:solidFill>
+                <a:latin typeface="微软雅黑"/>
+              </a:defRPr>
+            </a:pPr>
+            <a:r>
+              <a:t>▸ 如需以上配套资源，请联系广州圆爱康生物科技有限公司</a:t>
+            </a:r>
+          </a:p>
+        </p:txBody>
+      </p:sp>
+      <p:sp>
+        <p:nvSpPr>
+          <p:cNvPr id="13" name="TextBox 12"/>
+          <p:cNvSpPr txBox="1"/>
+          <p:nvPr/>
+        </p:nvSpPr>
+        <p:spPr>
+          <a:xfrm>
+            <a:off x="822960" y="4343400"/>
+            <a:ext cx="10332720" cy="320040"/>
+          </a:xfrm>
+          <a:prstGeom prst="rect">
+            <a:avLst/>
+          </a:prstGeom>
+          <a:noFill/>
+        </p:spPr>
+        <p:txBody>
+          <a:bodyPr wrap="square">
+            <a:spAutoFit/>
+          </a:bodyPr>
+          <a:lstStyle/>
+          <a:p>
+            <a:pPr algn="l">
+              <a:defRPr sz="1600" b="0">
+                <a:solidFill>
+                  <a:srgbClr val="282828"/>
+                </a:solidFill>
+                <a:latin typeface="微软雅黑"/>
+              </a:defRPr>
+            </a:pPr>
+            <a:r>
+              <a:t>▸ www.yuanekang.com</a:t>
+            </a:r>
+          </a:p>
+        </p:txBody>
+      </p:sp>
+    </p:spTree>
+  </p:cSld>
+  <p:clrMapOvr>
+    <a:masterClrMapping/>
+  </p:clrMapOvr>
+</p:sld>
+</file>
+
 <file path=ppt/slides/slide3.xml><?xml version="1.0" encoding="utf-8"?>
 <p:sld xmlns:a="http://schemas.openxmlformats.org/drawingml/2006/main" xmlns:p="http://schemas.openxmlformats.org/presentationml/2006/main" xmlns:r="http://schemas.openxmlformats.org/officeDocument/2006/relationships">
   <p:cSld>
@@ -11878,7 +13177,7 @@
           <a:lstStyle/>
           <a:p>
             <a:pPr algn="l">
-              <a:defRPr sz="2600" b="1">
+              <a:defRPr sz="2800" b="1">
                 <a:solidFill>
                   <a:srgbClr val="FFFFFF"/>
                 </a:solidFill>
@@ -11886,7 +13185,7 @@
               </a:defRPr>
             </a:pPr>
             <a:r>
-              <a:t>第二章  电刺激治疗的完整分类体系</a:t>
+              <a:t>第二章  电刺激治疗的完整分类体系（上）</a:t>
             </a:r>
           </a:p>
         </p:txBody>
@@ -11965,7 +13264,7 @@
               </a:defRPr>
             </a:pPr>
             <a:r>
-              <a:t>TENS/NMES/MENS/FES/IFC 完整分类</a:t>
+              <a:t>四种低频电刺激的英文全称、中文名称、机制与应用场景</a:t>
             </a:r>
           </a:p>
         </p:txBody>
@@ -11978,30 +13277,30 @@
         </p:nvSpPr>
         <p:spPr>
           <a:xfrm>
-            <a:off x="457200" y="1554480"/>
-            <a:ext cx="5303520" cy="320040"/>
-          </a:xfrm>
-          <a:prstGeom prst="rect">
-            <a:avLst/>
-          </a:prstGeom>
-          <a:noFill/>
-        </p:spPr>
-        <p:txBody>
-          <a:bodyPr wrap="square">
-            <a:spAutoFit/>
-          </a:bodyPr>
-          <a:lstStyle/>
-          <a:p>
-            <a:pPr algn="l">
-              <a:defRPr sz="1500" b="0">
-                <a:solidFill>
-                  <a:srgbClr val="282828"/>
-                </a:solidFill>
-                <a:latin typeface="微软雅黑"/>
-              </a:defRPr>
-            </a:pPr>
-            <a:r>
-              <a:t>▸ ## 低频电刺激 (0.5-1000Hz)</a:t>
+            <a:off x="640080" y="1463040"/>
+            <a:ext cx="10972800" cy="365760"/>
+          </a:xfrm>
+          <a:prstGeom prst="rect">
+            <a:avLst/>
+          </a:prstGeom>
+          <a:noFill/>
+        </p:spPr>
+        <p:txBody>
+          <a:bodyPr wrap="square">
+            <a:spAutoFit/>
+          </a:bodyPr>
+          <a:lstStyle/>
+          <a:p>
+            <a:pPr algn="l">
+              <a:defRPr sz="1700" b="1">
+                <a:solidFill>
+                  <a:srgbClr val="004C80"/>
+                </a:solidFill>
+                <a:latin typeface="微软雅黑"/>
+              </a:defRPr>
+            </a:pPr>
+            <a:r>
+              <a:t>低频电刺激（Low Frequency Electrical Stimulation, 0.5-1000Hz）</a:t>
             </a:r>
           </a:p>
         </p:txBody>
@@ -12014,30 +13313,30 @@
         </p:nvSpPr>
         <p:spPr>
           <a:xfrm>
-            <a:off x="457200" y="1874520"/>
-            <a:ext cx="5303520" cy="320040"/>
-          </a:xfrm>
-          <a:prstGeom prst="rect">
-            <a:avLst/>
-          </a:prstGeom>
-          <a:noFill/>
-        </p:spPr>
-        <p:txBody>
-          <a:bodyPr wrap="square">
-            <a:spAutoFit/>
-          </a:bodyPr>
-          <a:lstStyle/>
-          <a:p>
-            <a:pPr algn="l">
-              <a:defRPr sz="1500" b="0">
-                <a:solidFill>
-                  <a:srgbClr val="282828"/>
-                </a:solidFill>
-                <a:latin typeface="微软雅黑"/>
-              </a:defRPr>
-            </a:pPr>
-            <a:r>
-              <a:t>▸ TENS (50-150Hz) — 镇痛，闸门控制理论</a:t>
+            <a:off x="822960" y="1828800"/>
+            <a:ext cx="10332720" cy="320040"/>
+          </a:xfrm>
+          <a:prstGeom prst="rect">
+            <a:avLst/>
+          </a:prstGeom>
+          <a:noFill/>
+        </p:spPr>
+        <p:txBody>
+          <a:bodyPr wrap="square">
+            <a:spAutoFit/>
+          </a:bodyPr>
+          <a:lstStyle/>
+          <a:p>
+            <a:pPr algn="l">
+              <a:defRPr sz="1600" b="0">
+                <a:solidFill>
+                  <a:srgbClr val="282828"/>
+                </a:solidFill>
+                <a:latin typeface="微软雅黑"/>
+              </a:defRPr>
+            </a:pPr>
+            <a:r>
+              <a:t>▸ </a:t>
             </a:r>
           </a:p>
         </p:txBody>
@@ -12050,30 +13349,30 @@
         </p:nvSpPr>
         <p:spPr>
           <a:xfrm>
-            <a:off x="457200" y="2194560"/>
-            <a:ext cx="5303520" cy="320040"/>
-          </a:xfrm>
-          <a:prstGeom prst="rect">
-            <a:avLst/>
-          </a:prstGeom>
-          <a:noFill/>
-        </p:spPr>
-        <p:txBody>
-          <a:bodyPr wrap="square">
-            <a:spAutoFit/>
-          </a:bodyPr>
-          <a:lstStyle/>
-          <a:p>
-            <a:pPr algn="l">
-              <a:defRPr sz="1500" b="0">
-                <a:solidFill>
-                  <a:srgbClr val="282828"/>
-                </a:solidFill>
-                <a:latin typeface="微软雅黑"/>
-              </a:defRPr>
-            </a:pPr>
-            <a:r>
-              <a:t>▸ NMES (20-50Hz) — 肌肉功能重建</a:t>
+            <a:off x="822960" y="2148840"/>
+            <a:ext cx="10332720" cy="320040"/>
+          </a:xfrm>
+          <a:prstGeom prst="rect">
+            <a:avLst/>
+          </a:prstGeom>
+          <a:noFill/>
+        </p:spPr>
+        <p:txBody>
+          <a:bodyPr wrap="square">
+            <a:spAutoFit/>
+          </a:bodyPr>
+          <a:lstStyle/>
+          <a:p>
+            <a:pPr algn="l">
+              <a:defRPr sz="1600" b="0">
+                <a:solidFill>
+                  <a:srgbClr val="282828"/>
+                </a:solidFill>
+                <a:latin typeface="微软雅黑"/>
+              </a:defRPr>
+            </a:pPr>
+            <a:r>
+              <a:t>▸ ① TENS——经皮神经电刺激（Transcutaneous Electrical Nerve Stimulation）</a:t>
             </a:r>
           </a:p>
         </p:txBody>
@@ -12086,30 +13385,30 @@
         </p:nvSpPr>
         <p:spPr>
           <a:xfrm>
-            <a:off x="457200" y="2514600"/>
-            <a:ext cx="5303520" cy="320040"/>
-          </a:xfrm>
-          <a:prstGeom prst="rect">
-            <a:avLst/>
-          </a:prstGeom>
-          <a:noFill/>
-        </p:spPr>
-        <p:txBody>
-          <a:bodyPr wrap="square">
-            <a:spAutoFit/>
-          </a:bodyPr>
-          <a:lstStyle/>
-          <a:p>
-            <a:pPr algn="l">
-              <a:defRPr sz="1500" b="0">
-                <a:solidFill>
-                  <a:srgbClr val="282828"/>
-                </a:solidFill>
-                <a:latin typeface="微软雅黑"/>
-              </a:defRPr>
-            </a:pPr>
-            <a:r>
-              <a:t>▸ MENS (&lt;1Hz) — 组织修复/抗炎</a:t>
+            <a:off x="822960" y="2468880"/>
+            <a:ext cx="10332720" cy="320040"/>
+          </a:xfrm>
+          <a:prstGeom prst="rect">
+            <a:avLst/>
+          </a:prstGeom>
+          <a:noFill/>
+        </p:spPr>
+        <p:txBody>
+          <a:bodyPr wrap="square">
+            <a:spAutoFit/>
+          </a:bodyPr>
+          <a:lstStyle/>
+          <a:p>
+            <a:pPr algn="l">
+              <a:defRPr sz="1600" b="0">
+                <a:solidFill>
+                  <a:srgbClr val="282828"/>
+                </a:solidFill>
+                <a:latin typeface="微软雅黑"/>
+              </a:defRPr>
+            </a:pPr>
+            <a:r>
+              <a:t>▸    频率50-150Hz | 机制：闸门控制理论+内源性阿片肽释放 → 镇痛</a:t>
             </a:r>
           </a:p>
         </p:txBody>
@@ -12122,74 +13421,67 @@
         </p:nvSpPr>
         <p:spPr>
           <a:xfrm>
-            <a:off x="457200" y="2834640"/>
-            <a:ext cx="5303520" cy="320040"/>
-          </a:xfrm>
-          <a:prstGeom prst="rect">
-            <a:avLst/>
-          </a:prstGeom>
-          <a:noFill/>
-        </p:spPr>
-        <p:txBody>
-          <a:bodyPr wrap="square">
-            <a:spAutoFit/>
-          </a:bodyPr>
-          <a:lstStyle/>
-          <a:p>
-            <a:pPr algn="l">
-              <a:defRPr sz="1500" b="0">
-                <a:solidFill>
-                  <a:srgbClr val="282828"/>
-                </a:solidFill>
-                <a:latin typeface="微软雅黑"/>
-              </a:defRPr>
-            </a:pPr>
-            <a:r>
-              <a:t>▸ FES (20-50Hz) — 替代/辅助功能</a:t>
-            </a:r>
-          </a:p>
-        </p:txBody>
-      </p:sp>
-      <p:sp>
-        <p:nvSpPr>
-          <p:cNvPr id="11" name="Rectangle 10"/>
-          <p:cNvSpPr/>
-          <p:nvPr/>
-        </p:nvSpPr>
-        <p:spPr>
-          <a:xfrm>
-            <a:off x="6035040" y="1371600"/>
-            <a:ext cx="18288" cy="5029200"/>
-          </a:xfrm>
-          <a:prstGeom prst="rect">
-            <a:avLst/>
-          </a:prstGeom>
-          <a:solidFill>
-            <a:srgbClr val="B4B4B4"/>
-          </a:solidFill>
-          <a:ln>
-            <a:noFill/>
-          </a:ln>
-        </p:spPr>
-        <p:style>
-          <a:lnRef idx="1">
-            <a:schemeClr val="accent1"/>
-          </a:lnRef>
-          <a:fillRef idx="3">
-            <a:schemeClr val="accent1"/>
-          </a:fillRef>
-          <a:effectRef idx="2">
-            <a:schemeClr val="accent1"/>
-          </a:effectRef>
-          <a:fontRef idx="minor">
-            <a:schemeClr val="lt1"/>
-          </a:fontRef>
-        </p:style>
-        <p:txBody>
-          <a:bodyPr rtlCol="0" anchor="ctr"/>
-          <a:lstStyle/>
-          <a:p>
-            <a:pPr algn="ctr"/>
+            <a:off x="822960" y="2788920"/>
+            <a:ext cx="10332720" cy="320040"/>
+          </a:xfrm>
+          <a:prstGeom prst="rect">
+            <a:avLst/>
+          </a:prstGeom>
+          <a:noFill/>
+        </p:spPr>
+        <p:txBody>
+          <a:bodyPr wrap="square">
+            <a:spAutoFit/>
+          </a:bodyPr>
+          <a:lstStyle/>
+          <a:p>
+            <a:pPr algn="l">
+              <a:defRPr sz="1600" b="0">
+                <a:solidFill>
+                  <a:srgbClr val="282828"/>
+                </a:solidFill>
+                <a:latin typeface="微软雅黑"/>
+              </a:defRPr>
+            </a:pPr>
+            <a:r>
+              <a:t>▸    典型应用：慢性盆腔疼痛、产后伤口痛、性交痛</a:t>
+            </a:r>
+          </a:p>
+        </p:txBody>
+      </p:sp>
+      <p:sp>
+        <p:nvSpPr>
+          <p:cNvPr id="11" name="TextBox 10"/>
+          <p:cNvSpPr txBox="1"/>
+          <p:nvPr/>
+        </p:nvSpPr>
+        <p:spPr>
+          <a:xfrm>
+            <a:off x="822960" y="3108960"/>
+            <a:ext cx="10332720" cy="320040"/>
+          </a:xfrm>
+          <a:prstGeom prst="rect">
+            <a:avLst/>
+          </a:prstGeom>
+          <a:noFill/>
+        </p:spPr>
+        <p:txBody>
+          <a:bodyPr wrap="square">
+            <a:spAutoFit/>
+          </a:bodyPr>
+          <a:lstStyle/>
+          <a:p>
+            <a:pPr algn="l">
+              <a:defRPr sz="1600" b="0">
+                <a:solidFill>
+                  <a:srgbClr val="282828"/>
+                </a:solidFill>
+                <a:latin typeface="微软雅黑"/>
+              </a:defRPr>
+            </a:pPr>
+            <a:r>
+              <a:t>▸ </a:t>
+            </a:r>
           </a:p>
         </p:txBody>
       </p:sp>
@@ -12201,30 +13493,30 @@
         </p:nvSpPr>
         <p:spPr>
           <a:xfrm>
-            <a:off x="6217920" y="1554480"/>
-            <a:ext cx="5486400" cy="320040"/>
-          </a:xfrm>
-          <a:prstGeom prst="rect">
-            <a:avLst/>
-          </a:prstGeom>
-          <a:noFill/>
-        </p:spPr>
-        <p:txBody>
-          <a:bodyPr wrap="square">
-            <a:spAutoFit/>
-          </a:bodyPr>
-          <a:lstStyle/>
-          <a:p>
-            <a:pPr algn="l">
-              <a:defRPr sz="1500" b="0">
-                <a:solidFill>
-                  <a:srgbClr val="282828"/>
-                </a:solidFill>
-                <a:latin typeface="微软雅黑"/>
-              </a:defRPr>
-            </a:pPr>
-            <a:r>
-              <a:t>▸ ## 中频电刺激 (1000-100000Hz)</a:t>
+            <a:off x="822960" y="3429000"/>
+            <a:ext cx="10332720" cy="320040"/>
+          </a:xfrm>
+          <a:prstGeom prst="rect">
+            <a:avLst/>
+          </a:prstGeom>
+          <a:noFill/>
+        </p:spPr>
+        <p:txBody>
+          <a:bodyPr wrap="square">
+            <a:spAutoFit/>
+          </a:bodyPr>
+          <a:lstStyle/>
+          <a:p>
+            <a:pPr algn="l">
+              <a:defRPr sz="1600" b="0">
+                <a:solidFill>
+                  <a:srgbClr val="282828"/>
+                </a:solidFill>
+                <a:latin typeface="微软雅黑"/>
+              </a:defRPr>
+            </a:pPr>
+            <a:r>
+              <a:t>▸ ② NMES——神经肌肉电刺激（Neuromuscular Electrical Stimulation）</a:t>
             </a:r>
           </a:p>
         </p:txBody>
@@ -12237,30 +13529,30 @@
         </p:nvSpPr>
         <p:spPr>
           <a:xfrm>
-            <a:off x="6217920" y="1874520"/>
-            <a:ext cx="5486400" cy="320040"/>
-          </a:xfrm>
-          <a:prstGeom prst="rect">
-            <a:avLst/>
-          </a:prstGeom>
-          <a:noFill/>
-        </p:spPr>
-        <p:txBody>
-          <a:bodyPr wrap="square">
-            <a:spAutoFit/>
-          </a:bodyPr>
-          <a:lstStyle/>
-          <a:p>
-            <a:pPr algn="l">
-              <a:defRPr sz="1500" b="0">
-                <a:solidFill>
-                  <a:srgbClr val="282828"/>
-                </a:solidFill>
-                <a:latin typeface="微软雅黑"/>
-              </a:defRPr>
-            </a:pPr>
-            <a:r>
-              <a:t>▸ IFC干扰电 (4000Hz交叉) — 深层组织</a:t>
+            <a:off x="822960" y="3749040"/>
+            <a:ext cx="10332720" cy="320040"/>
+          </a:xfrm>
+          <a:prstGeom prst="rect">
+            <a:avLst/>
+          </a:prstGeom>
+          <a:noFill/>
+        </p:spPr>
+        <p:txBody>
+          <a:bodyPr wrap="square">
+            <a:spAutoFit/>
+          </a:bodyPr>
+          <a:lstStyle/>
+          <a:p>
+            <a:pPr algn="l">
+              <a:defRPr sz="1600" b="0">
+                <a:solidFill>
+                  <a:srgbClr val="282828"/>
+                </a:solidFill>
+                <a:latin typeface="微软雅黑"/>
+              </a:defRPr>
+            </a:pPr>
+            <a:r>
+              <a:t>▸    频率20-50Hz | 机制：直接激活运动神经，引起肌肉收缩 → 肌肉功能重建</a:t>
             </a:r>
           </a:p>
         </p:txBody>
@@ -12273,30 +13565,30 @@
         </p:nvSpPr>
         <p:spPr>
           <a:xfrm>
-            <a:off x="6217920" y="2194560"/>
-            <a:ext cx="5486400" cy="320040"/>
-          </a:xfrm>
-          <a:prstGeom prst="rect">
-            <a:avLst/>
-          </a:prstGeom>
-          <a:noFill/>
-        </p:spPr>
-        <p:txBody>
-          <a:bodyPr wrap="square">
-            <a:spAutoFit/>
-          </a:bodyPr>
-          <a:lstStyle/>
-          <a:p>
-            <a:pPr algn="l">
-              <a:defRPr sz="1500" b="0">
-                <a:solidFill>
-                  <a:srgbClr val="282828"/>
-                </a:solidFill>
-                <a:latin typeface="微软雅黑"/>
-              </a:defRPr>
-            </a:pPr>
-            <a:r>
-              <a:t>▸ 调制中频 — 综合效应</a:t>
+            <a:off x="822960" y="4069080"/>
+            <a:ext cx="10332720" cy="320040"/>
+          </a:xfrm>
+          <a:prstGeom prst="rect">
+            <a:avLst/>
+          </a:prstGeom>
+          <a:noFill/>
+        </p:spPr>
+        <p:txBody>
+          <a:bodyPr wrap="square">
+            <a:spAutoFit/>
+          </a:bodyPr>
+          <a:lstStyle/>
+          <a:p>
+            <a:pPr algn="l">
+              <a:defRPr sz="1600" b="0">
+                <a:solidFill>
+                  <a:srgbClr val="282828"/>
+                </a:solidFill>
+                <a:latin typeface="微软雅黑"/>
+              </a:defRPr>
+            </a:pPr>
+            <a:r>
+              <a:t>▸    典型应用：盆底肌无力、尿失禁、器官脱垂</a:t>
             </a:r>
           </a:p>
         </p:txBody>
@@ -12309,30 +13601,30 @@
         </p:nvSpPr>
         <p:spPr>
           <a:xfrm>
-            <a:off x="6217920" y="2514600"/>
-            <a:ext cx="5486400" cy="320040"/>
-          </a:xfrm>
-          <a:prstGeom prst="rect">
-            <a:avLst/>
-          </a:prstGeom>
-          <a:noFill/>
-        </p:spPr>
-        <p:txBody>
-          <a:bodyPr wrap="square">
-            <a:spAutoFit/>
-          </a:bodyPr>
-          <a:lstStyle/>
-          <a:p>
-            <a:pPr algn="l">
-              <a:defRPr sz="1500" b="0">
-                <a:solidFill>
-                  <a:srgbClr val="282828"/>
-                </a:solidFill>
-                <a:latin typeface="微软雅黑"/>
-              </a:defRPr>
-            </a:pPr>
-            <a:r>
-              <a:t>▸ ## 盆底专用参数</a:t>
+            <a:off x="822960" y="4389120"/>
+            <a:ext cx="10332720" cy="320040"/>
+          </a:xfrm>
+          <a:prstGeom prst="rect">
+            <a:avLst/>
+          </a:prstGeom>
+          <a:noFill/>
+        </p:spPr>
+        <p:txBody>
+          <a:bodyPr wrap="square">
+            <a:spAutoFit/>
+          </a:bodyPr>
+          <a:lstStyle/>
+          <a:p>
+            <a:pPr algn="l">
+              <a:defRPr sz="1600" b="0">
+                <a:solidFill>
+                  <a:srgbClr val="282828"/>
+                </a:solidFill>
+                <a:latin typeface="微软雅黑"/>
+              </a:defRPr>
+            </a:pPr>
+            <a:r>
+              <a:t>▸ </a:t>
             </a:r>
           </a:p>
         </p:txBody>
@@ -12345,30 +13637,30 @@
         </p:nvSpPr>
         <p:spPr>
           <a:xfrm>
-            <a:off x="6217920" y="2834640"/>
-            <a:ext cx="5486400" cy="320040"/>
-          </a:xfrm>
-          <a:prstGeom prst="rect">
-            <a:avLst/>
-          </a:prstGeom>
-          <a:noFill/>
-        </p:spPr>
-        <p:txBody>
-          <a:bodyPr wrap="square">
-            <a:spAutoFit/>
-          </a:bodyPr>
-          <a:lstStyle/>
-          <a:p>
-            <a:pPr algn="l">
-              <a:defRPr sz="1500" b="0">
-                <a:solidFill>
-                  <a:srgbClr val="282828"/>
-                </a:solidFill>
-                <a:latin typeface="微软雅黑"/>
-              </a:defRPr>
-            </a:pPr>
-            <a:r>
-              <a:t>▸ Ⅰ类肌(慢肌)：20-30Hz, 300-500μs → 脱垂/疼痛</a:t>
+            <a:off x="822960" y="4709160"/>
+            <a:ext cx="10332720" cy="320040"/>
+          </a:xfrm>
+          <a:prstGeom prst="rect">
+            <a:avLst/>
+          </a:prstGeom>
+          <a:noFill/>
+        </p:spPr>
+        <p:txBody>
+          <a:bodyPr wrap="square">
+            <a:spAutoFit/>
+          </a:bodyPr>
+          <a:lstStyle/>
+          <a:p>
+            <a:pPr algn="l">
+              <a:defRPr sz="1600" b="0">
+                <a:solidFill>
+                  <a:srgbClr val="282828"/>
+                </a:solidFill>
+                <a:latin typeface="微软雅黑"/>
+              </a:defRPr>
+            </a:pPr>
+            <a:r>
+              <a:t>▸ ③ MENS——微电流神经电刺激（Microcurrent Electrical Nerve Stimulation）</a:t>
             </a:r>
           </a:p>
         </p:txBody>
@@ -12381,30 +13673,282 @@
         </p:nvSpPr>
         <p:spPr>
           <a:xfrm>
-            <a:off x="6217920" y="3154680"/>
-            <a:ext cx="5486400" cy="320040"/>
-          </a:xfrm>
-          <a:prstGeom prst="rect">
-            <a:avLst/>
-          </a:prstGeom>
-          <a:noFill/>
-        </p:spPr>
-        <p:txBody>
-          <a:bodyPr wrap="square">
-            <a:spAutoFit/>
-          </a:bodyPr>
-          <a:lstStyle/>
-          <a:p>
-            <a:pPr algn="l">
-              <a:defRPr sz="1500" b="0">
-                <a:solidFill>
-                  <a:srgbClr val="282828"/>
-                </a:solidFill>
-                <a:latin typeface="微软雅黑"/>
-              </a:defRPr>
-            </a:pPr>
-            <a:r>
-              <a:t>▸ Ⅱ类肌(快肌)：35-50Hz, 100-200μs → 漏尿</a:t>
+            <a:off x="822960" y="5029200"/>
+            <a:ext cx="10332720" cy="320040"/>
+          </a:xfrm>
+          <a:prstGeom prst="rect">
+            <a:avLst/>
+          </a:prstGeom>
+          <a:noFill/>
+        </p:spPr>
+        <p:txBody>
+          <a:bodyPr wrap="square">
+            <a:spAutoFit/>
+          </a:bodyPr>
+          <a:lstStyle/>
+          <a:p>
+            <a:pPr algn="l">
+              <a:defRPr sz="1600" b="0">
+                <a:solidFill>
+                  <a:srgbClr val="282828"/>
+                </a:solidFill>
+                <a:latin typeface="微软雅黑"/>
+              </a:defRPr>
+            </a:pPr>
+            <a:r>
+              <a:t>▸    频率&lt;1Hz | 机制：促进ATP合成、细胞修复、减轻炎症 → 组织修复</a:t>
+            </a:r>
+          </a:p>
+        </p:txBody>
+      </p:sp>
+      <p:sp>
+        <p:nvSpPr>
+          <p:cNvPr id="18" name="TextBox 17"/>
+          <p:cNvSpPr txBox="1"/>
+          <p:nvPr/>
+        </p:nvSpPr>
+        <p:spPr>
+          <a:xfrm>
+            <a:off x="822960" y="5349240"/>
+            <a:ext cx="10332720" cy="320040"/>
+          </a:xfrm>
+          <a:prstGeom prst="rect">
+            <a:avLst/>
+          </a:prstGeom>
+          <a:noFill/>
+        </p:spPr>
+        <p:txBody>
+          <a:bodyPr wrap="square">
+            <a:spAutoFit/>
+          </a:bodyPr>
+          <a:lstStyle/>
+          <a:p>
+            <a:pPr algn="l">
+              <a:defRPr sz="1600" b="0">
+                <a:solidFill>
+                  <a:srgbClr val="282828"/>
+                </a:solidFill>
+                <a:latin typeface="微软雅黑"/>
+              </a:defRPr>
+            </a:pPr>
+            <a:r>
+              <a:t>▸    典型应用：外阴白斑、伤口愈合、组织损伤修复</a:t>
+            </a:r>
+          </a:p>
+        </p:txBody>
+      </p:sp>
+      <p:sp>
+        <p:nvSpPr>
+          <p:cNvPr id="19" name="TextBox 18"/>
+          <p:cNvSpPr txBox="1"/>
+          <p:nvPr/>
+        </p:nvSpPr>
+        <p:spPr>
+          <a:xfrm>
+            <a:off x="822960" y="5669280"/>
+            <a:ext cx="10332720" cy="320040"/>
+          </a:xfrm>
+          <a:prstGeom prst="rect">
+            <a:avLst/>
+          </a:prstGeom>
+          <a:noFill/>
+        </p:spPr>
+        <p:txBody>
+          <a:bodyPr wrap="square">
+            <a:spAutoFit/>
+          </a:bodyPr>
+          <a:lstStyle/>
+          <a:p>
+            <a:pPr algn="l">
+              <a:defRPr sz="1600" b="0">
+                <a:solidFill>
+                  <a:srgbClr val="282828"/>
+                </a:solidFill>
+                <a:latin typeface="微软雅黑"/>
+              </a:defRPr>
+            </a:pPr>
+            <a:r>
+              <a:t>▸ </a:t>
+            </a:r>
+          </a:p>
+        </p:txBody>
+      </p:sp>
+      <p:sp>
+        <p:nvSpPr>
+          <p:cNvPr id="20" name="TextBox 19"/>
+          <p:cNvSpPr txBox="1"/>
+          <p:nvPr/>
+        </p:nvSpPr>
+        <p:spPr>
+          <a:xfrm>
+            <a:off x="822960" y="5989320"/>
+            <a:ext cx="10332720" cy="320040"/>
+          </a:xfrm>
+          <a:prstGeom prst="rect">
+            <a:avLst/>
+          </a:prstGeom>
+          <a:noFill/>
+        </p:spPr>
+        <p:txBody>
+          <a:bodyPr wrap="square">
+            <a:spAutoFit/>
+          </a:bodyPr>
+          <a:lstStyle/>
+          <a:p>
+            <a:pPr algn="l">
+              <a:defRPr sz="1600" b="0">
+                <a:solidFill>
+                  <a:srgbClr val="282828"/>
+                </a:solidFill>
+                <a:latin typeface="微软雅黑"/>
+              </a:defRPr>
+            </a:pPr>
+            <a:r>
+              <a:t>▸ ④ FES——功能性电刺激（Functional Electrical Stimulation）</a:t>
+            </a:r>
+          </a:p>
+        </p:txBody>
+      </p:sp>
+      <p:sp>
+        <p:nvSpPr>
+          <p:cNvPr id="21" name="TextBox 20"/>
+          <p:cNvSpPr txBox="1"/>
+          <p:nvPr/>
+        </p:nvSpPr>
+        <p:spPr>
+          <a:xfrm>
+            <a:off x="822960" y="6309360"/>
+            <a:ext cx="10332720" cy="320040"/>
+          </a:xfrm>
+          <a:prstGeom prst="rect">
+            <a:avLst/>
+          </a:prstGeom>
+          <a:noFill/>
+        </p:spPr>
+        <p:txBody>
+          <a:bodyPr wrap="square">
+            <a:spAutoFit/>
+          </a:bodyPr>
+          <a:lstStyle/>
+          <a:p>
+            <a:pPr algn="l">
+              <a:defRPr sz="1600" b="0">
+                <a:solidFill>
+                  <a:srgbClr val="282828"/>
+                </a:solidFill>
+                <a:latin typeface="微软雅黑"/>
+              </a:defRPr>
+            </a:pPr>
+            <a:r>
+              <a:t>▸    频率20-50Hz | 机制：替代神经信号，完成特定功能动作 → 功能替代</a:t>
+            </a:r>
+          </a:p>
+        </p:txBody>
+      </p:sp>
+      <p:sp>
+        <p:nvSpPr>
+          <p:cNvPr id="22" name="TextBox 21"/>
+          <p:cNvSpPr txBox="1"/>
+          <p:nvPr/>
+        </p:nvSpPr>
+        <p:spPr>
+          <a:xfrm>
+            <a:off x="822960" y="6629400"/>
+            <a:ext cx="10332720" cy="320040"/>
+          </a:xfrm>
+          <a:prstGeom prst="rect">
+            <a:avLst/>
+          </a:prstGeom>
+          <a:noFill/>
+        </p:spPr>
+        <p:txBody>
+          <a:bodyPr wrap="square">
+            <a:spAutoFit/>
+          </a:bodyPr>
+          <a:lstStyle/>
+          <a:p>
+            <a:pPr algn="l">
+              <a:defRPr sz="1600" b="0">
+                <a:solidFill>
+                  <a:srgbClr val="282828"/>
+                </a:solidFill>
+                <a:latin typeface="微软雅黑"/>
+              </a:defRPr>
+            </a:pPr>
+            <a:r>
+              <a:t>▸    典型应用：神经损伤后膀胱排空辅助、术后尿潴留</a:t>
+            </a:r>
+          </a:p>
+        </p:txBody>
+      </p:sp>
+      <p:sp>
+        <p:nvSpPr>
+          <p:cNvPr id="23" name="TextBox 22"/>
+          <p:cNvSpPr txBox="1"/>
+          <p:nvPr/>
+        </p:nvSpPr>
+        <p:spPr>
+          <a:xfrm>
+            <a:off x="822960" y="6949440"/>
+            <a:ext cx="10332720" cy="320040"/>
+          </a:xfrm>
+          <a:prstGeom prst="rect">
+            <a:avLst/>
+          </a:prstGeom>
+          <a:noFill/>
+        </p:spPr>
+        <p:txBody>
+          <a:bodyPr wrap="square">
+            <a:spAutoFit/>
+          </a:bodyPr>
+          <a:lstStyle/>
+          <a:p>
+            <a:pPr algn="l">
+              <a:defRPr sz="1600" b="0">
+                <a:solidFill>
+                  <a:srgbClr val="282828"/>
+                </a:solidFill>
+                <a:latin typeface="微软雅黑"/>
+              </a:defRPr>
+            </a:pPr>
+            <a:r>
+              <a:t>▸ </a:t>
+            </a:r>
+          </a:p>
+        </p:txBody>
+      </p:sp>
+      <p:sp>
+        <p:nvSpPr>
+          <p:cNvPr id="24" name="TextBox 23"/>
+          <p:cNvSpPr txBox="1"/>
+          <p:nvPr/>
+        </p:nvSpPr>
+        <p:spPr>
+          <a:xfrm>
+            <a:off x="640080" y="7269480"/>
+            <a:ext cx="10515600" cy="320040"/>
+          </a:xfrm>
+          <a:prstGeom prst="rect">
+            <a:avLst/>
+          </a:prstGeom>
+          <a:noFill/>
+        </p:spPr>
+        <p:txBody>
+          <a:bodyPr wrap="square">
+            <a:spAutoFit/>
+          </a:bodyPr>
+          <a:lstStyle/>
+          <a:p>
+            <a:pPr algn="l">
+              <a:defRPr sz="1400" b="0">
+                <a:solidFill>
+                  <a:srgbClr val="E67E22"/>
+                </a:solidFill>
+                <a:latin typeface="微软雅黑"/>
+              </a:defRPr>
+            </a:pPr>
+            <a:r>
+              <a:t>📌 注：缩写首次出现时标注全称（英文+中文），便于学习者建立完整概念体系</a:t>
             </a:r>
           </a:p>
         </p:txBody>
@@ -12509,14 +14053,93 @@
               </a:defRPr>
             </a:pPr>
             <a:r>
-              <a:t>电刺激与神经可塑性</a:t>
-            </a:r>
-          </a:p>
-        </p:txBody>
-      </p:sp>
-      <p:sp>
-        <p:nvSpPr>
-          <p:cNvPr id="4" name="TextBox 3"/>
+              <a:t>第二章  电刺激治疗的完整分类体系（中）</a:t>
+            </a:r>
+          </a:p>
+        </p:txBody>
+      </p:sp>
+      <p:sp>
+        <p:nvSpPr>
+          <p:cNvPr id="4" name="Rectangle 3"/>
+          <p:cNvSpPr/>
+          <p:nvPr/>
+        </p:nvSpPr>
+        <p:spPr>
+          <a:xfrm>
+            <a:off x="0" y="1005840"/>
+            <a:ext cx="12191695" cy="320040"/>
+          </a:xfrm>
+          <a:prstGeom prst="rect">
+            <a:avLst/>
+          </a:prstGeom>
+          <a:solidFill>
+            <a:srgbClr val="006699"/>
+          </a:solidFill>
+          <a:ln>
+            <a:noFill/>
+          </a:ln>
+        </p:spPr>
+        <p:style>
+          <a:lnRef idx="1">
+            <a:schemeClr val="accent1"/>
+          </a:lnRef>
+          <a:fillRef idx="3">
+            <a:schemeClr val="accent1"/>
+          </a:fillRef>
+          <a:effectRef idx="2">
+            <a:schemeClr val="accent1"/>
+          </a:effectRef>
+          <a:fontRef idx="minor">
+            <a:schemeClr val="lt1"/>
+          </a:fontRef>
+        </p:style>
+        <p:txBody>
+          <a:bodyPr rtlCol="0" anchor="ctr"/>
+          <a:lstStyle/>
+          <a:p>
+            <a:pPr algn="ctr"/>
+          </a:p>
+        </p:txBody>
+      </p:sp>
+      <p:sp>
+        <p:nvSpPr>
+          <p:cNvPr id="5" name="TextBox 4"/>
+          <p:cNvSpPr txBox="1"/>
+          <p:nvPr/>
+        </p:nvSpPr>
+        <p:spPr>
+          <a:xfrm>
+            <a:off x="457200" y="1024128"/>
+            <a:ext cx="10972800" cy="274320"/>
+          </a:xfrm>
+          <a:prstGeom prst="rect">
+            <a:avLst/>
+          </a:prstGeom>
+          <a:noFill/>
+        </p:spPr>
+        <p:txBody>
+          <a:bodyPr wrap="square">
+            <a:spAutoFit/>
+          </a:bodyPr>
+          <a:lstStyle/>
+          <a:p>
+            <a:pPr algn="l">
+              <a:defRPr sz="1300" b="0">
+                <a:solidFill>
+                  <a:srgbClr val="FFFFFF"/>
+                </a:solidFill>
+                <a:latin typeface="微软雅黑"/>
+              </a:defRPr>
+            </a:pPr>
+            <a:r>
+              <a:t>中频电刺激（IFC干扰电、调制中频）的机制、特点与临床应用</a:t>
+            </a:r>
+          </a:p>
+        </p:txBody>
+      </p:sp>
+      <p:sp>
+        <p:nvSpPr>
+          <p:cNvPr id="6" name="TextBox 5"/>
           <p:cNvSpPr txBox="1"/>
           <p:nvPr/>
         </p:nvSpPr>
@@ -12545,14 +14168,14 @@
               </a:defRPr>
             </a:pPr>
             <a:r>
-              <a:t>为什么NMES能促进神经再支配？</a:t>
-            </a:r>
-          </a:p>
-        </p:txBody>
-      </p:sp>
-      <p:sp>
-        <p:nvSpPr>
-          <p:cNvPr id="5" name="TextBox 4"/>
+              <a:t>中频电刺激（Medium Frequency Electrical Stimulation, 1000-100000Hz）</a:t>
+            </a:r>
+          </a:p>
+        </p:txBody>
+      </p:sp>
+      <p:sp>
+        <p:nvSpPr>
+          <p:cNvPr id="7" name="TextBox 6"/>
           <p:cNvSpPr txBox="1"/>
           <p:nvPr/>
         </p:nvSpPr>
@@ -12581,14 +14204,14 @@
               </a:defRPr>
             </a:pPr>
             <a:r>
-              <a:t>▸ NMES通过重复性电刺激激活运动神经末梢</a:t>
-            </a:r>
-          </a:p>
-        </p:txBody>
-      </p:sp>
-      <p:sp>
-        <p:nvSpPr>
-          <p:cNvPr id="6" name="TextBox 5"/>
+              <a:t>▸ </a:t>
+            </a:r>
+          </a:p>
+        </p:txBody>
+      </p:sp>
+      <p:sp>
+        <p:nvSpPr>
+          <p:cNvPr id="8" name="TextBox 7"/>
           <p:cNvSpPr txBox="1"/>
           <p:nvPr/>
         </p:nvSpPr>
@@ -12617,28 +14240,416 @@
               </a:defRPr>
             </a:pPr>
             <a:r>
-              <a:t>▸ → 促进突触可塑性 </a:t>
-            </a:r>
-            <a:br/>
-            <a:r>
-              <a:t>→ 增强神经递质释放效率 </a:t>
-            </a:r>
-            <a:br/>
-            <a:r>
-              <a:t>→ 重建神经-肌肉连接通路</a:t>
-            </a:r>
-          </a:p>
-        </p:txBody>
-      </p:sp>
-      <p:sp>
-        <p:nvSpPr>
-          <p:cNvPr id="7" name="TextBox 6"/>
-          <p:cNvSpPr txBox="1"/>
-          <p:nvPr/>
-        </p:nvSpPr>
-        <p:spPr>
-          <a:xfrm>
-            <a:off x="640080" y="2468880"/>
+              <a:t>▸ ① IFC——干扰电疗法（Interferential Current Therapy）</a:t>
+            </a:r>
+          </a:p>
+        </p:txBody>
+      </p:sp>
+      <p:sp>
+        <p:nvSpPr>
+          <p:cNvPr id="9" name="TextBox 8"/>
+          <p:cNvSpPr txBox="1"/>
+          <p:nvPr/>
+        </p:nvSpPr>
+        <p:spPr>
+          <a:xfrm>
+            <a:off x="822960" y="2468880"/>
+            <a:ext cx="10332720" cy="320040"/>
+          </a:xfrm>
+          <a:prstGeom prst="rect">
+            <a:avLst/>
+          </a:prstGeom>
+          <a:noFill/>
+        </p:spPr>
+        <p:txBody>
+          <a:bodyPr wrap="square">
+            <a:spAutoFit/>
+          </a:bodyPr>
+          <a:lstStyle/>
+          <a:p>
+            <a:pPr algn="l">
+              <a:defRPr sz="1600" b="0">
+                <a:solidFill>
+                  <a:srgbClr val="282828"/>
+                </a:solidFill>
+                <a:latin typeface="微软雅黑"/>
+              </a:defRPr>
+            </a:pPr>
+            <a:r>
+              <a:t>▸    载波频率：4000Hz × (4000±100)Hz 两路中频交叉</a:t>
+            </a:r>
+          </a:p>
+        </p:txBody>
+      </p:sp>
+      <p:sp>
+        <p:nvSpPr>
+          <p:cNvPr id="10" name="TextBox 9"/>
+          <p:cNvSpPr txBox="1"/>
+          <p:nvPr/>
+        </p:nvSpPr>
+        <p:spPr>
+          <a:xfrm>
+            <a:off x="822960" y="2788920"/>
+            <a:ext cx="10332720" cy="320040"/>
+          </a:xfrm>
+          <a:prstGeom prst="rect">
+            <a:avLst/>
+          </a:prstGeom>
+          <a:noFill/>
+        </p:spPr>
+        <p:txBody>
+          <a:bodyPr wrap="square">
+            <a:spAutoFit/>
+          </a:bodyPr>
+          <a:lstStyle/>
+          <a:p>
+            <a:pPr algn="l">
+              <a:defRPr sz="1600" b="0">
+                <a:solidFill>
+                  <a:srgbClr val="282828"/>
+                </a:solidFill>
+                <a:latin typeface="微软雅黑"/>
+              </a:defRPr>
+            </a:pPr>
+            <a:r>
+              <a:t>▸    机制：两路中频电流在组织深部交叉，形成低频干扰场（100Hz左右差频）</a:t>
+            </a:r>
+          </a:p>
+        </p:txBody>
+      </p:sp>
+      <p:sp>
+        <p:nvSpPr>
+          <p:cNvPr id="11" name="TextBox 10"/>
+          <p:cNvSpPr txBox="1"/>
+          <p:nvPr/>
+        </p:nvSpPr>
+        <p:spPr>
+          <a:xfrm>
+            <a:off x="822960" y="3108960"/>
+            <a:ext cx="10332720" cy="320040"/>
+          </a:xfrm>
+          <a:prstGeom prst="rect">
+            <a:avLst/>
+          </a:prstGeom>
+          <a:noFill/>
+        </p:spPr>
+        <p:txBody>
+          <a:bodyPr wrap="square">
+            <a:spAutoFit/>
+          </a:bodyPr>
+          <a:lstStyle/>
+          <a:p>
+            <a:pPr algn="l">
+              <a:defRPr sz="1600" b="0">
+                <a:solidFill>
+                  <a:srgbClr val="282828"/>
+                </a:solidFill>
+                <a:latin typeface="微软雅黑"/>
+              </a:defRPr>
+            </a:pPr>
+            <a:r>
+              <a:t>▸    特点：穿透深度大，可作用到深层肌肉和盆腔组织</a:t>
+            </a:r>
+          </a:p>
+        </p:txBody>
+      </p:sp>
+      <p:sp>
+        <p:nvSpPr>
+          <p:cNvPr id="12" name="TextBox 11"/>
+          <p:cNvSpPr txBox="1"/>
+          <p:nvPr/>
+        </p:nvSpPr>
+        <p:spPr>
+          <a:xfrm>
+            <a:off x="822960" y="3429000"/>
+            <a:ext cx="10332720" cy="320040"/>
+          </a:xfrm>
+          <a:prstGeom prst="rect">
+            <a:avLst/>
+          </a:prstGeom>
+          <a:noFill/>
+        </p:spPr>
+        <p:txBody>
+          <a:bodyPr wrap="square">
+            <a:spAutoFit/>
+          </a:bodyPr>
+          <a:lstStyle/>
+          <a:p>
+            <a:pPr algn="l">
+              <a:defRPr sz="1600" b="0">
+                <a:solidFill>
+                  <a:srgbClr val="282828"/>
+                </a:solidFill>
+                <a:latin typeface="微软雅黑"/>
+              </a:defRPr>
+            </a:pPr>
+            <a:r>
+              <a:t>▸    患者感受：深部温热感+肌肉收缩感，舒适度高</a:t>
+            </a:r>
+          </a:p>
+        </p:txBody>
+      </p:sp>
+      <p:sp>
+        <p:nvSpPr>
+          <p:cNvPr id="13" name="TextBox 12"/>
+          <p:cNvSpPr txBox="1"/>
+          <p:nvPr/>
+        </p:nvSpPr>
+        <p:spPr>
+          <a:xfrm>
+            <a:off x="822960" y="3749040"/>
+            <a:ext cx="10332720" cy="320040"/>
+          </a:xfrm>
+          <a:prstGeom prst="rect">
+            <a:avLst/>
+          </a:prstGeom>
+          <a:noFill/>
+        </p:spPr>
+        <p:txBody>
+          <a:bodyPr wrap="square">
+            <a:spAutoFit/>
+          </a:bodyPr>
+          <a:lstStyle/>
+          <a:p>
+            <a:pPr algn="l">
+              <a:defRPr sz="1600" b="0">
+                <a:solidFill>
+                  <a:srgbClr val="282828"/>
+                </a:solidFill>
+                <a:latin typeface="微软雅黑"/>
+              </a:defRPr>
+            </a:pPr>
+            <a:r>
+              <a:t>▸    典型应用：深层盆腔疼痛、慢性盆腔炎</a:t>
+            </a:r>
+          </a:p>
+        </p:txBody>
+      </p:sp>
+      <p:sp>
+        <p:nvSpPr>
+          <p:cNvPr id="14" name="TextBox 13"/>
+          <p:cNvSpPr txBox="1"/>
+          <p:nvPr/>
+        </p:nvSpPr>
+        <p:spPr>
+          <a:xfrm>
+            <a:off x="822960" y="4069080"/>
+            <a:ext cx="10332720" cy="320040"/>
+          </a:xfrm>
+          <a:prstGeom prst="rect">
+            <a:avLst/>
+          </a:prstGeom>
+          <a:noFill/>
+        </p:spPr>
+        <p:txBody>
+          <a:bodyPr wrap="square">
+            <a:spAutoFit/>
+          </a:bodyPr>
+          <a:lstStyle/>
+          <a:p>
+            <a:pPr algn="l">
+              <a:defRPr sz="1600" b="0">
+                <a:solidFill>
+                  <a:srgbClr val="282828"/>
+                </a:solidFill>
+                <a:latin typeface="微软雅黑"/>
+              </a:defRPr>
+            </a:pPr>
+            <a:r>
+              <a:t>▸ </a:t>
+            </a:r>
+          </a:p>
+        </p:txBody>
+      </p:sp>
+      <p:sp>
+        <p:nvSpPr>
+          <p:cNvPr id="15" name="TextBox 14"/>
+          <p:cNvSpPr txBox="1"/>
+          <p:nvPr/>
+        </p:nvSpPr>
+        <p:spPr>
+          <a:xfrm>
+            <a:off x="822960" y="4389120"/>
+            <a:ext cx="10332720" cy="320040"/>
+          </a:xfrm>
+          <a:prstGeom prst="rect">
+            <a:avLst/>
+          </a:prstGeom>
+          <a:noFill/>
+        </p:spPr>
+        <p:txBody>
+          <a:bodyPr wrap="square">
+            <a:spAutoFit/>
+          </a:bodyPr>
+          <a:lstStyle/>
+          <a:p>
+            <a:pPr algn="l">
+              <a:defRPr sz="1600" b="0">
+                <a:solidFill>
+                  <a:srgbClr val="282828"/>
+                </a:solidFill>
+                <a:latin typeface="微软雅黑"/>
+              </a:defRPr>
+            </a:pPr>
+            <a:r>
+              <a:t>▸ ② 调制中频电疗法（Modulated Medium Frequency Therapy）</a:t>
+            </a:r>
+          </a:p>
+        </p:txBody>
+      </p:sp>
+      <p:sp>
+        <p:nvSpPr>
+          <p:cNvPr id="16" name="TextBox 15"/>
+          <p:cNvSpPr txBox="1"/>
+          <p:nvPr/>
+        </p:nvSpPr>
+        <p:spPr>
+          <a:xfrm>
+            <a:off x="822960" y="4709160"/>
+            <a:ext cx="10332720" cy="320040"/>
+          </a:xfrm>
+          <a:prstGeom prst="rect">
+            <a:avLst/>
+          </a:prstGeom>
+          <a:noFill/>
+        </p:spPr>
+        <p:txBody>
+          <a:bodyPr wrap="square">
+            <a:spAutoFit/>
+          </a:bodyPr>
+          <a:lstStyle/>
+          <a:p>
+            <a:pPr algn="l">
+              <a:defRPr sz="1600" b="0">
+                <a:solidFill>
+                  <a:srgbClr val="282828"/>
+                </a:solidFill>
+                <a:latin typeface="微软雅黑"/>
+              </a:defRPr>
+            </a:pPr>
+            <a:r>
+              <a:t>▸    机制：在中频载波上叠加低频调制波，兼具中频穿透力和低频刺激效果</a:t>
+            </a:r>
+          </a:p>
+        </p:txBody>
+      </p:sp>
+      <p:sp>
+        <p:nvSpPr>
+          <p:cNvPr id="17" name="TextBox 16"/>
+          <p:cNvSpPr txBox="1"/>
+          <p:nvPr/>
+        </p:nvSpPr>
+        <p:spPr>
+          <a:xfrm>
+            <a:off x="822960" y="5029200"/>
+            <a:ext cx="10332720" cy="320040"/>
+          </a:xfrm>
+          <a:prstGeom prst="rect">
+            <a:avLst/>
+          </a:prstGeom>
+          <a:noFill/>
+        </p:spPr>
+        <p:txBody>
+          <a:bodyPr wrap="square">
+            <a:spAutoFit/>
+          </a:bodyPr>
+          <a:lstStyle/>
+          <a:p>
+            <a:pPr algn="l">
+              <a:defRPr sz="1600" b="0">
+                <a:solidFill>
+                  <a:srgbClr val="282828"/>
+                </a:solidFill>
+                <a:latin typeface="微软雅黑"/>
+              </a:defRPr>
+            </a:pPr>
+            <a:r>
+              <a:t>▸    特点：频谱丰富，可同时激活不同类型的感觉和运动神经纤维</a:t>
+            </a:r>
+          </a:p>
+        </p:txBody>
+      </p:sp>
+      <p:sp>
+        <p:nvSpPr>
+          <p:cNvPr id="18" name="TextBox 17"/>
+          <p:cNvSpPr txBox="1"/>
+          <p:nvPr/>
+        </p:nvSpPr>
+        <p:spPr>
+          <a:xfrm>
+            <a:off x="822960" y="5349240"/>
+            <a:ext cx="10332720" cy="320040"/>
+          </a:xfrm>
+          <a:prstGeom prst="rect">
+            <a:avLst/>
+          </a:prstGeom>
+          <a:noFill/>
+        </p:spPr>
+        <p:txBody>
+          <a:bodyPr wrap="square">
+            <a:spAutoFit/>
+          </a:bodyPr>
+          <a:lstStyle/>
+          <a:p>
+            <a:pPr algn="l">
+              <a:defRPr sz="1600" b="0">
+                <a:solidFill>
+                  <a:srgbClr val="282828"/>
+                </a:solidFill>
+                <a:latin typeface="微软雅黑"/>
+              </a:defRPr>
+            </a:pPr>
+            <a:r>
+              <a:t>▸    应用场景：综合性康复治疗</a:t>
+            </a:r>
+          </a:p>
+        </p:txBody>
+      </p:sp>
+      <p:sp>
+        <p:nvSpPr>
+          <p:cNvPr id="19" name="TextBox 18"/>
+          <p:cNvSpPr txBox="1"/>
+          <p:nvPr/>
+        </p:nvSpPr>
+        <p:spPr>
+          <a:xfrm>
+            <a:off x="822960" y="5669280"/>
+            <a:ext cx="10332720" cy="320040"/>
+          </a:xfrm>
+          <a:prstGeom prst="rect">
+            <a:avLst/>
+          </a:prstGeom>
+          <a:noFill/>
+        </p:spPr>
+        <p:txBody>
+          <a:bodyPr wrap="square">
+            <a:spAutoFit/>
+          </a:bodyPr>
+          <a:lstStyle/>
+          <a:p>
+            <a:pPr algn="l">
+              <a:defRPr sz="1600" b="0">
+                <a:solidFill>
+                  <a:srgbClr val="282828"/>
+                </a:solidFill>
+                <a:latin typeface="微软雅黑"/>
+              </a:defRPr>
+            </a:pPr>
+            <a:r>
+              <a:t>▸ </a:t>
+            </a:r>
+          </a:p>
+        </p:txBody>
+      </p:sp>
+      <p:sp>
+        <p:nvSpPr>
+          <p:cNvPr id="20" name="TextBox 19"/>
+          <p:cNvSpPr txBox="1"/>
+          <p:nvPr/>
+        </p:nvSpPr>
+        <p:spPr>
+          <a:xfrm>
+            <a:off x="640080" y="5989320"/>
             <a:ext cx="10972800" cy="365760"/>
           </a:xfrm>
           <a:prstGeom prst="rect">
@@ -12661,20 +14672,20 @@
               </a:defRPr>
             </a:pPr>
             <a:r>
-              <a:t>关键机制</a:t>
-            </a:r>
-          </a:p>
-        </p:txBody>
-      </p:sp>
-      <p:sp>
-        <p:nvSpPr>
-          <p:cNvPr id="8" name="TextBox 7"/>
-          <p:cNvSpPr txBox="1"/>
-          <p:nvPr/>
-        </p:nvSpPr>
-        <p:spPr>
-          <a:xfrm>
-            <a:off x="822960" y="2834640"/>
+              <a:t>低频 vs 中频的核心区别</a:t>
+            </a:r>
+          </a:p>
+        </p:txBody>
+      </p:sp>
+      <p:sp>
+        <p:nvSpPr>
+          <p:cNvPr id="21" name="TextBox 20"/>
+          <p:cNvSpPr txBox="1"/>
+          <p:nvPr/>
+        </p:nvSpPr>
+        <p:spPr>
+          <a:xfrm>
+            <a:off x="822960" y="6355080"/>
             <a:ext cx="10332720" cy="320040"/>
           </a:xfrm>
           <a:prstGeom prst="rect">
@@ -12697,20 +14708,20 @@
               </a:defRPr>
             </a:pPr>
             <a:r>
-              <a:t>▸ 长时程增强（LTP）效应：高频重复刺激 → 突触传递效率持久增强</a:t>
-            </a:r>
-          </a:p>
-        </p:txBody>
-      </p:sp>
-      <p:sp>
-        <p:nvSpPr>
-          <p:cNvPr id="9" name="TextBox 8"/>
-          <p:cNvSpPr txBox="1"/>
-          <p:nvPr/>
-        </p:nvSpPr>
-        <p:spPr>
-          <a:xfrm>
-            <a:off x="822960" y="3154680"/>
+              <a:t>▸ 低频：穿透浅但直接作用于浅层神经肌肉，精准度高</a:t>
+            </a:r>
+          </a:p>
+        </p:txBody>
+      </p:sp>
+      <p:sp>
+        <p:nvSpPr>
+          <p:cNvPr id="22" name="TextBox 21"/>
+          <p:cNvSpPr txBox="1"/>
+          <p:nvPr/>
+        </p:nvSpPr>
+        <p:spPr>
+          <a:xfrm>
+            <a:off x="822960" y="6675120"/>
             <a:ext cx="10332720" cy="320040"/>
           </a:xfrm>
           <a:prstGeom prst="rect">
@@ -12733,20 +14744,20 @@
               </a:defRPr>
             </a:pPr>
             <a:r>
-              <a:t>▸ 运动皮质重塑：电刺激激活本体感觉传入 → 改变运动皮质映射区</a:t>
-            </a:r>
-          </a:p>
-        </p:txBody>
-      </p:sp>
-      <p:sp>
-        <p:nvSpPr>
-          <p:cNvPr id="10" name="TextBox 9"/>
-          <p:cNvSpPr txBox="1"/>
-          <p:nvPr/>
-        </p:nvSpPr>
-        <p:spPr>
-          <a:xfrm>
-            <a:off x="822960" y="3474720"/>
+              <a:t>▸ 中频：穿透深但需要交叉形成干扰场，适合深层组织</a:t>
+            </a:r>
+          </a:p>
+        </p:txBody>
+      </p:sp>
+      <p:sp>
+        <p:nvSpPr>
+          <p:cNvPr id="23" name="TextBox 22"/>
+          <p:cNvSpPr txBox="1"/>
+          <p:nvPr/>
+        </p:nvSpPr>
+        <p:spPr>
+          <a:xfrm>
+            <a:off x="822960" y="6995160"/>
             <a:ext cx="10332720" cy="320040"/>
           </a:xfrm>
           <a:prstGeom prst="rect">
@@ -12769,128 +14780,20 @@
               </a:defRPr>
             </a:pPr>
             <a:r>
-              <a:t>▸ 神经再支配：去神经肌肉通过电刺激 → 轴突芽生和运动单位重组</a:t>
-            </a:r>
-          </a:p>
-        </p:txBody>
-      </p:sp>
-      <p:sp>
-        <p:nvSpPr>
-          <p:cNvPr id="11" name="TextBox 10"/>
-          <p:cNvSpPr txBox="1"/>
-          <p:nvPr/>
-        </p:nvSpPr>
-        <p:spPr>
-          <a:xfrm>
-            <a:off x="640080" y="3794760"/>
-            <a:ext cx="10972800" cy="365760"/>
-          </a:xfrm>
-          <a:prstGeom prst="rect">
-            <a:avLst/>
-          </a:prstGeom>
-          <a:noFill/>
-        </p:spPr>
-        <p:txBody>
-          <a:bodyPr wrap="square">
-            <a:spAutoFit/>
-          </a:bodyPr>
-          <a:lstStyle/>
-          <a:p>
-            <a:pPr algn="l">
-              <a:defRPr sz="1700" b="1">
-                <a:solidFill>
-                  <a:srgbClr val="004C80"/>
-                </a:solidFill>
-                <a:latin typeface="微软雅黑"/>
-              </a:defRPr>
-            </a:pPr>
-            <a:r>
-              <a:t>临床证据</a:t>
-            </a:r>
-          </a:p>
-        </p:txBody>
-      </p:sp>
-      <p:sp>
-        <p:nvSpPr>
-          <p:cNvPr id="12" name="TextBox 11"/>
-          <p:cNvSpPr txBox="1"/>
-          <p:nvPr/>
-        </p:nvSpPr>
-        <p:spPr>
-          <a:xfrm>
-            <a:off x="822960" y="4160520"/>
-            <a:ext cx="10332720" cy="320040"/>
-          </a:xfrm>
-          <a:prstGeom prst="rect">
-            <a:avLst/>
-          </a:prstGeom>
-          <a:noFill/>
-        </p:spPr>
-        <p:txBody>
-          <a:bodyPr wrap="square">
-            <a:spAutoFit/>
-          </a:bodyPr>
-          <a:lstStyle/>
-          <a:p>
-            <a:pPr algn="l">
-              <a:defRPr sz="1600" b="0">
-                <a:solidFill>
-                  <a:srgbClr val="282828"/>
-                </a:solidFill>
-                <a:latin typeface="微软雅黑"/>
-              </a:defRPr>
-            </a:pPr>
-            <a:r>
-              <a:t>▸ 持续4周以上NMES → 运动诱发电位(MEP)振幅显著增加</a:t>
-            </a:r>
-          </a:p>
-        </p:txBody>
-      </p:sp>
-      <p:sp>
-        <p:nvSpPr>
-          <p:cNvPr id="13" name="TextBox 12"/>
-          <p:cNvSpPr txBox="1"/>
-          <p:nvPr/>
-        </p:nvSpPr>
-        <p:spPr>
-          <a:xfrm>
-            <a:off x="822960" y="4480560"/>
-            <a:ext cx="10332720" cy="320040"/>
-          </a:xfrm>
-          <a:prstGeom prst="rect">
-            <a:avLst/>
-          </a:prstGeom>
-          <a:noFill/>
-        </p:spPr>
-        <p:txBody>
-          <a:bodyPr wrap="square">
-            <a:spAutoFit/>
-          </a:bodyPr>
-          <a:lstStyle/>
-          <a:p>
-            <a:pPr algn="l">
-              <a:defRPr sz="1600" b="0">
-                <a:solidFill>
-                  <a:srgbClr val="282828"/>
-                </a:solidFill>
-                <a:latin typeface="微软雅黑"/>
-              </a:defRPr>
-            </a:pPr>
-            <a:r>
-              <a:t>▸ 联合生物反馈 → 效果优于单纯电刺激</a:t>
-            </a:r>
-          </a:p>
-        </p:txBody>
-      </p:sp>
-      <p:sp>
-        <p:nvSpPr>
-          <p:cNvPr id="14" name="TextBox 13"/>
-          <p:cNvSpPr txBox="1"/>
-          <p:nvPr/>
-        </p:nvSpPr>
-        <p:spPr>
-          <a:xfrm>
-            <a:off x="640080" y="4800600"/>
+              <a:t>▸ </a:t>
+            </a:r>
+          </a:p>
+        </p:txBody>
+      </p:sp>
+      <p:sp>
+        <p:nvSpPr>
+          <p:cNvPr id="24" name="TextBox 23"/>
+          <p:cNvSpPr txBox="1"/>
+          <p:nvPr/>
+        </p:nvSpPr>
+        <p:spPr>
+          <a:xfrm>
+            <a:off x="640080" y="7315200"/>
             <a:ext cx="10515600" cy="320040"/>
           </a:xfrm>
           <a:prstGeom prst="rect">
@@ -12913,7 +14816,7 @@
               </a:defRPr>
             </a:pPr>
             <a:r>
-              <a:t>📌 学术引用：Sheffler LR, Chae J. Neuromuscular electrical stimulation in neurorehabilitation. Muscle Nerve. 2007; Glazer HI, et al. J Urol. 1995.</a:t>
+              <a:t>📌 中频电刺激的核心优势：穿透深、作用范围大、患者舒适度高</a:t>
             </a:r>
           </a:p>
         </p:txBody>
@@ -13018,14 +14921,93 @@
               </a:defRPr>
             </a:pPr>
             <a:r>
-              <a:t>各类电刺激详解与患者感受</a:t>
-            </a:r>
-          </a:p>
-        </p:txBody>
-      </p:sp>
-      <p:sp>
-        <p:nvSpPr>
-          <p:cNvPr id="4" name="TextBox 3"/>
+              <a:t>第二章  电刺激治疗的完整分类体系（下）</a:t>
+            </a:r>
+          </a:p>
+        </p:txBody>
+      </p:sp>
+      <p:sp>
+        <p:nvSpPr>
+          <p:cNvPr id="4" name="Rectangle 3"/>
+          <p:cNvSpPr/>
+          <p:nvPr/>
+        </p:nvSpPr>
+        <p:spPr>
+          <a:xfrm>
+            <a:off x="0" y="1005840"/>
+            <a:ext cx="12191695" cy="320040"/>
+          </a:xfrm>
+          <a:prstGeom prst="rect">
+            <a:avLst/>
+          </a:prstGeom>
+          <a:solidFill>
+            <a:srgbClr val="006699"/>
+          </a:solidFill>
+          <a:ln>
+            <a:noFill/>
+          </a:ln>
+        </p:spPr>
+        <p:style>
+          <a:lnRef idx="1">
+            <a:schemeClr val="accent1"/>
+          </a:lnRef>
+          <a:fillRef idx="3">
+            <a:schemeClr val="accent1"/>
+          </a:fillRef>
+          <a:effectRef idx="2">
+            <a:schemeClr val="accent1"/>
+          </a:effectRef>
+          <a:fontRef idx="minor">
+            <a:schemeClr val="lt1"/>
+          </a:fontRef>
+        </p:style>
+        <p:txBody>
+          <a:bodyPr rtlCol="0" anchor="ctr"/>
+          <a:lstStyle/>
+          <a:p>
+            <a:pPr algn="ctr"/>
+          </a:p>
+        </p:txBody>
+      </p:sp>
+      <p:sp>
+        <p:nvSpPr>
+          <p:cNvPr id="5" name="TextBox 4"/>
+          <p:cNvSpPr txBox="1"/>
+          <p:nvPr/>
+        </p:nvSpPr>
+        <p:spPr>
+          <a:xfrm>
+            <a:off x="457200" y="1024128"/>
+            <a:ext cx="10972800" cy="274320"/>
+          </a:xfrm>
+          <a:prstGeom prst="rect">
+            <a:avLst/>
+          </a:prstGeom>
+          <a:noFill/>
+        </p:spPr>
+        <p:txBody>
+          <a:bodyPr wrap="square">
+            <a:spAutoFit/>
+          </a:bodyPr>
+          <a:lstStyle/>
+          <a:p>
+            <a:pPr algn="l">
+              <a:defRPr sz="1300" b="0">
+                <a:solidFill>
+                  <a:srgbClr val="FFFFFF"/>
+                </a:solidFill>
+                <a:latin typeface="微软雅黑"/>
+              </a:defRPr>
+            </a:pPr>
+            <a:r>
+              <a:t>Ⅰ类肌（慢肌）vs Ⅱ类肌（快肌）的差异化参数与治疗目标</a:t>
+            </a:r>
+          </a:p>
+        </p:txBody>
+      </p:sp>
+      <p:sp>
+        <p:nvSpPr>
+          <p:cNvPr id="6" name="TextBox 5"/>
           <p:cNvSpPr txBox="1"/>
           <p:nvPr/>
         </p:nvSpPr>
@@ -13054,14 +15036,14 @@
               </a:defRPr>
             </a:pPr>
             <a:r>
-              <a:t>TENS（经皮神经电刺激）</a:t>
-            </a:r>
-          </a:p>
-        </p:txBody>
-      </p:sp>
-      <p:sp>
-        <p:nvSpPr>
-          <p:cNvPr id="5" name="TextBox 4"/>
+              <a:t>盆底康复专用电刺激参数</a:t>
+            </a:r>
+          </a:p>
+        </p:txBody>
+      </p:sp>
+      <p:sp>
+        <p:nvSpPr>
+          <p:cNvPr id="7" name="TextBox 6"/>
           <p:cNvSpPr txBox="1"/>
           <p:nvPr/>
         </p:nvSpPr>
@@ -13090,14 +15072,14 @@
               </a:defRPr>
             </a:pPr>
             <a:r>
-              <a:t>▸ 频率50-150Hz | 机制：闸门控制理论+内源性阿片肽释放</a:t>
-            </a:r>
-          </a:p>
-        </p:txBody>
-      </p:sp>
-      <p:sp>
-        <p:nvSpPr>
-          <p:cNvPr id="6" name="TextBox 5"/>
+              <a:t>▸ </a:t>
+            </a:r>
+          </a:p>
+        </p:txBody>
+      </p:sp>
+      <p:sp>
+        <p:nvSpPr>
+          <p:cNvPr id="8" name="TextBox 7"/>
           <p:cNvSpPr txBox="1"/>
           <p:nvPr/>
         </p:nvSpPr>
@@ -13126,14 +15108,14 @@
               </a:defRPr>
             </a:pPr>
             <a:r>
-              <a:t>▸ 应用：慢性盆腔疼痛、产后伤口痛、性交痛</a:t>
-            </a:r>
-          </a:p>
-        </p:txBody>
-      </p:sp>
-      <p:sp>
-        <p:nvSpPr>
-          <p:cNvPr id="7" name="TextBox 6"/>
+              <a:t>▸ Ⅰ类肌（慢肌纤维/Slow-Twitch Fiber）训练</a:t>
+            </a:r>
+          </a:p>
+        </p:txBody>
+      </p:sp>
+      <p:sp>
+        <p:nvSpPr>
+          <p:cNvPr id="9" name="TextBox 8"/>
           <p:cNvSpPr txBox="1"/>
           <p:nvPr/>
         </p:nvSpPr>
@@ -13162,56 +15144,20 @@
               </a:defRPr>
             </a:pPr>
             <a:r>
-              <a:t>▸ 患者感受：酥麻感，舒适 → 临床中常被忽略但极关键</a:t>
-            </a:r>
-          </a:p>
-        </p:txBody>
-      </p:sp>
-      <p:sp>
-        <p:nvSpPr>
-          <p:cNvPr id="8" name="TextBox 7"/>
-          <p:cNvSpPr txBox="1"/>
-          <p:nvPr/>
-        </p:nvSpPr>
-        <p:spPr>
-          <a:xfrm>
-            <a:off x="640080" y="2788920"/>
-            <a:ext cx="10972800" cy="365760"/>
-          </a:xfrm>
-          <a:prstGeom prst="rect">
-            <a:avLst/>
-          </a:prstGeom>
-          <a:noFill/>
-        </p:spPr>
-        <p:txBody>
-          <a:bodyPr wrap="square">
-            <a:spAutoFit/>
-          </a:bodyPr>
-          <a:lstStyle/>
-          <a:p>
-            <a:pPr algn="l">
-              <a:defRPr sz="1700" b="1">
-                <a:solidFill>
-                  <a:srgbClr val="004C80"/>
-                </a:solidFill>
-                <a:latin typeface="微软雅黑"/>
-              </a:defRPr>
-            </a:pPr>
-            <a:r>
-              <a:t>NMES（神经肌肉电刺激）</a:t>
-            </a:r>
-          </a:p>
-        </p:txBody>
-      </p:sp>
-      <p:sp>
-        <p:nvSpPr>
-          <p:cNvPr id="9" name="TextBox 8"/>
-          <p:cNvSpPr txBox="1"/>
-          <p:nvPr/>
-        </p:nvSpPr>
-        <p:spPr>
-          <a:xfrm>
-            <a:off x="822960" y="3154680"/>
+              <a:t>▸    频率：20-30Hz | 脉宽：300-500μs</a:t>
+            </a:r>
+          </a:p>
+        </p:txBody>
+      </p:sp>
+      <p:sp>
+        <p:nvSpPr>
+          <p:cNvPr id="10" name="TextBox 9"/>
+          <p:cNvSpPr txBox="1"/>
+          <p:nvPr/>
+        </p:nvSpPr>
+        <p:spPr>
+          <a:xfrm>
+            <a:off x="822960" y="2788920"/>
             <a:ext cx="10332720" cy="320040"/>
           </a:xfrm>
           <a:prstGeom prst="rect">
@@ -13234,20 +15180,20 @@
               </a:defRPr>
             </a:pPr>
             <a:r>
-              <a:t>▸ 频率20-50Hz | 机制：直接激活运动神经引起肌肉收缩</a:t>
-            </a:r>
-          </a:p>
-        </p:txBody>
-      </p:sp>
-      <p:sp>
-        <p:nvSpPr>
-          <p:cNvPr id="10" name="TextBox 9"/>
-          <p:cNvSpPr txBox="1"/>
-          <p:nvPr/>
-        </p:nvSpPr>
-        <p:spPr>
-          <a:xfrm>
-            <a:off x="822960" y="3474720"/>
+              <a:t>▸    功能：维持静息张力，提供器官支撑</a:t>
+            </a:r>
+          </a:p>
+        </p:txBody>
+      </p:sp>
+      <p:sp>
+        <p:nvSpPr>
+          <p:cNvPr id="11" name="TextBox 10"/>
+          <p:cNvSpPr txBox="1"/>
+          <p:nvPr/>
+        </p:nvSpPr>
+        <p:spPr>
+          <a:xfrm>
+            <a:off x="822960" y="3108960"/>
             <a:ext cx="10332720" cy="320040"/>
           </a:xfrm>
           <a:prstGeom prst="rect">
@@ -13270,20 +15216,20 @@
               </a:defRPr>
             </a:pPr>
             <a:r>
-              <a:t>▸ 应用：盆底肌无力、尿失禁、器官脱垂</a:t>
-            </a:r>
-          </a:p>
-        </p:txBody>
-      </p:sp>
-      <p:sp>
-        <p:nvSpPr>
-          <p:cNvPr id="11" name="TextBox 10"/>
-          <p:cNvSpPr txBox="1"/>
-          <p:nvPr/>
-        </p:nvSpPr>
-        <p:spPr>
-          <a:xfrm>
-            <a:off x="822960" y="3794760"/>
+              <a:t>▸    应用：器官脱垂、慢性盆底疼痛</a:t>
+            </a:r>
+          </a:p>
+        </p:txBody>
+      </p:sp>
+      <p:sp>
+        <p:nvSpPr>
+          <p:cNvPr id="12" name="TextBox 11"/>
+          <p:cNvSpPr txBox="1"/>
+          <p:nvPr/>
+        </p:nvSpPr>
+        <p:spPr>
+          <a:xfrm>
+            <a:off x="822960" y="3429000"/>
             <a:ext cx="10332720" cy="320040"/>
           </a:xfrm>
           <a:prstGeom prst="rect">
@@ -13306,43 +15252,7 @@
               </a:defRPr>
             </a:pPr>
             <a:r>
-              <a:t>▸ 患者感受：肌肉被'拉紧'或'提起' → 需调整强度防止不适</a:t>
-            </a:r>
-          </a:p>
-        </p:txBody>
-      </p:sp>
-      <p:sp>
-        <p:nvSpPr>
-          <p:cNvPr id="12" name="TextBox 11"/>
-          <p:cNvSpPr txBox="1"/>
-          <p:nvPr/>
-        </p:nvSpPr>
-        <p:spPr>
-          <a:xfrm>
-            <a:off x="640080" y="4114800"/>
-            <a:ext cx="10972800" cy="365760"/>
-          </a:xfrm>
-          <a:prstGeom prst="rect">
-            <a:avLst/>
-          </a:prstGeom>
-          <a:noFill/>
-        </p:spPr>
-        <p:txBody>
-          <a:bodyPr wrap="square">
-            <a:spAutoFit/>
-          </a:bodyPr>
-          <a:lstStyle/>
-          <a:p>
-            <a:pPr algn="l">
-              <a:defRPr sz="1700" b="1">
-                <a:solidFill>
-                  <a:srgbClr val="004C80"/>
-                </a:solidFill>
-                <a:latin typeface="微软雅黑"/>
-              </a:defRPr>
-            </a:pPr>
-            <a:r>
-              <a:t>MENS（微电流刺激）</a:t>
+              <a:t>▸ </a:t>
             </a:r>
           </a:p>
         </p:txBody>
@@ -13355,7 +15265,7 @@
         </p:nvSpPr>
         <p:spPr>
           <a:xfrm>
-            <a:off x="822960" y="4480560"/>
+            <a:off x="822960" y="3749040"/>
             <a:ext cx="10332720" cy="320040"/>
           </a:xfrm>
           <a:prstGeom prst="rect">
@@ -13378,7 +15288,7 @@
               </a:defRPr>
             </a:pPr>
             <a:r>
-              <a:t>▸ 频率&lt;1Hz | 机制：促进ATP合成、细胞修复、减轻炎症</a:t>
+              <a:t>▸ Ⅱ类肌（快肌纤维/Fast-Twitch Fiber）训练</a:t>
             </a:r>
           </a:p>
         </p:txBody>
@@ -13391,7 +15301,7 @@
         </p:nvSpPr>
         <p:spPr>
           <a:xfrm>
-            <a:off x="822960" y="4800600"/>
+            <a:off x="822960" y="4069080"/>
             <a:ext cx="10332720" cy="320040"/>
           </a:xfrm>
           <a:prstGeom prst="rect">
@@ -13414,7 +15324,7 @@
               </a:defRPr>
             </a:pPr>
             <a:r>
-              <a:t>▸ 应用：外阴白斑、伤口愈合、组织修复</a:t>
+              <a:t>▸    频率：35-50Hz | 脉宽：100-200μs</a:t>
             </a:r>
           </a:p>
         </p:txBody>
@@ -13427,7 +15337,7 @@
         </p:nvSpPr>
         <p:spPr>
           <a:xfrm>
-            <a:off x="822960" y="5120640"/>
+            <a:off x="822960" y="4389120"/>
             <a:ext cx="10332720" cy="320040"/>
           </a:xfrm>
           <a:prstGeom prst="rect">
@@ -13450,7 +15360,7 @@
               </a:defRPr>
             </a:pPr>
             <a:r>
-              <a:t>▸ 患者感受：通常无感觉或极轻微</a:t>
+              <a:t>▸    功能：快速闭合尿道和肛门括约肌，应对腹压骤增</a:t>
             </a:r>
           </a:p>
         </p:txBody>
@@ -13463,30 +15373,30 @@
         </p:nvSpPr>
         <p:spPr>
           <a:xfrm>
-            <a:off x="640080" y="5440680"/>
-            <a:ext cx="10972800" cy="365760"/>
-          </a:xfrm>
-          <a:prstGeom prst="rect">
-            <a:avLst/>
-          </a:prstGeom>
-          <a:noFill/>
-        </p:spPr>
-        <p:txBody>
-          <a:bodyPr wrap="square">
-            <a:spAutoFit/>
-          </a:bodyPr>
-          <a:lstStyle/>
-          <a:p>
-            <a:pPr algn="l">
-              <a:defRPr sz="1700" b="1">
-                <a:solidFill>
-                  <a:srgbClr val="004C80"/>
-                </a:solidFill>
-                <a:latin typeface="微软雅黑"/>
-              </a:defRPr>
-            </a:pPr>
-            <a:r>
-              <a:t>IFC（干扰电疗法）</a:t>
+            <a:off x="822960" y="4709160"/>
+            <a:ext cx="10332720" cy="320040"/>
+          </a:xfrm>
+          <a:prstGeom prst="rect">
+            <a:avLst/>
+          </a:prstGeom>
+          <a:noFill/>
+        </p:spPr>
+        <p:txBody>
+          <a:bodyPr wrap="square">
+            <a:spAutoFit/>
+          </a:bodyPr>
+          <a:lstStyle/>
+          <a:p>
+            <a:pPr algn="l">
+              <a:defRPr sz="1600" b="0">
+                <a:solidFill>
+                  <a:srgbClr val="282828"/>
+                </a:solidFill>
+                <a:latin typeface="微软雅黑"/>
+              </a:defRPr>
+            </a:pPr>
+            <a:r>
+              <a:t>▸    应用：压力性尿失禁、急迫性尿失禁</a:t>
             </a:r>
           </a:p>
         </p:txBody>
@@ -13499,7 +15409,7 @@
         </p:nvSpPr>
         <p:spPr>
           <a:xfrm>
-            <a:off x="822960" y="5806440"/>
+            <a:off x="822960" y="5029200"/>
             <a:ext cx="10332720" cy="320040"/>
           </a:xfrm>
           <a:prstGeom prst="rect">
@@ -13522,7 +15432,7 @@
               </a:defRPr>
             </a:pPr>
             <a:r>
-              <a:t>▸ 频率4000Hz±100Hz交叉 | 机制：两路中频交叉形成低频干扰场</a:t>
+              <a:t>▸ </a:t>
             </a:r>
           </a:p>
         </p:txBody>
@@ -13535,7 +15445,7 @@
         </p:nvSpPr>
         <p:spPr>
           <a:xfrm>
-            <a:off x="822960" y="6126480"/>
+            <a:off x="822960" y="5349240"/>
             <a:ext cx="10332720" cy="320040"/>
           </a:xfrm>
           <a:prstGeom prst="rect">
@@ -13558,7 +15468,7 @@
               </a:defRPr>
             </a:pPr>
             <a:r>
-              <a:t>▸ 应用：深层盆腔疼痛、慢性盆腔炎</a:t>
+              <a:t>▸ 混合训练方案</a:t>
             </a:r>
           </a:p>
         </p:txBody>
@@ -13571,7 +15481,7 @@
         </p:nvSpPr>
         <p:spPr>
           <a:xfrm>
-            <a:off x="822960" y="6446520"/>
+            <a:off x="822960" y="5669280"/>
             <a:ext cx="10332720" cy="320040"/>
           </a:xfrm>
           <a:prstGeom prst="rect">
@@ -13594,7 +15504,151 @@
               </a:defRPr>
             </a:pPr>
             <a:r>
-              <a:t>▸ 患者感受：深部温热感+收缩感</a:t>
+              <a:t>▸    频率：20-50Hz交替 | 脉宽：100-500μs交替</a:t>
+            </a:r>
+          </a:p>
+        </p:txBody>
+      </p:sp>
+      <p:sp>
+        <p:nvSpPr>
+          <p:cNvPr id="20" name="TextBox 19"/>
+          <p:cNvSpPr txBox="1"/>
+          <p:nvPr/>
+        </p:nvSpPr>
+        <p:spPr>
+          <a:xfrm>
+            <a:off x="822960" y="5989320"/>
+            <a:ext cx="10332720" cy="320040"/>
+          </a:xfrm>
+          <a:prstGeom prst="rect">
+            <a:avLst/>
+          </a:prstGeom>
+          <a:noFill/>
+        </p:spPr>
+        <p:txBody>
+          <a:bodyPr wrap="square">
+            <a:spAutoFit/>
+          </a:bodyPr>
+          <a:lstStyle/>
+          <a:p>
+            <a:pPr algn="l">
+              <a:defRPr sz="1600" b="0">
+                <a:solidFill>
+                  <a:srgbClr val="282828"/>
+                </a:solidFill>
+                <a:latin typeface="微软雅黑"/>
+              </a:defRPr>
+            </a:pPr>
+            <a:r>
+              <a:t>▸    目的：同时激活I类和II类肌纤维</a:t>
+            </a:r>
+          </a:p>
+        </p:txBody>
+      </p:sp>
+      <p:sp>
+        <p:nvSpPr>
+          <p:cNvPr id="21" name="TextBox 20"/>
+          <p:cNvSpPr txBox="1"/>
+          <p:nvPr/>
+        </p:nvSpPr>
+        <p:spPr>
+          <a:xfrm>
+            <a:off x="822960" y="6309360"/>
+            <a:ext cx="10332720" cy="320040"/>
+          </a:xfrm>
+          <a:prstGeom prst="rect">
+            <a:avLst/>
+          </a:prstGeom>
+          <a:noFill/>
+        </p:spPr>
+        <p:txBody>
+          <a:bodyPr wrap="square">
+            <a:spAutoFit/>
+          </a:bodyPr>
+          <a:lstStyle/>
+          <a:p>
+            <a:pPr algn="l">
+              <a:defRPr sz="1600" b="0">
+                <a:solidFill>
+                  <a:srgbClr val="282828"/>
+                </a:solidFill>
+                <a:latin typeface="微软雅黑"/>
+              </a:defRPr>
+            </a:pPr>
+            <a:r>
+              <a:t>▸    应用：混合型盆底功能障碍</a:t>
+            </a:r>
+          </a:p>
+        </p:txBody>
+      </p:sp>
+      <p:sp>
+        <p:nvSpPr>
+          <p:cNvPr id="22" name="TextBox 21"/>
+          <p:cNvSpPr txBox="1"/>
+          <p:nvPr/>
+        </p:nvSpPr>
+        <p:spPr>
+          <a:xfrm>
+            <a:off x="822960" y="6629400"/>
+            <a:ext cx="10332720" cy="320040"/>
+          </a:xfrm>
+          <a:prstGeom prst="rect">
+            <a:avLst/>
+          </a:prstGeom>
+          <a:noFill/>
+        </p:spPr>
+        <p:txBody>
+          <a:bodyPr wrap="square">
+            <a:spAutoFit/>
+          </a:bodyPr>
+          <a:lstStyle/>
+          <a:p>
+            <a:pPr algn="l">
+              <a:defRPr sz="1600" b="0">
+                <a:solidFill>
+                  <a:srgbClr val="282828"/>
+                </a:solidFill>
+                <a:latin typeface="微软雅黑"/>
+              </a:defRPr>
+            </a:pPr>
+            <a:r>
+              <a:t>▸ </a:t>
+            </a:r>
+          </a:p>
+        </p:txBody>
+      </p:sp>
+      <p:sp>
+        <p:nvSpPr>
+          <p:cNvPr id="23" name="TextBox 22"/>
+          <p:cNvSpPr txBox="1"/>
+          <p:nvPr/>
+        </p:nvSpPr>
+        <p:spPr>
+          <a:xfrm>
+            <a:off x="640080" y="6949440"/>
+            <a:ext cx="10515600" cy="320040"/>
+          </a:xfrm>
+          <a:prstGeom prst="rect">
+            <a:avLst/>
+          </a:prstGeom>
+          <a:noFill/>
+        </p:spPr>
+        <p:txBody>
+          <a:bodyPr wrap="square">
+            <a:spAutoFit/>
+          </a:bodyPr>
+          <a:lstStyle/>
+          <a:p>
+            <a:pPr algn="l">
+              <a:defRPr sz="1400" b="0">
+                <a:solidFill>
+                  <a:srgbClr val="E67E22"/>
+                </a:solidFill>
+                <a:latin typeface="微软雅黑"/>
+              </a:defRPr>
+            </a:pPr>
+            <a:r>
+              <a:t>📌 关键原则：频率决定激活的肌纤维类型，脉宽决定穿透深度和舒适度</a:t>
             </a:r>
           </a:p>
         </p:txBody>
@@ -13691,7 +15745,7 @@
           <a:lstStyle/>
           <a:p>
             <a:pPr algn="l">
-              <a:defRPr sz="2600" b="1">
+              <a:defRPr sz="2800" b="1">
                 <a:solidFill>
                   <a:srgbClr val="FFFFFF"/>
                 </a:solidFill>
@@ -13699,7 +15753,7 @@
               </a:defRPr>
             </a:pPr>
             <a:r>
-              <a:t>第三章  电刺激波形深度分类</a:t>
+              <a:t>电刺激与神经可塑性</a:t>
             </a:r>
           </a:p>
         </p:txBody>
@@ -13712,30 +15766,30 @@
         </p:nvSpPr>
         <p:spPr>
           <a:xfrm>
-            <a:off x="457200" y="1554480"/>
-            <a:ext cx="5303520" cy="320040"/>
-          </a:xfrm>
-          <a:prstGeom prst="rect">
-            <a:avLst/>
-          </a:prstGeom>
-          <a:noFill/>
-        </p:spPr>
-        <p:txBody>
-          <a:bodyPr wrap="square">
-            <a:spAutoFit/>
-          </a:bodyPr>
-          <a:lstStyle/>
-          <a:p>
-            <a:pPr algn="l">
-              <a:defRPr sz="1500" b="0">
-                <a:solidFill>
-                  <a:srgbClr val="282828"/>
-                </a:solidFill>
-                <a:latin typeface="微软雅黑"/>
-              </a:defRPr>
-            </a:pPr>
-            <a:r>
-              <a:t>▸ ## 六种基本波形</a:t>
+            <a:off x="640080" y="1463040"/>
+            <a:ext cx="10972800" cy="365760"/>
+          </a:xfrm>
+          <a:prstGeom prst="rect">
+            <a:avLst/>
+          </a:prstGeom>
+          <a:noFill/>
+        </p:spPr>
+        <p:txBody>
+          <a:bodyPr wrap="square">
+            <a:spAutoFit/>
+          </a:bodyPr>
+          <a:lstStyle/>
+          <a:p>
+            <a:pPr algn="l">
+              <a:defRPr sz="1700" b="1">
+                <a:solidFill>
+                  <a:srgbClr val="004C80"/>
+                </a:solidFill>
+                <a:latin typeface="微软雅黑"/>
+              </a:defRPr>
+            </a:pPr>
+            <a:r>
+              <a:t>为什么NMES能促进神经再支配？</a:t>
             </a:r>
           </a:p>
         </p:txBody>
@@ -13748,30 +15802,30 @@
         </p:nvSpPr>
         <p:spPr>
           <a:xfrm>
-            <a:off x="457200" y="1874520"/>
-            <a:ext cx="5303520" cy="320040"/>
-          </a:xfrm>
-          <a:prstGeom prst="rect">
-            <a:avLst/>
-          </a:prstGeom>
-          <a:noFill/>
-        </p:spPr>
-        <p:txBody>
-          <a:bodyPr wrap="square">
-            <a:spAutoFit/>
-          </a:bodyPr>
-          <a:lstStyle/>
-          <a:p>
-            <a:pPr algn="l">
-              <a:defRPr sz="1500" b="0">
-                <a:solidFill>
-                  <a:srgbClr val="282828"/>
-                </a:solidFill>
-                <a:latin typeface="微软雅黑"/>
-              </a:defRPr>
-            </a:pPr>
-            <a:r>
-              <a:t>▸ 方波：陡峭沿，高效但舒适度差</a:t>
+            <a:off x="822960" y="1828800"/>
+            <a:ext cx="10332720" cy="320040"/>
+          </a:xfrm>
+          <a:prstGeom prst="rect">
+            <a:avLst/>
+          </a:prstGeom>
+          <a:noFill/>
+        </p:spPr>
+        <p:txBody>
+          <a:bodyPr wrap="square">
+            <a:spAutoFit/>
+          </a:bodyPr>
+          <a:lstStyle/>
+          <a:p>
+            <a:pPr algn="l">
+              <a:defRPr sz="1600" b="0">
+                <a:solidFill>
+                  <a:srgbClr val="282828"/>
+                </a:solidFill>
+                <a:latin typeface="微软雅黑"/>
+              </a:defRPr>
+            </a:pPr>
+            <a:r>
+              <a:t>▸ NMES通过重复性电刺激激活运动神经末梢</a:t>
             </a:r>
           </a:p>
         </p:txBody>
@@ -13784,30 +15838,38 @@
         </p:nvSpPr>
         <p:spPr>
           <a:xfrm>
-            <a:off x="457200" y="2194560"/>
-            <a:ext cx="5303520" cy="320040"/>
-          </a:xfrm>
-          <a:prstGeom prst="rect">
-            <a:avLst/>
-          </a:prstGeom>
-          <a:noFill/>
-        </p:spPr>
-        <p:txBody>
-          <a:bodyPr wrap="square">
-            <a:spAutoFit/>
-          </a:bodyPr>
-          <a:lstStyle/>
-          <a:p>
-            <a:pPr algn="l">
-              <a:defRPr sz="1500" b="0">
-                <a:solidFill>
-                  <a:srgbClr val="282828"/>
-                </a:solidFill>
-                <a:latin typeface="微软雅黑"/>
-              </a:defRPr>
-            </a:pPr>
-            <a:r>
-              <a:t>▸ 三角波：缓慢上升，最舒适但效率最低</a:t>
+            <a:off x="822960" y="2148840"/>
+            <a:ext cx="10332720" cy="320040"/>
+          </a:xfrm>
+          <a:prstGeom prst="rect">
+            <a:avLst/>
+          </a:prstGeom>
+          <a:noFill/>
+        </p:spPr>
+        <p:txBody>
+          <a:bodyPr wrap="square">
+            <a:spAutoFit/>
+          </a:bodyPr>
+          <a:lstStyle/>
+          <a:p>
+            <a:pPr algn="l">
+              <a:defRPr sz="1600" b="0">
+                <a:solidFill>
+                  <a:srgbClr val="282828"/>
+                </a:solidFill>
+                <a:latin typeface="微软雅黑"/>
+              </a:defRPr>
+            </a:pPr>
+            <a:r>
+              <a:t>▸ → 促进突触可塑性 </a:t>
+            </a:r>
+            <a:br/>
+            <a:r>
+              <a:t>→ 增强神经递质释放效率 </a:t>
+            </a:r>
+            <a:br/>
+            <a:r>
+              <a:t>→ 重建神经-肌肉连接通路</a:t>
             </a:r>
           </a:p>
         </p:txBody>
@@ -13820,30 +15882,30 @@
         </p:nvSpPr>
         <p:spPr>
           <a:xfrm>
-            <a:off x="457200" y="2514600"/>
-            <a:ext cx="5303520" cy="320040"/>
-          </a:xfrm>
-          <a:prstGeom prst="rect">
-            <a:avLst/>
-          </a:prstGeom>
-          <a:noFill/>
-        </p:spPr>
-        <p:txBody>
-          <a:bodyPr wrap="square">
-            <a:spAutoFit/>
-          </a:bodyPr>
-          <a:lstStyle/>
-          <a:p>
-            <a:pPr algn="l">
-              <a:defRPr sz="1500" b="0">
-                <a:solidFill>
-                  <a:srgbClr val="282828"/>
-                </a:solidFill>
-                <a:latin typeface="微软雅黑"/>
-              </a:defRPr>
-            </a:pPr>
-            <a:r>
-              <a:t>▸ 正弦波：平滑连续，适合TENS镇痛</a:t>
+            <a:off x="640080" y="2468880"/>
+            <a:ext cx="10972800" cy="365760"/>
+          </a:xfrm>
+          <a:prstGeom prst="rect">
+            <a:avLst/>
+          </a:prstGeom>
+          <a:noFill/>
+        </p:spPr>
+        <p:txBody>
+          <a:bodyPr wrap="square">
+            <a:spAutoFit/>
+          </a:bodyPr>
+          <a:lstStyle/>
+          <a:p>
+            <a:pPr algn="l">
+              <a:defRPr sz="1700" b="1">
+                <a:solidFill>
+                  <a:srgbClr val="004C80"/>
+                </a:solidFill>
+                <a:latin typeface="微软雅黑"/>
+              </a:defRPr>
+            </a:pPr>
+            <a:r>
+              <a:t>关键机制</a:t>
             </a:r>
           </a:p>
         </p:txBody>
@@ -13856,30 +15918,30 @@
         </p:nvSpPr>
         <p:spPr>
           <a:xfrm>
-            <a:off x="457200" y="2834640"/>
-            <a:ext cx="5303520" cy="320040"/>
-          </a:xfrm>
-          <a:prstGeom prst="rect">
-            <a:avLst/>
-          </a:prstGeom>
-          <a:noFill/>
-        </p:spPr>
-        <p:txBody>
-          <a:bodyPr wrap="square">
-            <a:spAutoFit/>
-          </a:bodyPr>
-          <a:lstStyle/>
-          <a:p>
-            <a:pPr algn="l">
-              <a:defRPr sz="1500" b="0">
-                <a:solidFill>
-                  <a:srgbClr val="282828"/>
-                </a:solidFill>
-                <a:latin typeface="微软雅黑"/>
-              </a:defRPr>
-            </a:pPr>
-            <a:r>
-              <a:t>▸ 指数波：模拟动作电位上升支，去神经肌肉首选</a:t>
+            <a:off x="822960" y="2834640"/>
+            <a:ext cx="10332720" cy="320040"/>
+          </a:xfrm>
+          <a:prstGeom prst="rect">
+            <a:avLst/>
+          </a:prstGeom>
+          <a:noFill/>
+        </p:spPr>
+        <p:txBody>
+          <a:bodyPr wrap="square">
+            <a:spAutoFit/>
+          </a:bodyPr>
+          <a:lstStyle/>
+          <a:p>
+            <a:pPr algn="l">
+              <a:defRPr sz="1600" b="0">
+                <a:solidFill>
+                  <a:srgbClr val="282828"/>
+                </a:solidFill>
+                <a:latin typeface="微软雅黑"/>
+              </a:defRPr>
+            </a:pPr>
+            <a:r>
+              <a:t>▸ 长时程增强（LTP）效应：高频重复刺激 → 突触传递效率持久增强</a:t>
             </a:r>
           </a:p>
         </p:txBody>
@@ -13892,30 +15954,30 @@
         </p:nvSpPr>
         <p:spPr>
           <a:xfrm>
-            <a:off x="457200" y="3154680"/>
-            <a:ext cx="5303520" cy="320040"/>
-          </a:xfrm>
-          <a:prstGeom prst="rect">
-            <a:avLst/>
-          </a:prstGeom>
-          <a:noFill/>
-        </p:spPr>
-        <p:txBody>
-          <a:bodyPr wrap="square">
-            <a:spAutoFit/>
-          </a:bodyPr>
-          <a:lstStyle/>
-          <a:p>
-            <a:pPr algn="l">
-              <a:defRPr sz="1500" b="0">
-                <a:solidFill>
-                  <a:srgbClr val="282828"/>
-                </a:solidFill>
-                <a:latin typeface="微软雅黑"/>
-              </a:defRPr>
-            </a:pPr>
-            <a:r>
-              <a:t>▸ 双向平衡波：净电荷为零，盆底首选</a:t>
+            <a:off x="822960" y="3154680"/>
+            <a:ext cx="10332720" cy="320040"/>
+          </a:xfrm>
+          <a:prstGeom prst="rect">
+            <a:avLst/>
+          </a:prstGeom>
+          <a:noFill/>
+        </p:spPr>
+        <p:txBody>
+          <a:bodyPr wrap="square">
+            <a:spAutoFit/>
+          </a:bodyPr>
+          <a:lstStyle/>
+          <a:p>
+            <a:pPr algn="l">
+              <a:defRPr sz="1600" b="0">
+                <a:solidFill>
+                  <a:srgbClr val="282828"/>
+                </a:solidFill>
+                <a:latin typeface="微软雅黑"/>
+              </a:defRPr>
+            </a:pPr>
+            <a:r>
+              <a:t>▸ 运动皮质重塑：电刺激激活本体感觉传入 → 改变运动皮质映射区</a:t>
             </a:r>
           </a:p>
         </p:txBody>
@@ -13928,74 +15990,67 @@
         </p:nvSpPr>
         <p:spPr>
           <a:xfrm>
-            <a:off x="457200" y="3474720"/>
-            <a:ext cx="5303520" cy="320040"/>
-          </a:xfrm>
-          <a:prstGeom prst="rect">
-            <a:avLst/>
-          </a:prstGeom>
-          <a:noFill/>
-        </p:spPr>
-        <p:txBody>
-          <a:bodyPr wrap="square">
-            <a:spAutoFit/>
-          </a:bodyPr>
-          <a:lstStyle/>
-          <a:p>
-            <a:pPr algn="l">
-              <a:defRPr sz="1500" b="0">
-                <a:solidFill>
-                  <a:srgbClr val="282828"/>
-                </a:solidFill>
-                <a:latin typeface="微软雅黑"/>
-              </a:defRPr>
-            </a:pPr>
-            <a:r>
-              <a:t>▸ 双向不平衡波：微弱直流效应</a:t>
-            </a:r>
-          </a:p>
-        </p:txBody>
-      </p:sp>
-      <p:sp>
-        <p:nvSpPr>
-          <p:cNvPr id="11" name="Rectangle 10"/>
-          <p:cNvSpPr/>
-          <p:nvPr/>
-        </p:nvSpPr>
-        <p:spPr>
-          <a:xfrm>
-            <a:off x="6035040" y="1371600"/>
-            <a:ext cx="18288" cy="5029200"/>
-          </a:xfrm>
-          <a:prstGeom prst="rect">
-            <a:avLst/>
-          </a:prstGeom>
-          <a:solidFill>
-            <a:srgbClr val="B4B4B4"/>
-          </a:solidFill>
-          <a:ln>
-            <a:noFill/>
-          </a:ln>
-        </p:spPr>
-        <p:style>
-          <a:lnRef idx="1">
-            <a:schemeClr val="accent1"/>
-          </a:lnRef>
-          <a:fillRef idx="3">
-            <a:schemeClr val="accent1"/>
-          </a:fillRef>
-          <a:effectRef idx="2">
-            <a:schemeClr val="accent1"/>
-          </a:effectRef>
-          <a:fontRef idx="minor">
-            <a:schemeClr val="lt1"/>
-          </a:fontRef>
-        </p:style>
-        <p:txBody>
-          <a:bodyPr rtlCol="0" anchor="ctr"/>
-          <a:lstStyle/>
-          <a:p>
-            <a:pPr algn="ctr"/>
+            <a:off x="822960" y="3474720"/>
+            <a:ext cx="10332720" cy="320040"/>
+          </a:xfrm>
+          <a:prstGeom prst="rect">
+            <a:avLst/>
+          </a:prstGeom>
+          <a:noFill/>
+        </p:spPr>
+        <p:txBody>
+          <a:bodyPr wrap="square">
+            <a:spAutoFit/>
+          </a:bodyPr>
+          <a:lstStyle/>
+          <a:p>
+            <a:pPr algn="l">
+              <a:defRPr sz="1600" b="0">
+                <a:solidFill>
+                  <a:srgbClr val="282828"/>
+                </a:solidFill>
+                <a:latin typeface="微软雅黑"/>
+              </a:defRPr>
+            </a:pPr>
+            <a:r>
+              <a:t>▸ 神经再支配：去神经肌肉通过电刺激 → 轴突芽生和运动单位重组</a:t>
+            </a:r>
+          </a:p>
+        </p:txBody>
+      </p:sp>
+      <p:sp>
+        <p:nvSpPr>
+          <p:cNvPr id="11" name="TextBox 10"/>
+          <p:cNvSpPr txBox="1"/>
+          <p:nvPr/>
+        </p:nvSpPr>
+        <p:spPr>
+          <a:xfrm>
+            <a:off x="640080" y="3794760"/>
+            <a:ext cx="10972800" cy="365760"/>
+          </a:xfrm>
+          <a:prstGeom prst="rect">
+            <a:avLst/>
+          </a:prstGeom>
+          <a:noFill/>
+        </p:spPr>
+        <p:txBody>
+          <a:bodyPr wrap="square">
+            <a:spAutoFit/>
+          </a:bodyPr>
+          <a:lstStyle/>
+          <a:p>
+            <a:pPr algn="l">
+              <a:defRPr sz="1700" b="1">
+                <a:solidFill>
+                  <a:srgbClr val="004C80"/>
+                </a:solidFill>
+                <a:latin typeface="微软雅黑"/>
+              </a:defRPr>
+            </a:pPr>
+            <a:r>
+              <a:t>临床证据</a:t>
+            </a:r>
           </a:p>
         </p:txBody>
       </p:sp>
@@ -14007,30 +16062,30 @@
         </p:nvSpPr>
         <p:spPr>
           <a:xfrm>
-            <a:off x="6217920" y="1554480"/>
-            <a:ext cx="5486400" cy="320040"/>
-          </a:xfrm>
-          <a:prstGeom prst="rect">
-            <a:avLst/>
-          </a:prstGeom>
-          <a:noFill/>
-        </p:spPr>
-        <p:txBody>
-          <a:bodyPr wrap="square">
-            <a:spAutoFit/>
-          </a:bodyPr>
-          <a:lstStyle/>
-          <a:p>
-            <a:pPr algn="l">
-              <a:defRPr sz="1500" b="0">
-                <a:solidFill>
-                  <a:srgbClr val="282828"/>
-                </a:solidFill>
-                <a:latin typeface="微软雅黑"/>
-              </a:defRPr>
-            </a:pPr>
-            <a:r>
-              <a:t>▸ ## 波形调制方式</a:t>
+            <a:off x="822960" y="4160520"/>
+            <a:ext cx="10332720" cy="320040"/>
+          </a:xfrm>
+          <a:prstGeom prst="rect">
+            <a:avLst/>
+          </a:prstGeom>
+          <a:noFill/>
+        </p:spPr>
+        <p:txBody>
+          <a:bodyPr wrap="square">
+            <a:spAutoFit/>
+          </a:bodyPr>
+          <a:lstStyle/>
+          <a:p>
+            <a:pPr algn="l">
+              <a:defRPr sz="1600" b="0">
+                <a:solidFill>
+                  <a:srgbClr val="282828"/>
+                </a:solidFill>
+                <a:latin typeface="微软雅黑"/>
+              </a:defRPr>
+            </a:pPr>
+            <a:r>
+              <a:t>▸ 持续4周以上NMES → 运动诱发电位(MEP)振幅显著增加</a:t>
             </a:r>
           </a:p>
         </p:txBody>
@@ -14043,30 +16098,30 @@
         </p:nvSpPr>
         <p:spPr>
           <a:xfrm>
-            <a:off x="6217920" y="1874520"/>
-            <a:ext cx="5486400" cy="320040"/>
-          </a:xfrm>
-          <a:prstGeom prst="rect">
-            <a:avLst/>
-          </a:prstGeom>
-          <a:noFill/>
-        </p:spPr>
-        <p:txBody>
-          <a:bodyPr wrap="square">
-            <a:spAutoFit/>
-          </a:bodyPr>
-          <a:lstStyle/>
-          <a:p>
-            <a:pPr algn="l">
-              <a:defRPr sz="1500" b="0">
-                <a:solidFill>
-                  <a:srgbClr val="282828"/>
-                </a:solidFill>
-                <a:latin typeface="微软雅黑"/>
-              </a:defRPr>
-            </a:pPr>
-            <a:r>
-              <a:t>▸ 连续波(CW)：恒定输出 → 持续收缩</a:t>
+            <a:off x="822960" y="4480560"/>
+            <a:ext cx="10332720" cy="320040"/>
+          </a:xfrm>
+          <a:prstGeom prst="rect">
+            <a:avLst/>
+          </a:prstGeom>
+          <a:noFill/>
+        </p:spPr>
+        <p:txBody>
+          <a:bodyPr wrap="square">
+            <a:spAutoFit/>
+          </a:bodyPr>
+          <a:lstStyle/>
+          <a:p>
+            <a:pPr algn="l">
+              <a:defRPr sz="1600" b="0">
+                <a:solidFill>
+                  <a:srgbClr val="282828"/>
+                </a:solidFill>
+                <a:latin typeface="微软雅黑"/>
+              </a:defRPr>
+            </a:pPr>
+            <a:r>
+              <a:t>▸ 联合生物反馈 → 效果优于单纯电刺激</a:t>
             </a:r>
           </a:p>
         </p:txBody>
@@ -14079,210 +16134,30 @@
         </p:nvSpPr>
         <p:spPr>
           <a:xfrm>
-            <a:off x="6217920" y="2194560"/>
-            <a:ext cx="5486400" cy="320040"/>
-          </a:xfrm>
-          <a:prstGeom prst="rect">
-            <a:avLst/>
-          </a:prstGeom>
-          <a:noFill/>
-        </p:spPr>
-        <p:txBody>
-          <a:bodyPr wrap="square">
-            <a:spAutoFit/>
-          </a:bodyPr>
-          <a:lstStyle/>
-          <a:p>
-            <a:pPr algn="l">
-              <a:defRPr sz="1500" b="0">
-                <a:solidFill>
-                  <a:srgbClr val="282828"/>
-                </a:solidFill>
-                <a:latin typeface="微软雅黑"/>
-              </a:defRPr>
-            </a:pPr>
-            <a:r>
-              <a:t>▸ 间歇波(Burst)：群+休止 → 防疲劳</a:t>
-            </a:r>
-          </a:p>
-        </p:txBody>
-      </p:sp>
-      <p:sp>
-        <p:nvSpPr>
-          <p:cNvPr id="15" name="TextBox 14"/>
-          <p:cNvSpPr txBox="1"/>
-          <p:nvPr/>
-        </p:nvSpPr>
-        <p:spPr>
-          <a:xfrm>
-            <a:off x="6217920" y="2514600"/>
-            <a:ext cx="5486400" cy="320040"/>
-          </a:xfrm>
-          <a:prstGeom prst="rect">
-            <a:avLst/>
-          </a:prstGeom>
-          <a:noFill/>
-        </p:spPr>
-        <p:txBody>
-          <a:bodyPr wrap="square">
-            <a:spAutoFit/>
-          </a:bodyPr>
-          <a:lstStyle/>
-          <a:p>
-            <a:pPr algn="l">
-              <a:defRPr sz="1500" b="0">
-                <a:solidFill>
-                  <a:srgbClr val="282828"/>
-                </a:solidFill>
-                <a:latin typeface="微软雅黑"/>
-              </a:defRPr>
-            </a:pPr>
-            <a:r>
-              <a:t>▸ 调幅波(AM)：幅度变化 → 防适应性</a:t>
-            </a:r>
-          </a:p>
-        </p:txBody>
-      </p:sp>
-      <p:sp>
-        <p:nvSpPr>
-          <p:cNvPr id="16" name="TextBox 15"/>
-          <p:cNvSpPr txBox="1"/>
-          <p:nvPr/>
-        </p:nvSpPr>
-        <p:spPr>
-          <a:xfrm>
-            <a:off x="6217920" y="2834640"/>
-            <a:ext cx="5486400" cy="320040"/>
-          </a:xfrm>
-          <a:prstGeom prst="rect">
-            <a:avLst/>
-          </a:prstGeom>
-          <a:noFill/>
-        </p:spPr>
-        <p:txBody>
-          <a:bodyPr wrap="square">
-            <a:spAutoFit/>
-          </a:bodyPr>
-          <a:lstStyle/>
-          <a:p>
-            <a:pPr algn="l">
-              <a:defRPr sz="1500" b="0">
-                <a:solidFill>
-                  <a:srgbClr val="282828"/>
-                </a:solidFill>
-                <a:latin typeface="微软雅黑"/>
-              </a:defRPr>
-            </a:pPr>
-            <a:r>
-              <a:t>▸ 调频波(FM)：频率变化 → 覆盖多肌纤维</a:t>
-            </a:r>
-          </a:p>
-        </p:txBody>
-      </p:sp>
-      <p:sp>
-        <p:nvSpPr>
-          <p:cNvPr id="17" name="TextBox 16"/>
-          <p:cNvSpPr txBox="1"/>
-          <p:nvPr/>
-        </p:nvSpPr>
-        <p:spPr>
-          <a:xfrm>
-            <a:off x="6217920" y="3154680"/>
-            <a:ext cx="5486400" cy="320040"/>
-          </a:xfrm>
-          <a:prstGeom prst="rect">
-            <a:avLst/>
-          </a:prstGeom>
-          <a:noFill/>
-        </p:spPr>
-        <p:txBody>
-          <a:bodyPr wrap="square">
-            <a:spAutoFit/>
-          </a:bodyPr>
-          <a:lstStyle/>
-          <a:p>
-            <a:pPr algn="l">
-              <a:defRPr sz="1500" b="0">
-                <a:solidFill>
-                  <a:srgbClr val="282828"/>
-                </a:solidFill>
-                <a:latin typeface="微软雅黑"/>
-              </a:defRPr>
-            </a:pPr>
-            <a:r>
-              <a:t>▸ ## 关键关系</a:t>
-            </a:r>
-          </a:p>
-        </p:txBody>
-      </p:sp>
-      <p:sp>
-        <p:nvSpPr>
-          <p:cNvPr id="18" name="TextBox 17"/>
-          <p:cNvSpPr txBox="1"/>
-          <p:nvPr/>
-        </p:nvSpPr>
-        <p:spPr>
-          <a:xfrm>
-            <a:off x="6217920" y="3474720"/>
-            <a:ext cx="5486400" cy="320040"/>
-          </a:xfrm>
-          <a:prstGeom prst="rect">
-            <a:avLst/>
-          </a:prstGeom>
-          <a:noFill/>
-        </p:spPr>
-        <p:txBody>
-          <a:bodyPr wrap="square">
-            <a:spAutoFit/>
-          </a:bodyPr>
-          <a:lstStyle/>
-          <a:p>
-            <a:pPr algn="l">
-              <a:defRPr sz="1500" b="0">
-                <a:solidFill>
-                  <a:srgbClr val="282828"/>
-                </a:solidFill>
-                <a:latin typeface="微软雅黑"/>
-              </a:defRPr>
-            </a:pPr>
-            <a:r>
-              <a:t>▸ 窄脉宽 → 需更高强度才能激活运动单位</a:t>
-            </a:r>
-          </a:p>
-        </p:txBody>
-      </p:sp>
-      <p:sp>
-        <p:nvSpPr>
-          <p:cNvPr id="19" name="TextBox 18"/>
-          <p:cNvSpPr txBox="1"/>
-          <p:nvPr/>
-        </p:nvSpPr>
-        <p:spPr>
-          <a:xfrm>
-            <a:off x="6217920" y="3794760"/>
-            <a:ext cx="5486400" cy="320040"/>
-          </a:xfrm>
-          <a:prstGeom prst="rect">
-            <a:avLst/>
-          </a:prstGeom>
-          <a:noFill/>
-        </p:spPr>
-        <p:txBody>
-          <a:bodyPr wrap="square">
-            <a:spAutoFit/>
-          </a:bodyPr>
-          <a:lstStyle/>
-          <a:p>
-            <a:pPr algn="l">
-              <a:defRPr sz="1500" b="0">
-                <a:solidFill>
-                  <a:srgbClr val="282828"/>
-                </a:solidFill>
-                <a:latin typeface="微软雅黑"/>
-              </a:defRPr>
-            </a:pPr>
-            <a:r>
-              <a:t>▸ 宽脉宽(&gt;300μs) → 激活阈值低，舒适度下降</a:t>
+            <a:off x="640080" y="4800600"/>
+            <a:ext cx="10515600" cy="320040"/>
+          </a:xfrm>
+          <a:prstGeom prst="rect">
+            <a:avLst/>
+          </a:prstGeom>
+          <a:noFill/>
+        </p:spPr>
+        <p:txBody>
+          <a:bodyPr wrap="square">
+            <a:spAutoFit/>
+          </a:bodyPr>
+          <a:lstStyle/>
+          <a:p>
+            <a:pPr algn="l">
+              <a:defRPr sz="1400" b="0">
+                <a:solidFill>
+                  <a:srgbClr val="E67E22"/>
+                </a:solidFill>
+                <a:latin typeface="微软雅黑"/>
+              </a:defRPr>
+            </a:pPr>
+            <a:r>
+              <a:t>📌 学术引用：Sheffler LR, Chae J. Neuromuscular electrical stimulation in neurorehabilitation. Muscle Nerve. 2007; Glazer HI, et al. J Urol. 1995.</a:t>
             </a:r>
           </a:p>
         </p:txBody>
@@ -14387,7 +16262,7 @@
               </a:defRPr>
             </a:pPr>
             <a:r>
-              <a:t>波形选择决策树</a:t>
+              <a:t>各类电刺激详解与患者感受</a:t>
             </a:r>
           </a:p>
         </p:txBody>
@@ -14400,7 +16275,43 @@
         </p:nvSpPr>
         <p:spPr>
           <a:xfrm>
-            <a:off x="822960" y="1463040"/>
+            <a:off x="640080" y="1463040"/>
+            <a:ext cx="10972800" cy="365760"/>
+          </a:xfrm>
+          <a:prstGeom prst="rect">
+            <a:avLst/>
+          </a:prstGeom>
+          <a:noFill/>
+        </p:spPr>
+        <p:txBody>
+          <a:bodyPr wrap="square">
+            <a:spAutoFit/>
+          </a:bodyPr>
+          <a:lstStyle/>
+          <a:p>
+            <a:pPr algn="l">
+              <a:defRPr sz="1700" b="1">
+                <a:solidFill>
+                  <a:srgbClr val="004C80"/>
+                </a:solidFill>
+                <a:latin typeface="微软雅黑"/>
+              </a:defRPr>
+            </a:pPr>
+            <a:r>
+              <a:t>TENS（经皮神经电刺激）</a:t>
+            </a:r>
+          </a:p>
+        </p:txBody>
+      </p:sp>
+      <p:sp>
+        <p:nvSpPr>
+          <p:cNvPr id="5" name="TextBox 4"/>
+          <p:cNvSpPr txBox="1"/>
+          <p:nvPr/>
+        </p:nvSpPr>
+        <p:spPr>
+          <a:xfrm>
+            <a:off x="822960" y="1828800"/>
             <a:ext cx="10332720" cy="320040"/>
           </a:xfrm>
           <a:prstGeom prst="rect">
@@ -14423,20 +16334,20 @@
               </a:defRPr>
             </a:pPr>
             <a:r>
-              <a:t>▸ 是否需要深层作用？</a:t>
-            </a:r>
-          </a:p>
-        </p:txBody>
-      </p:sp>
-      <p:sp>
-        <p:nvSpPr>
-          <p:cNvPr id="5" name="TextBox 4"/>
-          <p:cNvSpPr txBox="1"/>
-          <p:nvPr/>
-        </p:nvSpPr>
-        <p:spPr>
-          <a:xfrm>
-            <a:off x="822960" y="1783080"/>
+              <a:t>▸ 频率50-150Hz | 机制：闸门控制理论+内源性阿片肽释放</a:t>
+            </a:r>
+          </a:p>
+        </p:txBody>
+      </p:sp>
+      <p:sp>
+        <p:nvSpPr>
+          <p:cNvPr id="6" name="TextBox 5"/>
+          <p:cNvSpPr txBox="1"/>
+          <p:nvPr/>
+        </p:nvSpPr>
+        <p:spPr>
+          <a:xfrm>
+            <a:off x="822960" y="2148840"/>
             <a:ext cx="10332720" cy="320040"/>
           </a:xfrm>
           <a:prstGeom prst="rect">
@@ -14459,20 +16370,20 @@
               </a:defRPr>
             </a:pPr>
             <a:r>
-              <a:t>▸   ├─ 是 → 中频干扰电（IFC）</a:t>
-            </a:r>
-          </a:p>
-        </p:txBody>
-      </p:sp>
-      <p:sp>
-        <p:nvSpPr>
-          <p:cNvPr id="6" name="TextBox 5"/>
-          <p:cNvSpPr txBox="1"/>
-          <p:nvPr/>
-        </p:nvSpPr>
-        <p:spPr>
-          <a:xfrm>
-            <a:off x="822960" y="2103120"/>
+              <a:t>▸ 应用：慢性盆腔疼痛、产后伤口痛、性交痛</a:t>
+            </a:r>
+          </a:p>
+        </p:txBody>
+      </p:sp>
+      <p:sp>
+        <p:nvSpPr>
+          <p:cNvPr id="7" name="TextBox 6"/>
+          <p:cNvSpPr txBox="1"/>
+          <p:nvPr/>
+        </p:nvSpPr>
+        <p:spPr>
+          <a:xfrm>
+            <a:off x="822960" y="2468880"/>
             <a:ext cx="10332720" cy="320040"/>
           </a:xfrm>
           <a:prstGeom prst="rect">
@@ -14495,20 +16406,56 @@
               </a:defRPr>
             </a:pPr>
             <a:r>
-              <a:t>▸   └─ 否 → 继续判断</a:t>
-            </a:r>
-          </a:p>
-        </p:txBody>
-      </p:sp>
-      <p:sp>
-        <p:nvSpPr>
-          <p:cNvPr id="7" name="TextBox 6"/>
-          <p:cNvSpPr txBox="1"/>
-          <p:nvPr/>
-        </p:nvSpPr>
-        <p:spPr>
-          <a:xfrm>
-            <a:off x="822960" y="2423160"/>
+              <a:t>▸ 患者感受：酥麻感，舒适 → 临床中常被忽略但极关键</a:t>
+            </a:r>
+          </a:p>
+        </p:txBody>
+      </p:sp>
+      <p:sp>
+        <p:nvSpPr>
+          <p:cNvPr id="8" name="TextBox 7"/>
+          <p:cNvSpPr txBox="1"/>
+          <p:nvPr/>
+        </p:nvSpPr>
+        <p:spPr>
+          <a:xfrm>
+            <a:off x="640080" y="2788920"/>
+            <a:ext cx="10972800" cy="365760"/>
+          </a:xfrm>
+          <a:prstGeom prst="rect">
+            <a:avLst/>
+          </a:prstGeom>
+          <a:noFill/>
+        </p:spPr>
+        <p:txBody>
+          <a:bodyPr wrap="square">
+            <a:spAutoFit/>
+          </a:bodyPr>
+          <a:lstStyle/>
+          <a:p>
+            <a:pPr algn="l">
+              <a:defRPr sz="1700" b="1">
+                <a:solidFill>
+                  <a:srgbClr val="004C80"/>
+                </a:solidFill>
+                <a:latin typeface="微软雅黑"/>
+              </a:defRPr>
+            </a:pPr>
+            <a:r>
+              <a:t>NMES（神经肌肉电刺激）</a:t>
+            </a:r>
+          </a:p>
+        </p:txBody>
+      </p:sp>
+      <p:sp>
+        <p:nvSpPr>
+          <p:cNvPr id="9" name="TextBox 8"/>
+          <p:cNvSpPr txBox="1"/>
+          <p:nvPr/>
+        </p:nvSpPr>
+        <p:spPr>
+          <a:xfrm>
+            <a:off x="822960" y="3154680"/>
             <a:ext cx="10332720" cy="320040"/>
           </a:xfrm>
           <a:prstGeom prst="rect">
@@ -14531,20 +16478,20 @@
               </a:defRPr>
             </a:pPr>
             <a:r>
-              <a:t>▸ 是否需要组织修复（外阴白斑、伤口愈合）？</a:t>
-            </a:r>
-          </a:p>
-        </p:txBody>
-      </p:sp>
-      <p:sp>
-        <p:nvSpPr>
-          <p:cNvPr id="8" name="TextBox 7"/>
-          <p:cNvSpPr txBox="1"/>
-          <p:nvPr/>
-        </p:nvSpPr>
-        <p:spPr>
-          <a:xfrm>
-            <a:off x="822960" y="2743200"/>
+              <a:t>▸ 频率20-50Hz | 机制：直接激活运动神经引起肌肉收缩</a:t>
+            </a:r>
+          </a:p>
+        </p:txBody>
+      </p:sp>
+      <p:sp>
+        <p:nvSpPr>
+          <p:cNvPr id="10" name="TextBox 9"/>
+          <p:cNvSpPr txBox="1"/>
+          <p:nvPr/>
+        </p:nvSpPr>
+        <p:spPr>
+          <a:xfrm>
+            <a:off x="822960" y="3474720"/>
             <a:ext cx="10332720" cy="320040"/>
           </a:xfrm>
           <a:prstGeom prst="rect">
@@ -14567,20 +16514,20 @@
               </a:defRPr>
             </a:pPr>
             <a:r>
-              <a:t>▸   ├─ 是 → MENS微电流 + 双向平衡波</a:t>
-            </a:r>
-          </a:p>
-        </p:txBody>
-      </p:sp>
-      <p:sp>
-        <p:nvSpPr>
-          <p:cNvPr id="9" name="TextBox 8"/>
-          <p:cNvSpPr txBox="1"/>
-          <p:nvPr/>
-        </p:nvSpPr>
-        <p:spPr>
-          <a:xfrm>
-            <a:off x="822960" y="3063240"/>
+              <a:t>▸ 应用：盆底肌无力、尿失禁、器官脱垂</a:t>
+            </a:r>
+          </a:p>
+        </p:txBody>
+      </p:sp>
+      <p:sp>
+        <p:nvSpPr>
+          <p:cNvPr id="11" name="TextBox 10"/>
+          <p:cNvSpPr txBox="1"/>
+          <p:nvPr/>
+        </p:nvSpPr>
+        <p:spPr>
+          <a:xfrm>
+            <a:off x="822960" y="3794760"/>
             <a:ext cx="10332720" cy="320040"/>
           </a:xfrm>
           <a:prstGeom prst="rect">
@@ -14603,20 +16550,56 @@
               </a:defRPr>
             </a:pPr>
             <a:r>
-              <a:t>▸   └─ 否 → 继续判断</a:t>
-            </a:r>
-          </a:p>
-        </p:txBody>
-      </p:sp>
-      <p:sp>
-        <p:nvSpPr>
-          <p:cNvPr id="10" name="TextBox 9"/>
-          <p:cNvSpPr txBox="1"/>
-          <p:nvPr/>
-        </p:nvSpPr>
-        <p:spPr>
-          <a:xfrm>
-            <a:off x="822960" y="3383280"/>
+              <a:t>▸ 患者感受：肌肉被'拉紧'或'提起' → 需调整强度防止不适</a:t>
+            </a:r>
+          </a:p>
+        </p:txBody>
+      </p:sp>
+      <p:sp>
+        <p:nvSpPr>
+          <p:cNvPr id="12" name="TextBox 11"/>
+          <p:cNvSpPr txBox="1"/>
+          <p:nvPr/>
+        </p:nvSpPr>
+        <p:spPr>
+          <a:xfrm>
+            <a:off x="640080" y="4114800"/>
+            <a:ext cx="10972800" cy="365760"/>
+          </a:xfrm>
+          <a:prstGeom prst="rect">
+            <a:avLst/>
+          </a:prstGeom>
+          <a:noFill/>
+        </p:spPr>
+        <p:txBody>
+          <a:bodyPr wrap="square">
+            <a:spAutoFit/>
+          </a:bodyPr>
+          <a:lstStyle/>
+          <a:p>
+            <a:pPr algn="l">
+              <a:defRPr sz="1700" b="1">
+                <a:solidFill>
+                  <a:srgbClr val="004C80"/>
+                </a:solidFill>
+                <a:latin typeface="微软雅黑"/>
+              </a:defRPr>
+            </a:pPr>
+            <a:r>
+              <a:t>MENS（微电流刺激）</a:t>
+            </a:r>
+          </a:p>
+        </p:txBody>
+      </p:sp>
+      <p:sp>
+        <p:nvSpPr>
+          <p:cNvPr id="13" name="TextBox 12"/>
+          <p:cNvSpPr txBox="1"/>
+          <p:nvPr/>
+        </p:nvSpPr>
+        <p:spPr>
+          <a:xfrm>
+            <a:off x="822960" y="4480560"/>
             <a:ext cx="10332720" cy="320040"/>
           </a:xfrm>
           <a:prstGeom prst="rect">
@@ -14639,20 +16622,20 @@
               </a:defRPr>
             </a:pPr>
             <a:r>
-              <a:t>▸ 是否需要肌肉力量重建？</a:t>
-            </a:r>
-          </a:p>
-        </p:txBody>
-      </p:sp>
-      <p:sp>
-        <p:nvSpPr>
-          <p:cNvPr id="11" name="TextBox 10"/>
-          <p:cNvSpPr txBox="1"/>
-          <p:nvPr/>
-        </p:nvSpPr>
-        <p:spPr>
-          <a:xfrm>
-            <a:off x="822960" y="3703320"/>
+              <a:t>▸ 频率&lt;1Hz | 机制：促进ATP合成、细胞修复、减轻炎症</a:t>
+            </a:r>
+          </a:p>
+        </p:txBody>
+      </p:sp>
+      <p:sp>
+        <p:nvSpPr>
+          <p:cNvPr id="14" name="TextBox 13"/>
+          <p:cNvSpPr txBox="1"/>
+          <p:nvPr/>
+        </p:nvSpPr>
+        <p:spPr>
+          <a:xfrm>
+            <a:off x="822960" y="4800600"/>
             <a:ext cx="10332720" cy="320040"/>
           </a:xfrm>
           <a:prstGeom prst="rect">
@@ -14675,20 +16658,20 @@
               </a:defRPr>
             </a:pPr>
             <a:r>
-              <a:t>▸   ├─ 是 → NMES + 方波/双向平衡波</a:t>
-            </a:r>
-          </a:p>
-        </p:txBody>
-      </p:sp>
-      <p:sp>
-        <p:nvSpPr>
-          <p:cNvPr id="12" name="TextBox 11"/>
-          <p:cNvSpPr txBox="1"/>
-          <p:nvPr/>
-        </p:nvSpPr>
-        <p:spPr>
-          <a:xfrm>
-            <a:off x="822960" y="4023360"/>
+              <a:t>▸ 应用：外阴白斑、伤口愈合、组织修复</a:t>
+            </a:r>
+          </a:p>
+        </p:txBody>
+      </p:sp>
+      <p:sp>
+        <p:nvSpPr>
+          <p:cNvPr id="15" name="TextBox 14"/>
+          <p:cNvSpPr txBox="1"/>
+          <p:nvPr/>
+        </p:nvSpPr>
+        <p:spPr>
+          <a:xfrm>
+            <a:off x="822960" y="5120640"/>
             <a:ext cx="10332720" cy="320040"/>
           </a:xfrm>
           <a:prstGeom prst="rect">
@@ -14711,20 +16694,56 @@
               </a:defRPr>
             </a:pPr>
             <a:r>
-              <a:t>▸   └─ 否 → 继续判断</a:t>
-            </a:r>
-          </a:p>
-        </p:txBody>
-      </p:sp>
-      <p:sp>
-        <p:nvSpPr>
-          <p:cNvPr id="13" name="TextBox 12"/>
-          <p:cNvSpPr txBox="1"/>
-          <p:nvPr/>
-        </p:nvSpPr>
-        <p:spPr>
-          <a:xfrm>
-            <a:off x="822960" y="4343400"/>
+              <a:t>▸ 患者感受：通常无感觉或极轻微</a:t>
+            </a:r>
+          </a:p>
+        </p:txBody>
+      </p:sp>
+      <p:sp>
+        <p:nvSpPr>
+          <p:cNvPr id="16" name="TextBox 15"/>
+          <p:cNvSpPr txBox="1"/>
+          <p:nvPr/>
+        </p:nvSpPr>
+        <p:spPr>
+          <a:xfrm>
+            <a:off x="640080" y="5440680"/>
+            <a:ext cx="10972800" cy="365760"/>
+          </a:xfrm>
+          <a:prstGeom prst="rect">
+            <a:avLst/>
+          </a:prstGeom>
+          <a:noFill/>
+        </p:spPr>
+        <p:txBody>
+          <a:bodyPr wrap="square">
+            <a:spAutoFit/>
+          </a:bodyPr>
+          <a:lstStyle/>
+          <a:p>
+            <a:pPr algn="l">
+              <a:defRPr sz="1700" b="1">
+                <a:solidFill>
+                  <a:srgbClr val="004C80"/>
+                </a:solidFill>
+                <a:latin typeface="微软雅黑"/>
+              </a:defRPr>
+            </a:pPr>
+            <a:r>
+              <a:t>IFC（干扰电疗法）</a:t>
+            </a:r>
+          </a:p>
+        </p:txBody>
+      </p:sp>
+      <p:sp>
+        <p:nvSpPr>
+          <p:cNvPr id="17" name="TextBox 16"/>
+          <p:cNvSpPr txBox="1"/>
+          <p:nvPr/>
+        </p:nvSpPr>
+        <p:spPr>
+          <a:xfrm>
+            <a:off x="822960" y="5806440"/>
             <a:ext cx="10332720" cy="320040"/>
           </a:xfrm>
           <a:prstGeom prst="rect">
@@ -14747,20 +16766,20 @@
               </a:defRPr>
             </a:pPr>
             <a:r>
-              <a:t>▸ 是否以镇痛为主？</a:t>
-            </a:r>
-          </a:p>
-        </p:txBody>
-      </p:sp>
-      <p:sp>
-        <p:nvSpPr>
-          <p:cNvPr id="14" name="TextBox 13"/>
-          <p:cNvSpPr txBox="1"/>
-          <p:nvPr/>
-        </p:nvSpPr>
-        <p:spPr>
-          <a:xfrm>
-            <a:off x="822960" y="4663440"/>
+              <a:t>▸ 频率4000Hz±100Hz交叉 | 机制：两路中频交叉形成低频干扰场</a:t>
+            </a:r>
+          </a:p>
+        </p:txBody>
+      </p:sp>
+      <p:sp>
+        <p:nvSpPr>
+          <p:cNvPr id="18" name="TextBox 17"/>
+          <p:cNvSpPr txBox="1"/>
+          <p:nvPr/>
+        </p:nvSpPr>
+        <p:spPr>
+          <a:xfrm>
+            <a:off x="822960" y="6126480"/>
             <a:ext cx="10332720" cy="320040"/>
           </a:xfrm>
           <a:prstGeom prst="rect">
@@ -14783,20 +16802,20 @@
               </a:defRPr>
             </a:pPr>
             <a:r>
-              <a:t>▸   ├─ 是 → TENS + 正弦波/三角波</a:t>
-            </a:r>
-          </a:p>
-        </p:txBody>
-      </p:sp>
-      <p:sp>
-        <p:nvSpPr>
-          <p:cNvPr id="15" name="TextBox 14"/>
-          <p:cNvSpPr txBox="1"/>
-          <p:nvPr/>
-        </p:nvSpPr>
-        <p:spPr>
-          <a:xfrm>
-            <a:off x="822960" y="4983480"/>
+              <a:t>▸ 应用：深层盆腔疼痛、慢性盆腔炎</a:t>
+            </a:r>
+          </a:p>
+        </p:txBody>
+      </p:sp>
+      <p:sp>
+        <p:nvSpPr>
+          <p:cNvPr id="19" name="TextBox 18"/>
+          <p:cNvSpPr txBox="1"/>
+          <p:nvPr/>
+        </p:nvSpPr>
+        <p:spPr>
+          <a:xfrm>
+            <a:off x="822960" y="6446520"/>
             <a:ext cx="10332720" cy="320040"/>
           </a:xfrm>
           <a:prstGeom prst="rect">
@@ -14819,79 +16838,7 @@
               </a:defRPr>
             </a:pPr>
             <a:r>
-              <a:t>▸   └─ 否 → 综合评估后定制</a:t>
-            </a:r>
-          </a:p>
-        </p:txBody>
-      </p:sp>
-      <p:sp>
-        <p:nvSpPr>
-          <p:cNvPr id="16" name="TextBox 15"/>
-          <p:cNvSpPr txBox="1"/>
-          <p:nvPr/>
-        </p:nvSpPr>
-        <p:spPr>
-          <a:xfrm>
-            <a:off x="640080" y="5303520"/>
-            <a:ext cx="10515600" cy="320040"/>
-          </a:xfrm>
-          <a:prstGeom prst="rect">
-            <a:avLst/>
-          </a:prstGeom>
-          <a:noFill/>
-        </p:spPr>
-        <p:txBody>
-          <a:bodyPr wrap="square">
-            <a:spAutoFit/>
-          </a:bodyPr>
-          <a:lstStyle/>
-          <a:p>
-            <a:pPr algn="l">
-              <a:defRPr sz="1400" b="0">
-                <a:solidFill>
-                  <a:srgbClr val="E67E22"/>
-                </a:solidFill>
-                <a:latin typeface="微软雅黑"/>
-              </a:defRPr>
-            </a:pPr>
-            <a:r>
-              <a:t>📌 补充：指数波适用于去神经肌肉（如脊髓损伤后），因模拟动作电位上升支更接近生理状态</a:t>
-            </a:r>
-          </a:p>
-        </p:txBody>
-      </p:sp>
-      <p:sp>
-        <p:nvSpPr>
-          <p:cNvPr id="17" name="TextBox 16"/>
-          <p:cNvSpPr txBox="1"/>
-          <p:nvPr/>
-        </p:nvSpPr>
-        <p:spPr>
-          <a:xfrm>
-            <a:off x="640080" y="5623560"/>
-            <a:ext cx="10515600" cy="320040"/>
-          </a:xfrm>
-          <a:prstGeom prst="rect">
-            <a:avLst/>
-          </a:prstGeom>
-          <a:noFill/>
-        </p:spPr>
-        <p:txBody>
-          <a:bodyPr wrap="square">
-            <a:spAutoFit/>
-          </a:bodyPr>
-          <a:lstStyle/>
-          <a:p>
-            <a:pPr algn="l">
-              <a:defRPr sz="1400" b="0">
-                <a:solidFill>
-                  <a:srgbClr val="E67E22"/>
-                </a:solidFill>
-                <a:latin typeface="微软雅黑"/>
-              </a:defRPr>
-            </a:pPr>
-            <a:r>
-              <a:t>📌 补充：窄脉宽需更高电流强度才能激活运动单位——脉宽与阈值电流呈反比关系</a:t>
+              <a:t>▸ 患者感受：深部温热感+收缩感</a:t>
             </a:r>
           </a:p>
         </p:txBody>
